--- a/static/ppts/G6_Math_T2_Fraction_Basics.pptx
+++ b/static/ppts/G6_Math_T2_Fraction_Basics.pptx
@@ -9,9 +9,10 @@
     <p:sldId id="257" r:id="rId3"/>
     <p:sldId id="258" r:id="rId4"/>
     <p:sldId id="259" r:id="rId5"/>
+    <p:sldId id="260" r:id="rId6"/>
   </p:sldIdLst>
   <p:notesMasterIdLst>
-    <p:notesMasterId r:id="rId6"/>
+    <p:notesMasterId r:id="rId7"/>
   </p:notesMasterIdLst>
   <p:sldSz cx="9144000" cy="5143500"/>
   <p:notesSz cx="5143500" cy="9144000"/>
@@ -811,6 +812,94 @@
 </p:notes>
 </file>
 
+<file path=ppt/notesSlides/notesSlide5.xml><?xml version="1.0" encoding="utf-8"?>
+<p:notes xmlns:a="http://schemas.openxmlformats.org/drawingml/2006/main" xmlns:r="http://schemas.openxmlformats.org/officeDocument/2006/relationships" xmlns:p="http://schemas.openxmlformats.org/presentationml/2006/main">
+  <p:cSld>
+    <p:spTree>
+      <p:nvGrpSpPr>
+        <p:cNvPr id="1" name=""/>
+        <p:cNvGrpSpPr/>
+        <p:nvPr/>
+      </p:nvGrpSpPr>
+      <p:grpSpPr>
+        <a:xfrm>
+          <a:off x="0" y="0"/>
+          <a:ext cx="0" cy="0"/>
+          <a:chOff x="0" y="0"/>
+          <a:chExt cx="0" cy="0"/>
+        </a:xfrm>
+      </p:grpSpPr>
+      <p:sp>
+        <p:nvSpPr>
+          <p:cNvPr id="2" name="Slide Image Placeholder 1"/>
+          <p:cNvSpPr>
+            <a:spLocks noGrp="1" noRot="1" noChangeAspect="1"/>
+          </p:cNvSpPr>
+          <p:nvPr>
+            <p:ph type="sldImg"/>
+          </p:nvPr>
+        </p:nvSpPr>
+        <p:spPr/>
+      </p:sp>
+      <p:sp>
+        <p:nvSpPr>
+          <p:cNvPr id="3" name="Notes Placeholder 2"/>
+          <p:cNvSpPr>
+            <a:spLocks noGrp="1"/>
+          </p:cNvSpPr>
+          <p:nvPr>
+            <p:ph type="body" idx="1"/>
+          </p:nvPr>
+        </p:nvSpPr>
+        <p:spPr/>
+        <p:txBody>
+          <a:bodyPr/>
+          <a:lstStyle/>
+          <a:p>
+            <a:r>
+              <a:rPr lang="en-US" dirty="0"/>
+              <a:t/>
+            </a:r>
+            <a:endParaRPr lang="en-US" dirty="0"/>
+          </a:p>
+        </p:txBody>
+      </p:sp>
+      <p:sp>
+        <p:nvSpPr>
+          <p:cNvPr id="4" name="Slide Number Placeholder 3"/>
+          <p:cNvSpPr>
+            <a:spLocks noGrp="1"/>
+          </p:cNvSpPr>
+          <p:nvPr>
+            <p:ph type="sldNum" sz="quarter" idx="10"/>
+          </p:nvPr>
+        </p:nvSpPr>
+        <p:spPr/>
+        <p:txBody>
+          <a:bodyPr/>
+          <a:lstStyle/>
+          <a:p>
+            <a:fld id="{F7021451-1387-4CA6-816F-3879F97B5CBC}" type="slidenum">
+              <a:rPr lang="en-US"/>
+              <a:t>5</a:t>
+            </a:fld>
+            <a:endParaRPr lang="en-US"/>
+          </a:p>
+        </p:txBody>
+      </p:sp>
+    </p:spTree>
+    <p:extLst>
+      <p:ext uri="{BB962C8B-B14F-4D97-AF65-F5344CB8AC3E}">
+        <p14:creationId xmlns:p14="http://schemas.microsoft.com/office/powerpoint/2010/main" val="1024086991"/>
+      </p:ext>
+    </p:extLst>
+  </p:cSld>
+  <p:clrMapOvr>
+    <a:masterClrMapping/>
+  </p:clrMapOvr>
+</p:notes>
+</file>
+
 <file path=ppt/slideLayouts/slideLayout1.xml><?xml version="1.0" encoding="utf-8"?>
 <p:sldLayout xmlns:a="http://schemas.openxmlformats.org/drawingml/2006/main" xmlns:r="http://schemas.openxmlformats.org/officeDocument/2006/relationships" xmlns:p="http://schemas.openxmlformats.org/presentationml/2006/main" preserve="1">
   <p:cSld name="DEFAULT">
@@ -1170,7 +1259,7 @@
         </p:nvSpPr>
         <p:spPr>
           <a:xfrm>
-            <a:off x="731520" y="1280160"/>
+            <a:off x="731520" y="1097280"/>
             <a:ext cx="7772400" cy="1371600"/>
           </a:xfrm>
           <a:prstGeom prst="rect">
@@ -1187,7 +1276,7 @@
               <a:buNone/>
             </a:pPr>
             <a:r>
-              <a:rPr lang="en-US" sz="3600" b="1" dirty="0">
+              <a:rPr lang="en-US" sz="4000" b="1" dirty="0">
                 <a:solidFill>
                   <a:srgbClr val="FFFFFF"/>
                 </a:solidFill>
@@ -1197,7 +1286,7 @@
               </a:rPr>
               <a:t>Understanding Fractions</a:t>
             </a:r>
-            <a:endParaRPr lang="en-US" sz="3600" dirty="0"/>
+            <a:endParaRPr lang="en-US" sz="4000" dirty="0"/>
           </a:p>
         </p:txBody>
       </p:sp>
@@ -1209,7 +1298,7 @@
         </p:nvSpPr>
         <p:spPr>
           <a:xfrm>
-            <a:off x="731520" y="2743200"/>
+            <a:off x="731520" y="2560320"/>
             <a:ext cx="7772400" cy="548640"/>
           </a:xfrm>
           <a:prstGeom prst="rect">
@@ -1228,13 +1317,13 @@
             <a:r>
               <a:rPr lang="en-US" sz="1600" dirty="0">
                 <a:solidFill>
-                  <a:srgbClr val="9B9690"/>
+                  <a:srgbClr val="E9C46A"/>
                 </a:solidFill>
                 <a:latin typeface="Calibri" pitchFamily="34" charset="0"/>
                 <a:ea typeface="Calibri" pitchFamily="34" charset="-122"/>
                 <a:cs typeface="Calibri" pitchFamily="34" charset="-120"/>
               </a:rPr>
-              <a:t>G6 Maths · Fractions &amp; Decimals</a:t>
+              <a:t>Grade 6 Mathematics · Mr Zocchi</a:t>
             </a:r>
             <a:endParaRPr lang="en-US" sz="1600" dirty="0"/>
           </a:p>
@@ -1242,14 +1331,36 @@
       </p:sp>
       <p:sp>
         <p:nvSpPr>
-          <p:cNvPr id="5" name="Text 3"/>
-          <p:cNvSpPr/>
-          <p:nvPr/>
-        </p:nvSpPr>
-        <p:spPr>
-          <a:xfrm>
-            <a:off x="731520" y="4389120"/>
-            <a:ext cx="7772400" cy="457200"/>
+          <p:cNvPr id="5" name="Shape 3"/>
+          <p:cNvSpPr/>
+          <p:nvPr/>
+        </p:nvSpPr>
+        <p:spPr>
+          <a:xfrm>
+            <a:off x="731520" y="3474720"/>
+            <a:ext cx="2011680" cy="411480"/>
+          </a:xfrm>
+          <a:prstGeom prst="roundRect">
+            <a:avLst>
+              <a:gd name="adj" fmla="val 17778"/>
+            </a:avLst>
+          </a:prstGeom>
+          <a:solidFill>
+            <a:srgbClr val="2A9D8F"/>
+          </a:solidFill>
+          <a:ln/>
+        </p:spPr>
+      </p:sp>
+      <p:sp>
+        <p:nvSpPr>
+          <p:cNvPr id="6" name="Text 4"/>
+          <p:cNvSpPr/>
+          <p:nvPr/>
+        </p:nvSpPr>
+        <p:spPr>
+          <a:xfrm>
+            <a:off x="731520" y="3474720"/>
+            <a:ext cx="2011680" cy="411480"/>
           </a:xfrm>
           <a:prstGeom prst="rect">
             <a:avLst/>
@@ -1261,21 +1372,21 @@
           <a:bodyPr wrap="square" rtlCol="0" anchor="ctr"/>
           <a:lstStyle/>
           <a:p>
-            <a:pPr indent="0" marL="0">
+            <a:pPr algn="ctr" indent="0" marL="0">
               <a:buNone/>
             </a:pPr>
             <a:r>
-              <a:rPr lang="en-US" sz="1000" dirty="0">
-                <a:solidFill>
-                  <a:srgbClr val="6B6660"/>
+              <a:rPr lang="en-US" sz="1200" b="1" dirty="0">
+                <a:solidFill>
+                  <a:srgbClr val="FFFFFF"/>
                 </a:solidFill>
                 <a:latin typeface="Calibri" pitchFamily="34" charset="0"/>
                 <a:ea typeface="Calibri" pitchFamily="34" charset="-122"/>
                 <a:cs typeface="Calibri" pitchFamily="34" charset="-120"/>
               </a:rPr>
-              <a:t>Mr Zocchi · mrzocchi.com</a:t>
-            </a:r>
-            <a:endParaRPr lang="en-US" sz="1000" dirty="0"/>
+              <a:t>Term 2 · Fractions &amp; Decimals</a:t>
+            </a:r>
+            <a:endParaRPr lang="en-US" sz="1200" dirty="0"/>
           </a:p>
         </p:txBody>
       </p:sp>
@@ -1293,7 +1404,7 @@
     <p:bg>
       <p:bgPr>
         <a:solidFill>
-          <a:srgbClr val="FFFFFF"/>
+          <a:srgbClr val="FAF8F5"/>
         </a:solidFill>
       </p:bgPr>
     </p:bg>
@@ -1339,8 +1450,8 @@
         </p:nvSpPr>
         <p:spPr>
           <a:xfrm>
-            <a:off x="548640" y="274320"/>
-            <a:ext cx="8046720" cy="640080"/>
+            <a:off x="7772400" y="4709160"/>
+            <a:ext cx="1097280" cy="320040"/>
           </a:xfrm>
           <a:prstGeom prst="rect">
             <a:avLst/>
@@ -1349,14 +1460,105 @@
           <a:ln/>
         </p:spPr>
         <p:txBody>
-          <a:bodyPr wrap="square" lIns="0" tIns="0" rIns="0" bIns="0" rtlCol="0" anchor="ctr"/>
+          <a:bodyPr wrap="square" rtlCol="0" anchor="ctr"/>
+          <a:lstStyle/>
+          <a:p>
+            <a:pPr algn="r" indent="0" marL="0">
+              <a:buNone/>
+            </a:pPr>
+            <a:r>
+              <a:rPr lang="en-US" sz="900" dirty="0">
+                <a:solidFill>
+                  <a:srgbClr val="6B6660"/>
+                </a:solidFill>
+                <a:latin typeface="Calibri" pitchFamily="34" charset="0"/>
+                <a:ea typeface="Calibri" pitchFamily="34" charset="-122"/>
+                <a:cs typeface="Calibri" pitchFamily="34" charset="-120"/>
+              </a:rPr>
+              <a:t>2 / 5</a:t>
+            </a:r>
+            <a:endParaRPr lang="en-US" sz="900" dirty="0"/>
+          </a:p>
+        </p:txBody>
+      </p:sp>
+      <p:sp>
+        <p:nvSpPr>
+          <p:cNvPr id="4" name="Shape 2"/>
+          <p:cNvSpPr/>
+          <p:nvPr/>
+        </p:nvSpPr>
+        <p:spPr>
+          <a:xfrm>
+            <a:off x="1371600" y="914400"/>
+            <a:ext cx="6400800" cy="3200400"/>
+          </a:xfrm>
+          <a:prstGeom prst="rect">
+            <a:avLst/>
+          </a:prstGeom>
+          <a:solidFill>
+            <a:srgbClr val="FFFFFF"/>
+          </a:solidFill>
+          <a:ln w="12700">
+            <a:solidFill>
+              <a:srgbClr val="E5E2DC"/>
+            </a:solidFill>
+            <a:prstDash val="solid"/>
+          </a:ln>
+          <a:effectLst>
+            <a:outerShdw sx="100000" sy="100000" kx="0" ky="0" algn="bl" rotWithShape="0" blurRad="50800" dist="25400" dir="8100000">
+              <a:srgbClr val="000000">
+                <a:alpha val="10000"/>
+              </a:srgbClr>
+            </a:outerShdw>
+          </a:effectLst>
+        </p:spPr>
+      </p:sp>
+      <p:sp>
+        <p:nvSpPr>
+          <p:cNvPr id="5" name="Shape 3"/>
+          <p:cNvSpPr/>
+          <p:nvPr/>
+        </p:nvSpPr>
+        <p:spPr>
+          <a:xfrm>
+            <a:off x="1371600" y="914400"/>
+            <a:ext cx="91440" cy="3200400"/>
+          </a:xfrm>
+          <a:prstGeom prst="rect">
+            <a:avLst/>
+          </a:prstGeom>
+          <a:solidFill>
+            <a:srgbClr val="2A9D8F"/>
+          </a:solidFill>
+          <a:ln/>
+        </p:spPr>
+      </p:sp>
+      <p:sp>
+        <p:nvSpPr>
+          <p:cNvPr id="6" name="Text 4"/>
+          <p:cNvSpPr/>
+          <p:nvPr/>
+        </p:nvSpPr>
+        <p:spPr>
+          <a:xfrm>
+            <a:off x="1828800" y="1097280"/>
+            <a:ext cx="5669280" cy="640080"/>
+          </a:xfrm>
+          <a:prstGeom prst="rect">
+            <a:avLst/>
+          </a:prstGeom>
+          <a:noFill/>
+          <a:ln/>
+        </p:spPr>
+        <p:txBody>
+          <a:bodyPr wrap="square" rtlCol="0" anchor="ctr"/>
           <a:lstStyle/>
           <a:p>
             <a:pPr indent="0" marL="0">
               <a:buNone/>
             </a:pPr>
             <a:r>
-              <a:rPr lang="en-US" sz="2600" b="1" dirty="0">
+              <a:rPr lang="en-US" sz="2400" b="1" dirty="0">
                 <a:solidFill>
                   <a:srgbClr val="1B2A4A"/>
                 </a:solidFill>
@@ -1366,20 +1568,20 @@
               </a:rPr>
               <a:t>What is a Fraction?</a:t>
             </a:r>
-            <a:endParaRPr lang="en-US" sz="2600" dirty="0"/>
-          </a:p>
-        </p:txBody>
-      </p:sp>
-      <p:sp>
-        <p:nvSpPr>
-          <p:cNvPr id="4" name="Text 2"/>
-          <p:cNvSpPr/>
-          <p:nvPr/>
-        </p:nvSpPr>
-        <p:spPr>
-          <a:xfrm>
-            <a:off x="548640" y="1097280"/>
-            <a:ext cx="8046720" cy="3474720"/>
+            <a:endParaRPr lang="en-US" sz="2400" dirty="0"/>
+          </a:p>
+        </p:txBody>
+      </p:sp>
+      <p:sp>
+        <p:nvSpPr>
+          <p:cNvPr id="7" name="Text 5"/>
+          <p:cNvSpPr/>
+          <p:nvPr/>
+        </p:nvSpPr>
+        <p:spPr>
+          <a:xfrm>
+            <a:off x="1828800" y="1828800"/>
+            <a:ext cx="5669280" cy="2011680"/>
           </a:xfrm>
           <a:prstGeom prst="rect">
             <a:avLst/>
@@ -1391,12 +1593,11 @@
           <a:bodyPr wrap="square" rtlCol="0" anchor="t"/>
           <a:lstStyle/>
           <a:p>
-            <a:pPr marL="342900" indent="-342900">
-              <a:spcAft>
-                <a:spcPts val="800"/>
-              </a:spcAft>
-              <a:buSzPct val="100000"/>
-              <a:buChar char="•"/>
+            <a:pPr indent="0" marL="0">
+              <a:lnSpc>
+                <a:spcPct val="130000"/>
+              </a:lnSpc>
+              <a:buNone/>
             </a:pPr>
             <a:r>
               <a:rPr lang="en-US" sz="1500" dirty="0">
@@ -1407,150 +1608,9 @@
                 <a:ea typeface="Calibri" pitchFamily="34" charset="-122"/>
                 <a:cs typeface="Calibri" pitchFamily="34" charset="-120"/>
               </a:rPr>
-              <a:t>A fraction represents a PART of a whole</a:t>
+              <a:t>A fraction represents a part of a whole. The top number (numerator) tells us how many parts we have. The bottom number (denominator) tells us how many equal parts the whole is divided into. Example: ³⁄₄ means 3 out of 4 equal parts.</a:t>
             </a:r>
             <a:endParaRPr lang="en-US" sz="1500" dirty="0"/>
-          </a:p>
-          <a:p>
-            <a:pPr marL="342900" indent="-342900">
-              <a:spcAft>
-                <a:spcPts val="800"/>
-              </a:spcAft>
-              <a:buSzPct val="100000"/>
-              <a:buChar char="•"/>
-            </a:pPr>
-            <a:r>
-              <a:rPr lang="en-US" sz="1500" dirty="0">
-                <a:solidFill>
-                  <a:srgbClr val="3D3A36"/>
-                </a:solidFill>
-                <a:latin typeface="Calibri" pitchFamily="34" charset="0"/>
-                <a:ea typeface="Calibri" pitchFamily="34" charset="-122"/>
-                <a:cs typeface="Calibri" pitchFamily="34" charset="-120"/>
-              </a:rPr>
-              <a:t>Written as numerator/denominator (e.g., 3/4)</a:t>
-            </a:r>
-            <a:endParaRPr lang="en-US" sz="1500" dirty="0"/>
-          </a:p>
-          <a:p>
-            <a:pPr marL="342900" indent="-342900">
-              <a:spcAft>
-                <a:spcPts val="800"/>
-              </a:spcAft>
-              <a:buSzPct val="100000"/>
-              <a:buChar char="•"/>
-            </a:pPr>
-            <a:r>
-              <a:rPr lang="en-US" sz="1500" dirty="0">
-                <a:solidFill>
-                  <a:srgbClr val="3D3A36"/>
-                </a:solidFill>
-                <a:latin typeface="Calibri" pitchFamily="34" charset="0"/>
-                <a:ea typeface="Calibri" pitchFamily="34" charset="-122"/>
-                <a:cs typeface="Calibri" pitchFamily="34" charset="-120"/>
-              </a:rPr>
-              <a:t>Numerator (top): how many parts you HAVE</a:t>
-            </a:r>
-            <a:endParaRPr lang="en-US" sz="1500" dirty="0"/>
-          </a:p>
-          <a:p>
-            <a:pPr marL="342900" indent="-342900">
-              <a:spcAft>
-                <a:spcPts val="800"/>
-              </a:spcAft>
-              <a:buSzPct val="100000"/>
-              <a:buChar char="•"/>
-            </a:pPr>
-            <a:r>
-              <a:rPr lang="en-US" sz="1500" dirty="0">
-                <a:solidFill>
-                  <a:srgbClr val="3D3A36"/>
-                </a:solidFill>
-                <a:latin typeface="Calibri" pitchFamily="34" charset="0"/>
-                <a:ea typeface="Calibri" pitchFamily="34" charset="-122"/>
-                <a:cs typeface="Calibri" pitchFamily="34" charset="-120"/>
-              </a:rPr>
-              <a:t>Denominator (bottom): how many EQUAL parts the whole is divided into</a:t>
-            </a:r>
-            <a:endParaRPr lang="en-US" sz="1500" dirty="0"/>
-          </a:p>
-          <a:p>
-            <a:pPr marL="342900" indent="-342900">
-              <a:spcAft>
-                <a:spcPts val="800"/>
-              </a:spcAft>
-              <a:buSzPct val="100000"/>
-              <a:buChar char="•"/>
-            </a:pPr>
-            <a:r>
-              <a:rPr lang="en-US" sz="1500" dirty="0">
-                <a:solidFill>
-                  <a:srgbClr val="3D3A36"/>
-                </a:solidFill>
-                <a:latin typeface="Calibri" pitchFamily="34" charset="0"/>
-                <a:ea typeface="Calibri" pitchFamily="34" charset="-122"/>
-                <a:cs typeface="Calibri" pitchFamily="34" charset="-120"/>
-              </a:rPr>
-              <a:t>Proper fraction: numerator &lt; denominator (less than 1)</a:t>
-            </a:r>
-            <a:endParaRPr lang="en-US" sz="1500" dirty="0"/>
-          </a:p>
-          <a:p>
-            <a:pPr marL="342900" indent="-342900">
-              <a:spcAft>
-                <a:spcPts val="800"/>
-              </a:spcAft>
-              <a:buSzPct val="100000"/>
-              <a:buChar char="•"/>
-            </a:pPr>
-            <a:r>
-              <a:rPr lang="en-US" sz="1500" dirty="0">
-                <a:solidFill>
-                  <a:srgbClr val="3D3A36"/>
-                </a:solidFill>
-                <a:latin typeface="Calibri" pitchFamily="34" charset="0"/>
-                <a:ea typeface="Calibri" pitchFamily="34" charset="-122"/>
-                <a:cs typeface="Calibri" pitchFamily="34" charset="-120"/>
-              </a:rPr>
-              <a:t>Improper fraction: numerator ≥ denominator (1 or more)</a:t>
-            </a:r>
-            <a:endParaRPr lang="en-US" sz="1500" dirty="0"/>
-          </a:p>
-        </p:txBody>
-      </p:sp>
-      <p:sp>
-        <p:nvSpPr>
-          <p:cNvPr id="5" name="Text 3"/>
-          <p:cNvSpPr/>
-          <p:nvPr/>
-        </p:nvSpPr>
-        <p:spPr>
-          <a:xfrm>
-            <a:off x="548640" y="4800600"/>
-            <a:ext cx="3657600" cy="274320"/>
-          </a:xfrm>
-          <a:prstGeom prst="rect">
-            <a:avLst/>
-          </a:prstGeom>
-          <a:noFill/>
-          <a:ln/>
-        </p:spPr>
-        <p:txBody>
-          <a:bodyPr wrap="square" rtlCol="0" anchor="ctr"/>
-          <a:lstStyle/>
-          <a:p>
-            <a:pPr indent="0" marL="0">
-              <a:buNone/>
-            </a:pPr>
-            <a:r>
-              <a:rPr lang="en-US" sz="800" dirty="0">
-                <a:solidFill>
-                  <a:srgbClr val="9B9690"/>
-                </a:solidFill>
-              </a:rPr>
-              <a:t>mrzocchi.com</a:t>
-            </a:r>
-            <a:endParaRPr lang="en-US" sz="800" dirty="0"/>
           </a:p>
         </p:txBody>
       </p:sp>
@@ -1568,7 +1628,7 @@
     <p:bg>
       <p:bgPr>
         <a:solidFill>
-          <a:srgbClr val="FFFFFF"/>
+          <a:srgbClr val="FAF8F5"/>
         </a:solidFill>
       </p:bgPr>
     </p:bg>
@@ -1614,8 +1674,8 @@
         </p:nvSpPr>
         <p:spPr>
           <a:xfrm>
-            <a:off x="548640" y="274320"/>
-            <a:ext cx="8046720" cy="640080"/>
+            <a:off x="7772400" y="4709160"/>
+            <a:ext cx="1097280" cy="320040"/>
           </a:xfrm>
           <a:prstGeom prst="rect">
             <a:avLst/>
@@ -1624,7 +1684,46 @@
           <a:ln/>
         </p:spPr>
         <p:txBody>
-          <a:bodyPr wrap="square" lIns="0" tIns="0" rIns="0" bIns="0" rtlCol="0" anchor="ctr"/>
+          <a:bodyPr wrap="square" rtlCol="0" anchor="ctr"/>
+          <a:lstStyle/>
+          <a:p>
+            <a:pPr algn="r" indent="0" marL="0">
+              <a:buNone/>
+            </a:pPr>
+            <a:r>
+              <a:rPr lang="en-US" sz="900" dirty="0">
+                <a:solidFill>
+                  <a:srgbClr val="6B6660"/>
+                </a:solidFill>
+                <a:latin typeface="Calibri" pitchFamily="34" charset="0"/>
+                <a:ea typeface="Calibri" pitchFamily="34" charset="-122"/>
+                <a:cs typeface="Calibri" pitchFamily="34" charset="-120"/>
+              </a:rPr>
+              <a:t>3 / 5</a:t>
+            </a:r>
+            <a:endParaRPr lang="en-US" sz="900" dirty="0"/>
+          </a:p>
+        </p:txBody>
+      </p:sp>
+      <p:sp>
+        <p:nvSpPr>
+          <p:cNvPr id="4" name="Text 2"/>
+          <p:cNvSpPr/>
+          <p:nvPr/>
+        </p:nvSpPr>
+        <p:spPr>
+          <a:xfrm>
+            <a:off x="457200" y="274320"/>
+            <a:ext cx="8229600" cy="640080"/>
+          </a:xfrm>
+          <a:prstGeom prst="rect">
+            <a:avLst/>
+          </a:prstGeom>
+          <a:noFill/>
+          <a:ln/>
+        </p:spPr>
+        <p:txBody>
+          <a:bodyPr wrap="square" rtlCol="0" anchor="ctr"/>
           <a:lstStyle/>
           <a:p>
             <a:pPr indent="0" marL="0">
@@ -1639,7 +1738,7 @@
                 <a:ea typeface="Georgia" pitchFamily="34" charset="-122"/>
                 <a:cs typeface="Georgia" pitchFamily="34" charset="-120"/>
               </a:rPr>
-              <a:t>Mixed Numbers &amp; Improper Fractions</a:t>
+              <a:t>Types of Fractions</a:t>
             </a:r>
             <a:endParaRPr lang="en-US" sz="2600" dirty="0"/>
           </a:p>
@@ -1647,14 +1746,66 @@
       </p:sp>
       <p:sp>
         <p:nvSpPr>
-          <p:cNvPr id="4" name="Text 2"/>
-          <p:cNvSpPr/>
-          <p:nvPr/>
-        </p:nvSpPr>
-        <p:spPr>
-          <a:xfrm>
-            <a:off x="548640" y="1097280"/>
-            <a:ext cx="8046720" cy="3474720"/>
+          <p:cNvPr id="5" name="Shape 3"/>
+          <p:cNvSpPr/>
+          <p:nvPr/>
+        </p:nvSpPr>
+        <p:spPr>
+          <a:xfrm>
+            <a:off x="457200" y="1188720"/>
+            <a:ext cx="2560320" cy="1828800"/>
+          </a:xfrm>
+          <a:prstGeom prst="rect">
+            <a:avLst/>
+          </a:prstGeom>
+          <a:solidFill>
+            <a:srgbClr val="FFFFFF"/>
+          </a:solidFill>
+          <a:ln w="12700">
+            <a:solidFill>
+              <a:srgbClr val="E5E2DC"/>
+            </a:solidFill>
+            <a:prstDash val="solid"/>
+          </a:ln>
+          <a:effectLst>
+            <a:outerShdw sx="100000" sy="100000" kx="0" ky="0" algn="bl" rotWithShape="0" blurRad="50800" dist="25400" dir="8100000">
+              <a:srgbClr val="000000">
+                <a:alpha val="10000"/>
+              </a:srgbClr>
+            </a:outerShdw>
+          </a:effectLst>
+        </p:spPr>
+      </p:sp>
+      <p:sp>
+        <p:nvSpPr>
+          <p:cNvPr id="6" name="Shape 4"/>
+          <p:cNvSpPr/>
+          <p:nvPr/>
+        </p:nvSpPr>
+        <p:spPr>
+          <a:xfrm>
+            <a:off x="457200" y="1188720"/>
+            <a:ext cx="2560320" cy="54864"/>
+          </a:xfrm>
+          <a:prstGeom prst="rect">
+            <a:avLst/>
+          </a:prstGeom>
+          <a:solidFill>
+            <a:srgbClr val="2A9D8F"/>
+          </a:solidFill>
+          <a:ln/>
+        </p:spPr>
+      </p:sp>
+      <p:sp>
+        <p:nvSpPr>
+          <p:cNvPr id="7" name="Text 5"/>
+          <p:cNvSpPr/>
+          <p:nvPr/>
+        </p:nvSpPr>
+        <p:spPr>
+          <a:xfrm>
+            <a:off x="594360" y="1325880"/>
+            <a:ext cx="2286000" cy="365760"/>
           </a:xfrm>
           <a:prstGeom prst="rect">
             <a:avLst/>
@@ -1663,39 +1814,53 @@
           <a:ln/>
         </p:spPr>
         <p:txBody>
-          <a:bodyPr wrap="square" rtlCol="0" anchor="t"/>
-          <a:lstStyle/>
-          <a:p>
-            <a:pPr marL="342900" indent="-342900">
-              <a:spcAft>
-                <a:spcPts val="800"/>
-              </a:spcAft>
-              <a:buSzPct val="100000"/>
-              <a:buChar char="•"/>
-            </a:pPr>
-            <a:r>
-              <a:rPr lang="en-US" sz="1500" dirty="0">
-                <a:solidFill>
-                  <a:srgbClr val="3D3A36"/>
+          <a:bodyPr wrap="square" rtlCol="0" anchor="ctr"/>
+          <a:lstStyle/>
+          <a:p>
+            <a:pPr indent="0" marL="0">
+              <a:buNone/>
+            </a:pPr>
+            <a:r>
+              <a:rPr lang="en-US" sz="1400" b="1" dirty="0">
+                <a:solidFill>
+                  <a:srgbClr val="1B2A4A"/>
                 </a:solidFill>
                 <a:latin typeface="Calibri" pitchFamily="34" charset="0"/>
                 <a:ea typeface="Calibri" pitchFamily="34" charset="-122"/>
                 <a:cs typeface="Calibri" pitchFamily="34" charset="-120"/>
               </a:rPr>
-              <a:t>Mixed number: whole number + fraction (e.g., 2 ¾)</a:t>
-            </a:r>
-            <a:endParaRPr lang="en-US" sz="1500" dirty="0"/>
-          </a:p>
-          <a:p>
-            <a:pPr marL="342900" indent="-342900">
-              <a:spcAft>
-                <a:spcPts val="800"/>
-              </a:spcAft>
-              <a:buSzPct val="100000"/>
-              <a:buChar char="•"/>
-            </a:pPr>
-            <a:r>
-              <a:rPr lang="en-US" sz="1500" dirty="0">
+              <a:t>Proper Fractions</a:t>
+            </a:r>
+            <a:endParaRPr lang="en-US" sz="1400" dirty="0"/>
+          </a:p>
+        </p:txBody>
+      </p:sp>
+      <p:sp>
+        <p:nvSpPr>
+          <p:cNvPr id="8" name="Text 6"/>
+          <p:cNvSpPr/>
+          <p:nvPr/>
+        </p:nvSpPr>
+        <p:spPr>
+          <a:xfrm>
+            <a:off x="594360" y="1737360"/>
+            <a:ext cx="2286000" cy="1097280"/>
+          </a:xfrm>
+          <a:prstGeom prst="rect">
+            <a:avLst/>
+          </a:prstGeom>
+          <a:noFill/>
+          <a:ln/>
+        </p:spPr>
+        <p:txBody>
+          <a:bodyPr wrap="square" rtlCol="0" anchor="t"/>
+          <a:lstStyle/>
+          <a:p>
+            <a:pPr indent="0" marL="0">
+              <a:buNone/>
+            </a:pPr>
+            <a:r>
+              <a:rPr lang="en-US" sz="1100" dirty="0">
                 <a:solidFill>
                   <a:srgbClr val="3D3A36"/>
                 </a:solidFill>
@@ -1703,41 +1868,129 @@
                 <a:ea typeface="Calibri" pitchFamily="34" charset="-122"/>
                 <a:cs typeface="Calibri" pitchFamily="34" charset="-120"/>
               </a:rPr>
-              <a:t>Improper fraction: numerator &gt; denominator (e.g., 11/4)</a:t>
-            </a:r>
-            <a:endParaRPr lang="en-US" sz="1500" dirty="0"/>
-          </a:p>
-          <a:p>
-            <a:pPr marL="342900" indent="-342900">
-              <a:spcAft>
-                <a:spcPts val="800"/>
-              </a:spcAft>
-              <a:buSzPct val="100000"/>
-              <a:buChar char="•"/>
-            </a:pPr>
-            <a:r>
-              <a:rPr lang="en-US" sz="1500" dirty="0">
-                <a:solidFill>
-                  <a:srgbClr val="3D3A36"/>
+              <a:t>Numerator &lt; denominator. Value is less than 1. Examples: ½, ³⁄₄, ²⁄₅. These are 'part of a whole'.</a:t>
+            </a:r>
+            <a:endParaRPr lang="en-US" sz="1100" dirty="0"/>
+          </a:p>
+        </p:txBody>
+      </p:sp>
+      <p:sp>
+        <p:nvSpPr>
+          <p:cNvPr id="9" name="Shape 7"/>
+          <p:cNvSpPr/>
+          <p:nvPr/>
+        </p:nvSpPr>
+        <p:spPr>
+          <a:xfrm>
+            <a:off x="3291840" y="1188720"/>
+            <a:ext cx="2560320" cy="1828800"/>
+          </a:xfrm>
+          <a:prstGeom prst="rect">
+            <a:avLst/>
+          </a:prstGeom>
+          <a:solidFill>
+            <a:srgbClr val="FFFFFF"/>
+          </a:solidFill>
+          <a:ln w="12700">
+            <a:solidFill>
+              <a:srgbClr val="E5E2DC"/>
+            </a:solidFill>
+            <a:prstDash val="solid"/>
+          </a:ln>
+          <a:effectLst>
+            <a:outerShdw sx="100000" sy="100000" kx="0" ky="0" algn="bl" rotWithShape="0" blurRad="50800" dist="25400" dir="8100000">
+              <a:srgbClr val="000000">
+                <a:alpha val="10000"/>
+              </a:srgbClr>
+            </a:outerShdw>
+          </a:effectLst>
+        </p:spPr>
+      </p:sp>
+      <p:sp>
+        <p:nvSpPr>
+          <p:cNvPr id="10" name="Shape 8"/>
+          <p:cNvSpPr/>
+          <p:nvPr/>
+        </p:nvSpPr>
+        <p:spPr>
+          <a:xfrm>
+            <a:off x="3291840" y="1188720"/>
+            <a:ext cx="2560320" cy="54864"/>
+          </a:xfrm>
+          <a:prstGeom prst="rect">
+            <a:avLst/>
+          </a:prstGeom>
+          <a:solidFill>
+            <a:srgbClr val="2A9D8F"/>
+          </a:solidFill>
+          <a:ln/>
+        </p:spPr>
+      </p:sp>
+      <p:sp>
+        <p:nvSpPr>
+          <p:cNvPr id="11" name="Text 9"/>
+          <p:cNvSpPr/>
+          <p:nvPr/>
+        </p:nvSpPr>
+        <p:spPr>
+          <a:xfrm>
+            <a:off x="3429000" y="1325880"/>
+            <a:ext cx="2286000" cy="365760"/>
+          </a:xfrm>
+          <a:prstGeom prst="rect">
+            <a:avLst/>
+          </a:prstGeom>
+          <a:noFill/>
+          <a:ln/>
+        </p:spPr>
+        <p:txBody>
+          <a:bodyPr wrap="square" rtlCol="0" anchor="ctr"/>
+          <a:lstStyle/>
+          <a:p>
+            <a:pPr indent="0" marL="0">
+              <a:buNone/>
+            </a:pPr>
+            <a:r>
+              <a:rPr lang="en-US" sz="1400" b="1" dirty="0">
+                <a:solidFill>
+                  <a:srgbClr val="1B2A4A"/>
                 </a:solidFill>
                 <a:latin typeface="Calibri" pitchFamily="34" charset="0"/>
                 <a:ea typeface="Calibri" pitchFamily="34" charset="-122"/>
                 <a:cs typeface="Calibri" pitchFamily="34" charset="-120"/>
               </a:rPr>
-              <a:t>Converting mixed → improper: multiply whole by denominator, add numerator</a:t>
-            </a:r>
-            <a:endParaRPr lang="en-US" sz="1500" dirty="0"/>
-          </a:p>
-          <a:p>
-            <a:pPr marL="342900" indent="-342900">
-              <a:spcAft>
-                <a:spcPts val="800"/>
-              </a:spcAft>
-              <a:buSzPct val="100000"/>
-              <a:buChar char="•"/>
-            </a:pPr>
-            <a:r>
-              <a:rPr lang="en-US" sz="1500" dirty="0">
+              <a:t>Improper Fractions</a:t>
+            </a:r>
+            <a:endParaRPr lang="en-US" sz="1400" dirty="0"/>
+          </a:p>
+        </p:txBody>
+      </p:sp>
+      <p:sp>
+        <p:nvSpPr>
+          <p:cNvPr id="12" name="Text 10"/>
+          <p:cNvSpPr/>
+          <p:nvPr/>
+        </p:nvSpPr>
+        <p:spPr>
+          <a:xfrm>
+            <a:off x="3429000" y="1737360"/>
+            <a:ext cx="2286000" cy="1097280"/>
+          </a:xfrm>
+          <a:prstGeom prst="rect">
+            <a:avLst/>
+          </a:prstGeom>
+          <a:noFill/>
+          <a:ln/>
+        </p:spPr>
+        <p:txBody>
+          <a:bodyPr wrap="square" rtlCol="0" anchor="t"/>
+          <a:lstStyle/>
+          <a:p>
+            <a:pPr indent="0" marL="0">
+              <a:buNone/>
+            </a:pPr>
+            <a:r>
+              <a:rPr lang="en-US" sz="1100" dirty="0">
                 <a:solidFill>
                   <a:srgbClr val="3D3A36"/>
                 </a:solidFill>
@@ -1745,41 +1998,129 @@
                 <a:ea typeface="Calibri" pitchFamily="34" charset="-122"/>
                 <a:cs typeface="Calibri" pitchFamily="34" charset="-120"/>
               </a:rPr>
-              <a:t>2 ¾ = (2×4+3)/4 = 11/4</a:t>
-            </a:r>
-            <a:endParaRPr lang="en-US" sz="1500" dirty="0"/>
-          </a:p>
-          <a:p>
-            <a:pPr marL="342900" indent="-342900">
-              <a:spcAft>
-                <a:spcPts val="800"/>
-              </a:spcAft>
-              <a:buSzPct val="100000"/>
-              <a:buChar char="•"/>
-            </a:pPr>
-            <a:r>
-              <a:rPr lang="en-US" sz="1500" dirty="0">
-                <a:solidFill>
-                  <a:srgbClr val="3D3A36"/>
+              <a:t>Numerator ≥ denominator. Value is 1 or greater. Examples: ⁵⁄₃, ⁷⁄₄, ⁹⁄₂. 'More than a whole'.</a:t>
+            </a:r>
+            <a:endParaRPr lang="en-US" sz="1100" dirty="0"/>
+          </a:p>
+        </p:txBody>
+      </p:sp>
+      <p:sp>
+        <p:nvSpPr>
+          <p:cNvPr id="13" name="Shape 11"/>
+          <p:cNvSpPr/>
+          <p:nvPr/>
+        </p:nvSpPr>
+        <p:spPr>
+          <a:xfrm>
+            <a:off x="6126480" y="1188720"/>
+            <a:ext cx="2560320" cy="1828800"/>
+          </a:xfrm>
+          <a:prstGeom prst="rect">
+            <a:avLst/>
+          </a:prstGeom>
+          <a:solidFill>
+            <a:srgbClr val="FFFFFF"/>
+          </a:solidFill>
+          <a:ln w="12700">
+            <a:solidFill>
+              <a:srgbClr val="E5E2DC"/>
+            </a:solidFill>
+            <a:prstDash val="solid"/>
+          </a:ln>
+          <a:effectLst>
+            <a:outerShdw sx="100000" sy="100000" kx="0" ky="0" algn="bl" rotWithShape="0" blurRad="50800" dist="25400" dir="8100000">
+              <a:srgbClr val="000000">
+                <a:alpha val="10000"/>
+              </a:srgbClr>
+            </a:outerShdw>
+          </a:effectLst>
+        </p:spPr>
+      </p:sp>
+      <p:sp>
+        <p:nvSpPr>
+          <p:cNvPr id="14" name="Shape 12"/>
+          <p:cNvSpPr/>
+          <p:nvPr/>
+        </p:nvSpPr>
+        <p:spPr>
+          <a:xfrm>
+            <a:off x="6126480" y="1188720"/>
+            <a:ext cx="2560320" cy="54864"/>
+          </a:xfrm>
+          <a:prstGeom prst="rect">
+            <a:avLst/>
+          </a:prstGeom>
+          <a:solidFill>
+            <a:srgbClr val="2A9D8F"/>
+          </a:solidFill>
+          <a:ln/>
+        </p:spPr>
+      </p:sp>
+      <p:sp>
+        <p:nvSpPr>
+          <p:cNvPr id="15" name="Text 13"/>
+          <p:cNvSpPr/>
+          <p:nvPr/>
+        </p:nvSpPr>
+        <p:spPr>
+          <a:xfrm>
+            <a:off x="6263640" y="1325880"/>
+            <a:ext cx="2286000" cy="365760"/>
+          </a:xfrm>
+          <a:prstGeom prst="rect">
+            <a:avLst/>
+          </a:prstGeom>
+          <a:noFill/>
+          <a:ln/>
+        </p:spPr>
+        <p:txBody>
+          <a:bodyPr wrap="square" rtlCol="0" anchor="ctr"/>
+          <a:lstStyle/>
+          <a:p>
+            <a:pPr indent="0" marL="0">
+              <a:buNone/>
+            </a:pPr>
+            <a:r>
+              <a:rPr lang="en-US" sz="1400" b="1" dirty="0">
+                <a:solidFill>
+                  <a:srgbClr val="1B2A4A"/>
                 </a:solidFill>
                 <a:latin typeface="Calibri" pitchFamily="34" charset="0"/>
                 <a:ea typeface="Calibri" pitchFamily="34" charset="-122"/>
                 <a:cs typeface="Calibri" pitchFamily="34" charset="-120"/>
               </a:rPr>
-              <a:t>Converting improper → mixed: divide numerator by denominator</a:t>
-            </a:r>
-            <a:endParaRPr lang="en-US" sz="1500" dirty="0"/>
-          </a:p>
-          <a:p>
-            <a:pPr marL="342900" indent="-342900">
-              <a:spcAft>
-                <a:spcPts val="800"/>
-              </a:spcAft>
-              <a:buSzPct val="100000"/>
-              <a:buChar char="•"/>
-            </a:pPr>
-            <a:r>
-              <a:rPr lang="en-US" sz="1500" dirty="0">
+              <a:t>Mixed Numbers</a:t>
+            </a:r>
+            <a:endParaRPr lang="en-US" sz="1400" dirty="0"/>
+          </a:p>
+        </p:txBody>
+      </p:sp>
+      <p:sp>
+        <p:nvSpPr>
+          <p:cNvPr id="16" name="Text 14"/>
+          <p:cNvSpPr/>
+          <p:nvPr/>
+        </p:nvSpPr>
+        <p:spPr>
+          <a:xfrm>
+            <a:off x="6263640" y="1737360"/>
+            <a:ext cx="2286000" cy="1097280"/>
+          </a:xfrm>
+          <a:prstGeom prst="rect">
+            <a:avLst/>
+          </a:prstGeom>
+          <a:noFill/>
+          <a:ln/>
+        </p:spPr>
+        <p:txBody>
+          <a:bodyPr wrap="square" rtlCol="0" anchor="t"/>
+          <a:lstStyle/>
+          <a:p>
+            <a:pPr indent="0" marL="0">
+              <a:buNone/>
+            </a:pPr>
+            <a:r>
+              <a:rPr lang="en-US" sz="1100" dirty="0">
                 <a:solidFill>
                   <a:srgbClr val="3D3A36"/>
                 </a:solidFill>
@@ -1787,45 +2128,9 @@
                 <a:ea typeface="Calibri" pitchFamily="34" charset="-122"/>
                 <a:cs typeface="Calibri" pitchFamily="34" charset="-120"/>
               </a:rPr>
-              <a:t>11/4 = 2 remainder 3 = 2 ¾</a:t>
-            </a:r>
-            <a:endParaRPr lang="en-US" sz="1500" dirty="0"/>
-          </a:p>
-        </p:txBody>
-      </p:sp>
-      <p:sp>
-        <p:nvSpPr>
-          <p:cNvPr id="5" name="Text 3"/>
-          <p:cNvSpPr/>
-          <p:nvPr/>
-        </p:nvSpPr>
-        <p:spPr>
-          <a:xfrm>
-            <a:off x="548640" y="4800600"/>
-            <a:ext cx="3657600" cy="274320"/>
-          </a:xfrm>
-          <a:prstGeom prst="rect">
-            <a:avLst/>
-          </a:prstGeom>
-          <a:noFill/>
-          <a:ln/>
-        </p:spPr>
-        <p:txBody>
-          <a:bodyPr wrap="square" rtlCol="0" anchor="ctr"/>
-          <a:lstStyle/>
-          <a:p>
-            <a:pPr indent="0" marL="0">
-              <a:buNone/>
-            </a:pPr>
-            <a:r>
-              <a:rPr lang="en-US" sz="800" dirty="0">
-                <a:solidFill>
-                  <a:srgbClr val="9B9690"/>
-                </a:solidFill>
-              </a:rPr>
-              <a:t>mrzocchi.com</a:t>
-            </a:r>
-            <a:endParaRPr lang="en-US" sz="800" dirty="0"/>
+              <a:t>A whole number plus a fraction. Examples: 1½, 2³⁄₄. Convert from improper: ⁷⁄₄ = 1³⁄₄ (7÷4 = 1 remainder 3).</a:t>
+            </a:r>
+            <a:endParaRPr lang="en-US" sz="1100" dirty="0"/>
           </a:p>
         </p:txBody>
       </p:sp>
@@ -1840,6 +2145,445 @@
 <file path=ppt/slides/slide4.xml><?xml version="1.0" encoding="utf-8"?>
 <p:sld xmlns:a="http://schemas.openxmlformats.org/drawingml/2006/main" xmlns:r="http://schemas.openxmlformats.org/officeDocument/2006/relationships" xmlns:p="http://schemas.openxmlformats.org/presentationml/2006/main">
   <p:cSld name="Slide 4">
+    <p:bg>
+      <p:bgPr>
+        <a:solidFill>
+          <a:srgbClr val="FAF8F5"/>
+        </a:solidFill>
+      </p:bgPr>
+    </p:bg>
+    <p:spTree>
+      <p:nvGrpSpPr>
+        <p:cNvPr id="1" name=""/>
+        <p:cNvGrpSpPr/>
+        <p:nvPr/>
+      </p:nvGrpSpPr>
+      <p:grpSpPr>
+        <a:xfrm>
+          <a:off x="0" y="0"/>
+          <a:ext cx="0" cy="0"/>
+          <a:chOff x="0" y="0"/>
+          <a:chExt cx="0" cy="0"/>
+        </a:xfrm>
+      </p:grpSpPr>
+      <p:sp>
+        <p:nvSpPr>
+          <p:cNvPr id="2" name="Shape 0"/>
+          <p:cNvSpPr/>
+          <p:nvPr/>
+        </p:nvSpPr>
+        <p:spPr>
+          <a:xfrm>
+            <a:off x="0" y="0"/>
+            <a:ext cx="9144000" cy="54864"/>
+          </a:xfrm>
+          <a:prstGeom prst="rect">
+            <a:avLst/>
+          </a:prstGeom>
+          <a:solidFill>
+            <a:srgbClr val="2A9D8F"/>
+          </a:solidFill>
+          <a:ln/>
+        </p:spPr>
+      </p:sp>
+      <p:sp>
+        <p:nvSpPr>
+          <p:cNvPr id="3" name="Text 1"/>
+          <p:cNvSpPr/>
+          <p:nvPr/>
+        </p:nvSpPr>
+        <p:spPr>
+          <a:xfrm>
+            <a:off x="7772400" y="4709160"/>
+            <a:ext cx="1097280" cy="320040"/>
+          </a:xfrm>
+          <a:prstGeom prst="rect">
+            <a:avLst/>
+          </a:prstGeom>
+          <a:noFill/>
+          <a:ln/>
+        </p:spPr>
+        <p:txBody>
+          <a:bodyPr wrap="square" rtlCol="0" anchor="ctr"/>
+          <a:lstStyle/>
+          <a:p>
+            <a:pPr algn="r" indent="0" marL="0">
+              <a:buNone/>
+            </a:pPr>
+            <a:r>
+              <a:rPr lang="en-US" sz="900" dirty="0">
+                <a:solidFill>
+                  <a:srgbClr val="6B6660"/>
+                </a:solidFill>
+                <a:latin typeface="Calibri" pitchFamily="34" charset="0"/>
+                <a:ea typeface="Calibri" pitchFamily="34" charset="-122"/>
+                <a:cs typeface="Calibri" pitchFamily="34" charset="-120"/>
+              </a:rPr>
+              <a:t>4 / 5</a:t>
+            </a:r>
+            <a:endParaRPr lang="en-US" sz="900" dirty="0"/>
+          </a:p>
+        </p:txBody>
+      </p:sp>
+      <p:sp>
+        <p:nvSpPr>
+          <p:cNvPr id="4" name="Text 2"/>
+          <p:cNvSpPr/>
+          <p:nvPr/>
+        </p:nvSpPr>
+        <p:spPr>
+          <a:xfrm>
+            <a:off x="457200" y="274320"/>
+            <a:ext cx="8229600" cy="640080"/>
+          </a:xfrm>
+          <a:prstGeom prst="rect">
+            <a:avLst/>
+          </a:prstGeom>
+          <a:noFill/>
+          <a:ln/>
+        </p:spPr>
+        <p:txBody>
+          <a:bodyPr wrap="square" rtlCol="0" anchor="ctr"/>
+          <a:lstStyle/>
+          <a:p>
+            <a:pPr indent="0" marL="0">
+              <a:buNone/>
+            </a:pPr>
+            <a:r>
+              <a:rPr lang="en-US" sz="2600" b="1" dirty="0">
+                <a:solidFill>
+                  <a:srgbClr val="1B2A4A"/>
+                </a:solidFill>
+                <a:latin typeface="Georgia" pitchFamily="34" charset="0"/>
+                <a:ea typeface="Georgia" pitchFamily="34" charset="-122"/>
+                <a:cs typeface="Georgia" pitchFamily="34" charset="-120"/>
+              </a:rPr>
+              <a:t>Fractions of Amounts</a:t>
+            </a:r>
+            <a:endParaRPr lang="en-US" sz="2600" dirty="0"/>
+          </a:p>
+        </p:txBody>
+      </p:sp>
+      <p:sp>
+        <p:nvSpPr>
+          <p:cNvPr id="5" name="Text 3"/>
+          <p:cNvSpPr/>
+          <p:nvPr/>
+        </p:nvSpPr>
+        <p:spPr>
+          <a:xfrm>
+            <a:off x="457200" y="1188720"/>
+            <a:ext cx="3840480" cy="3474720"/>
+          </a:xfrm>
+          <a:prstGeom prst="rect">
+            <a:avLst/>
+          </a:prstGeom>
+          <a:noFill/>
+          <a:ln/>
+        </p:spPr>
+        <p:txBody>
+          <a:bodyPr wrap="square" rtlCol="0" anchor="t"/>
+          <a:lstStyle/>
+          <a:p>
+            <a:pPr marL="342900" indent="-342900">
+              <a:spcAft>
+                <a:spcPts val="600"/>
+              </a:spcAft>
+              <a:buSzPct val="100000"/>
+              <a:buChar char="•"/>
+            </a:pPr>
+            <a:r>
+              <a:rPr lang="en-US" sz="1400" dirty="0">
+                <a:solidFill>
+                  <a:srgbClr val="3D3A36"/>
+                </a:solidFill>
+                <a:latin typeface="Calibri" pitchFamily="34" charset="0"/>
+                <a:ea typeface="Calibri" pitchFamily="34" charset="-122"/>
+                <a:cs typeface="Calibri" pitchFamily="34" charset="-120"/>
+              </a:rPr>
+              <a:t>To find a fraction of an amount: divide by denominator, multiply by numerator</a:t>
+            </a:r>
+            <a:endParaRPr lang="en-US" sz="1400" dirty="0"/>
+          </a:p>
+          <a:p>
+            <a:pPr marL="342900" indent="-342900">
+              <a:spcAft>
+                <a:spcPts val="600"/>
+              </a:spcAft>
+              <a:buSzPct val="100000"/>
+              <a:buChar char="•"/>
+            </a:pPr>
+            <a:r>
+              <a:rPr lang="en-US" sz="1400" dirty="0">
+                <a:solidFill>
+                  <a:srgbClr val="3D3A36"/>
+                </a:solidFill>
+                <a:latin typeface="Calibri" pitchFamily="34" charset="0"/>
+                <a:ea typeface="Calibri" pitchFamily="34" charset="-122"/>
+                <a:cs typeface="Calibri" pitchFamily="34" charset="-120"/>
+              </a:rPr>
+              <a:t>¾ of 20: 20 ÷ 4 = 5, then 5 × 3 = 15</a:t>
+            </a:r>
+            <a:endParaRPr lang="en-US" sz="1400" dirty="0"/>
+          </a:p>
+          <a:p>
+            <a:pPr marL="342900" indent="-342900">
+              <a:spcAft>
+                <a:spcPts val="600"/>
+              </a:spcAft>
+              <a:buSzPct val="100000"/>
+              <a:buChar char="•"/>
+            </a:pPr>
+            <a:r>
+              <a:rPr lang="en-US" sz="1400" dirty="0">
+                <a:solidFill>
+                  <a:srgbClr val="3D3A36"/>
+                </a:solidFill>
+                <a:latin typeface="Calibri" pitchFamily="34" charset="0"/>
+                <a:ea typeface="Calibri" pitchFamily="34" charset="-122"/>
+                <a:cs typeface="Calibri" pitchFamily="34" charset="-120"/>
+              </a:rPr>
+              <a:t>²⁄₅ of 30: 30 ÷ 5 = 6, then 6 × 2 = 12</a:t>
+            </a:r>
+            <a:endParaRPr lang="en-US" sz="1400" dirty="0"/>
+          </a:p>
+          <a:p>
+            <a:pPr marL="342900" indent="-342900">
+              <a:spcAft>
+                <a:spcPts val="600"/>
+              </a:spcAft>
+              <a:buSzPct val="100000"/>
+              <a:buChar char="•"/>
+            </a:pPr>
+            <a:r>
+              <a:rPr lang="en-US" sz="1400" dirty="0">
+                <a:solidFill>
+                  <a:srgbClr val="3D3A36"/>
+                </a:solidFill>
+                <a:latin typeface="Calibri" pitchFamily="34" charset="0"/>
+                <a:ea typeface="Calibri" pitchFamily="34" charset="-122"/>
+                <a:cs typeface="Calibri" pitchFamily="34" charset="-120"/>
+              </a:rPr>
+              <a:t>This works because ¹⁄₄ of 20 = 5, so ³⁄₄ = 3 × 5 = 15</a:t>
+            </a:r>
+            <a:endParaRPr lang="en-US" sz="1400" dirty="0"/>
+          </a:p>
+        </p:txBody>
+      </p:sp>
+      <p:sp>
+        <p:nvSpPr>
+          <p:cNvPr id="6" name="Shape 4"/>
+          <p:cNvSpPr/>
+          <p:nvPr/>
+        </p:nvSpPr>
+        <p:spPr>
+          <a:xfrm>
+            <a:off x="4846320" y="1188720"/>
+            <a:ext cx="3840480" cy="3474720"/>
+          </a:xfrm>
+          <a:prstGeom prst="rect">
+            <a:avLst/>
+          </a:prstGeom>
+          <a:solidFill>
+            <a:srgbClr val="FFFFFF"/>
+          </a:solidFill>
+          <a:ln w="12700">
+            <a:solidFill>
+              <a:srgbClr val="E5E2DC"/>
+            </a:solidFill>
+            <a:prstDash val="solid"/>
+          </a:ln>
+          <a:effectLst>
+            <a:outerShdw sx="100000" sy="100000" kx="0" ky="0" algn="bl" rotWithShape="0" blurRad="50800" dist="25400" dir="8100000">
+              <a:srgbClr val="000000">
+                <a:alpha val="10000"/>
+              </a:srgbClr>
+            </a:outerShdw>
+          </a:effectLst>
+        </p:spPr>
+      </p:sp>
+      <p:sp>
+        <p:nvSpPr>
+          <p:cNvPr id="7" name="Shape 5"/>
+          <p:cNvSpPr/>
+          <p:nvPr/>
+        </p:nvSpPr>
+        <p:spPr>
+          <a:xfrm>
+            <a:off x="4846320" y="1188720"/>
+            <a:ext cx="3840480" cy="54864"/>
+          </a:xfrm>
+          <a:prstGeom prst="rect">
+            <a:avLst/>
+          </a:prstGeom>
+          <a:solidFill>
+            <a:srgbClr val="2A9D8F"/>
+          </a:solidFill>
+          <a:ln/>
+        </p:spPr>
+      </p:sp>
+      <p:sp>
+        <p:nvSpPr>
+          <p:cNvPr id="8" name="Text 6"/>
+          <p:cNvSpPr/>
+          <p:nvPr/>
+        </p:nvSpPr>
+        <p:spPr>
+          <a:xfrm>
+            <a:off x="5120640" y="1371600"/>
+            <a:ext cx="3291840" cy="3108960"/>
+          </a:xfrm>
+          <a:prstGeom prst="rect">
+            <a:avLst/>
+          </a:prstGeom>
+          <a:noFill/>
+          <a:ln/>
+        </p:spPr>
+        <p:txBody>
+          <a:bodyPr wrap="square" rtlCol="0" anchor="t"/>
+          <a:lstStyle/>
+          <a:p>
+            <a:pPr indent="0" marL="0">
+              <a:spcAft>
+                <a:spcPts val="400"/>
+              </a:spcAft>
+              <a:buNone/>
+            </a:pPr>
+            <a:r>
+              <a:rPr lang="en-US" sz="1600" b="1" dirty="0">
+                <a:solidFill>
+                  <a:srgbClr val="1B2A4A"/>
+                </a:solidFill>
+                <a:latin typeface="Calibri" pitchFamily="34" charset="0"/>
+                <a:ea typeface="Calibri" pitchFamily="34" charset="-122"/>
+                <a:cs typeface="Calibri" pitchFamily="34" charset="-120"/>
+              </a:rPr>
+              <a:t>Fractions on a Number Line</a:t>
+            </a:r>
+            <a:endParaRPr lang="en-US" sz="1600" dirty="0"/>
+          </a:p>
+          <a:p>
+            <a:pPr indent="0" marL="0">
+              <a:spcAft>
+                <a:spcPts val="400"/>
+              </a:spcAft>
+              <a:buNone/>
+            </a:pPr>
+            <a:endParaRPr lang="en-US" sz="1600" dirty="0"/>
+          </a:p>
+          <a:p>
+            <a:pPr indent="0" marL="0">
+              <a:spcAft>
+                <a:spcPts val="400"/>
+              </a:spcAft>
+              <a:buNone/>
+            </a:pPr>
+            <a:r>
+              <a:rPr lang="en-US" sz="1300" dirty="0">
+                <a:solidFill>
+                  <a:srgbClr val="3D3A36"/>
+                </a:solidFill>
+                <a:latin typeface="Calibri" pitchFamily="34" charset="0"/>
+                <a:ea typeface="Calibri" pitchFamily="34" charset="-122"/>
+                <a:cs typeface="Calibri" pitchFamily="34" charset="-120"/>
+              </a:rPr>
+              <a:t>Fractions sit between whole numbers on the number line</a:t>
+            </a:r>
+            <a:endParaRPr lang="en-US" sz="1600" dirty="0"/>
+          </a:p>
+          <a:p>
+            <a:pPr indent="0" marL="0">
+              <a:spcAft>
+                <a:spcPts val="400"/>
+              </a:spcAft>
+              <a:buNone/>
+            </a:pPr>
+            <a:r>
+              <a:rPr lang="en-US" sz="1300" dirty="0">
+                <a:solidFill>
+                  <a:srgbClr val="3D3A36"/>
+                </a:solidFill>
+                <a:latin typeface="Calibri" pitchFamily="34" charset="0"/>
+                <a:ea typeface="Calibri" pitchFamily="34" charset="-122"/>
+                <a:cs typeface="Calibri" pitchFamily="34" charset="-120"/>
+              </a:rPr>
+              <a:t>½ is exactly halfway between 0 and 1</a:t>
+            </a:r>
+            <a:endParaRPr lang="en-US" sz="1600" dirty="0"/>
+          </a:p>
+          <a:p>
+            <a:pPr indent="0" marL="0">
+              <a:spcAft>
+                <a:spcPts val="400"/>
+              </a:spcAft>
+              <a:buNone/>
+            </a:pPr>
+            <a:r>
+              <a:rPr lang="en-US" sz="1300" dirty="0">
+                <a:solidFill>
+                  <a:srgbClr val="3D3A36"/>
+                </a:solidFill>
+                <a:latin typeface="Calibri" pitchFamily="34" charset="0"/>
+                <a:ea typeface="Calibri" pitchFamily="34" charset="-122"/>
+                <a:cs typeface="Calibri" pitchFamily="34" charset="-120"/>
+              </a:rPr>
+              <a:t>¼ is halfway between 0 and ½</a:t>
+            </a:r>
+            <a:endParaRPr lang="en-US" sz="1600" dirty="0"/>
+          </a:p>
+          <a:p>
+            <a:pPr indent="0" marL="0">
+              <a:spcAft>
+                <a:spcPts val="400"/>
+              </a:spcAft>
+              <a:buNone/>
+            </a:pPr>
+            <a:r>
+              <a:rPr lang="en-US" sz="1300" dirty="0">
+                <a:solidFill>
+                  <a:srgbClr val="3D3A36"/>
+                </a:solidFill>
+                <a:latin typeface="Calibri" pitchFamily="34" charset="0"/>
+                <a:ea typeface="Calibri" pitchFamily="34" charset="-122"/>
+                <a:cs typeface="Calibri" pitchFamily="34" charset="-120"/>
+              </a:rPr>
+              <a:t>Equivalent fractions sit at the SAME point</a:t>
+            </a:r>
+            <a:endParaRPr lang="en-US" sz="1600" dirty="0"/>
+          </a:p>
+          <a:p>
+            <a:pPr indent="0" marL="0">
+              <a:spcAft>
+                <a:spcPts val="400"/>
+              </a:spcAft>
+              <a:buNone/>
+            </a:pPr>
+            <a:r>
+              <a:rPr lang="en-US" sz="1300" dirty="0">
+                <a:solidFill>
+                  <a:srgbClr val="3D3A36"/>
+                </a:solidFill>
+                <a:latin typeface="Calibri" pitchFamily="34" charset="0"/>
+                <a:ea typeface="Calibri" pitchFamily="34" charset="-122"/>
+                <a:cs typeface="Calibri" pitchFamily="34" charset="-120"/>
+              </a:rPr>
+              <a:t>Improper fractions and mixed numbers extend beyond 1</a:t>
+            </a:r>
+            <a:endParaRPr lang="en-US" sz="1600" dirty="0"/>
+          </a:p>
+        </p:txBody>
+      </p:sp>
+    </p:spTree>
+  </p:cSld>
+  <p:clrMapOvr>
+    <a:masterClrMapping/>
+  </p:clrMapOvr>
+</p:sld>
+</file>
+
+<file path=ppt/slides/slide5.xml><?xml version="1.0" encoding="utf-8"?>
+<p:sld xmlns:a="http://schemas.openxmlformats.org/drawingml/2006/main" xmlns:r="http://schemas.openxmlformats.org/officeDocument/2006/relationships" xmlns:p="http://schemas.openxmlformats.org/presentationml/2006/main">
+  <p:cSld name="Slide 5">
     <p:bg>
       <p:bgPr>
         <a:solidFill>
@@ -1870,13 +2614,13 @@
         <p:spPr>
           <a:xfrm>
             <a:off x="0" y="0"/>
-            <a:ext cx="9144000" cy="54864"/>
-          </a:xfrm>
-          <a:prstGeom prst="rect">
-            <a:avLst/>
-          </a:prstGeom>
-          <a:solidFill>
-            <a:srgbClr val="2A9D8F"/>
+            <a:ext cx="109728" cy="5143500"/>
+          </a:xfrm>
+          <a:prstGeom prst="rect">
+            <a:avLst/>
+          </a:prstGeom>
+          <a:solidFill>
+            <a:srgbClr val="E9C46A"/>
           </a:solidFill>
           <a:ln/>
         </p:spPr>
@@ -1889,8 +2633,8 @@
         </p:nvSpPr>
         <p:spPr>
           <a:xfrm>
-            <a:off x="548640" y="457200"/>
-            <a:ext cx="8046720" cy="640080"/>
+            <a:off x="731520" y="457200"/>
+            <a:ext cx="7772400" cy="731520"/>
           </a:xfrm>
           <a:prstGeom prst="rect">
             <a:avLst/>
@@ -1906,7 +2650,7 @@
               <a:buNone/>
             </a:pPr>
             <a:r>
-              <a:rPr lang="en-US" sz="2800" b="1" dirty="0">
+              <a:rPr lang="en-US" sz="3200" b="1" dirty="0">
                 <a:solidFill>
                   <a:srgbClr val="FFFFFF"/>
                 </a:solidFill>
@@ -1916,7 +2660,7 @@
               </a:rPr>
               <a:t>Key Takeaways</a:t>
             </a:r>
-            <a:endParaRPr lang="en-US" sz="2800" dirty="0"/>
+            <a:endParaRPr lang="en-US" sz="3200" dirty="0"/>
           </a:p>
         </p:txBody>
       </p:sp>
@@ -1928,8 +2672,8 @@
         </p:nvSpPr>
         <p:spPr>
           <a:xfrm>
-            <a:off x="731520" y="1371600"/>
-            <a:ext cx="7680960" cy="3200400"/>
+            <a:off x="731520" y="1463040"/>
+            <a:ext cx="7772400" cy="3200400"/>
           </a:xfrm>
           <a:prstGeom prst="rect">
             <a:avLst/>
@@ -1949,7 +2693,7 @@
               <a:buChar char="•"/>
             </a:pPr>
             <a:r>
-              <a:rPr lang="en-US" sz="1600" dirty="0">
+              <a:rPr lang="en-US" sz="1500" dirty="0">
                 <a:solidFill>
                   <a:srgbClr val="CADCFC"/>
                 </a:solidFill>
@@ -1957,9 +2701,9 @@
                 <a:ea typeface="Calibri" pitchFamily="34" charset="-122"/>
                 <a:cs typeface="Calibri" pitchFamily="34" charset="-120"/>
               </a:rPr>
-              <a:t>Fraction = part of a whole (numerator ÷ denominator)</a:t>
-            </a:r>
-            <a:endParaRPr lang="en-US" sz="1600" dirty="0"/>
+              <a:t>Fraction = part of a whole. Numerator (top) ÷ denominator (bottom)</a:t>
+            </a:r>
+            <a:endParaRPr lang="en-US" sz="1500" dirty="0"/>
           </a:p>
           <a:p>
             <a:pPr marL="342900" indent="-342900">
@@ -1970,7 +2714,7 @@
               <a:buChar char="•"/>
             </a:pPr>
             <a:r>
-              <a:rPr lang="en-US" sz="1600" dirty="0">
+              <a:rPr lang="en-US" sz="1500" dirty="0">
                 <a:solidFill>
                   <a:srgbClr val="CADCFC"/>
                 </a:solidFill>
@@ -1978,9 +2722,9 @@
                 <a:ea typeface="Calibri" pitchFamily="34" charset="-122"/>
                 <a:cs typeface="Calibri" pitchFamily="34" charset="-120"/>
               </a:rPr>
-              <a:t>Proper &lt; 1, Improper ≥ 1, Mixed = whole + fraction</a:t>
-            </a:r>
-            <a:endParaRPr lang="en-US" sz="1600" dirty="0"/>
+              <a:t>Proper &lt; 1; improper ≥ 1; mixed = whole + fraction</a:t>
+            </a:r>
+            <a:endParaRPr lang="en-US" sz="1500" dirty="0"/>
           </a:p>
           <a:p>
             <a:pPr marL="342900" indent="-342900">
@@ -1991,7 +2735,7 @@
               <a:buChar char="•"/>
             </a:pPr>
             <a:r>
-              <a:rPr lang="en-US" sz="1600" dirty="0">
+              <a:rPr lang="en-US" sz="1500" dirty="0">
                 <a:solidFill>
                   <a:srgbClr val="CADCFC"/>
                 </a:solidFill>
@@ -1999,9 +2743,9 @@
                 <a:ea typeface="Calibri" pitchFamily="34" charset="-122"/>
                 <a:cs typeface="Calibri" pitchFamily="34" charset="-120"/>
               </a:rPr>
-              <a:t>Convert between mixed and improper confidently</a:t>
-            </a:r>
-            <a:endParaRPr lang="en-US" sz="1600" dirty="0"/>
+              <a:t>Convert improper to mixed: divide numerator by denominator</a:t>
+            </a:r>
+            <a:endParaRPr lang="en-US" sz="1500" dirty="0"/>
           </a:p>
           <a:p>
             <a:pPr marL="342900" indent="-342900">
@@ -2012,7 +2756,7 @@
               <a:buChar char="•"/>
             </a:pPr>
             <a:r>
-              <a:rPr lang="en-US" sz="1600" dirty="0">
+              <a:rPr lang="en-US" sz="1500" dirty="0">
                 <a:solidFill>
                   <a:srgbClr val="CADCFC"/>
                 </a:solidFill>
@@ -2020,9 +2764,30 @@
                 <a:ea typeface="Calibri" pitchFamily="34" charset="-122"/>
                 <a:cs typeface="Calibri" pitchFamily="34" charset="-120"/>
               </a:rPr>
-              <a:t>Denominator tells you size of parts; numerator tells you how many</a:t>
-            </a:r>
-            <a:endParaRPr lang="en-US" sz="1600" dirty="0"/>
+              <a:t>Fraction of amount: divide by denominator, multiply by numerator</a:t>
+            </a:r>
+            <a:endParaRPr lang="en-US" sz="1500" dirty="0"/>
+          </a:p>
+          <a:p>
+            <a:pPr marL="342900" indent="-342900">
+              <a:spcAft>
+                <a:spcPts val="1000"/>
+              </a:spcAft>
+              <a:buSzPct val="100000"/>
+              <a:buChar char="•"/>
+            </a:pPr>
+            <a:r>
+              <a:rPr lang="en-US" sz="1500" dirty="0">
+                <a:solidFill>
+                  <a:srgbClr val="CADCFC"/>
+                </a:solidFill>
+                <a:latin typeface="Calibri" pitchFamily="34" charset="0"/>
+                <a:ea typeface="Calibri" pitchFamily="34" charset="-122"/>
+                <a:cs typeface="Calibri" pitchFamily="34" charset="-120"/>
+              </a:rPr>
+              <a:t>Fractions represent points on the number line</a:t>
+            </a:r>
+            <a:endParaRPr lang="en-US" sz="1500" dirty="0"/>
           </a:p>
         </p:txBody>
       </p:sp>
@@ -2034,8 +2799,8 @@
         </p:nvSpPr>
         <p:spPr>
           <a:xfrm>
-            <a:off x="548640" y="4572000"/>
-            <a:ext cx="3657600" cy="274320"/>
+            <a:off x="731520" y="4572000"/>
+            <a:ext cx="7772400" cy="365760"/>
           </a:xfrm>
           <a:prstGeom prst="rect">
             <a:avLst/>
@@ -2051,14 +2816,17 @@
               <a:buNone/>
             </a:pPr>
             <a:r>
-              <a:rPr lang="en-US" sz="1000" dirty="0">
-                <a:solidFill>
-                  <a:srgbClr val="6B6660"/>
-                </a:solidFill>
+              <a:rPr lang="en-US" sz="1100" dirty="0">
+                <a:solidFill>
+                  <a:srgbClr val="E9C46A"/>
+                </a:solidFill>
+                <a:latin typeface="Calibri" pitchFamily="34" charset="0"/>
+                <a:ea typeface="Calibri" pitchFamily="34" charset="-122"/>
+                <a:cs typeface="Calibri" pitchFamily="34" charset="-120"/>
               </a:rPr>
               <a:t>mrzocchi.com</a:t>
             </a:r>
-            <a:endParaRPr lang="en-US" sz="1000" dirty="0"/>
+            <a:endParaRPr lang="en-US" sz="1100" dirty="0"/>
           </a:p>
         </p:txBody>
       </p:sp>

--- a/static/ppts/G6_Math_T2_Fraction_Basics.pptx
+++ b/static/ppts/G6_Math_T2_Fraction_Basics.pptx
@@ -10,9 +10,11 @@
     <p:sldId id="258" r:id="rId4"/>
     <p:sldId id="259" r:id="rId5"/>
     <p:sldId id="260" r:id="rId6"/>
+    <p:sldId id="261" r:id="rId7"/>
+    <p:sldId id="262" r:id="rId8"/>
   </p:sldIdLst>
   <p:notesMasterIdLst>
-    <p:notesMasterId r:id="rId7"/>
+    <p:notesMasterId r:id="rId9"/>
   </p:notesMasterIdLst>
   <p:sldSz cx="9144000" cy="5143500"/>
   <p:notesSz cx="5143500" cy="9144000"/>
@@ -900,6 +902,182 @@
 </p:notes>
 </file>
 
+<file path=ppt/notesSlides/notesSlide6.xml><?xml version="1.0" encoding="utf-8"?>
+<p:notes xmlns:a="http://schemas.openxmlformats.org/drawingml/2006/main" xmlns:r="http://schemas.openxmlformats.org/officeDocument/2006/relationships" xmlns:p="http://schemas.openxmlformats.org/presentationml/2006/main">
+  <p:cSld>
+    <p:spTree>
+      <p:nvGrpSpPr>
+        <p:cNvPr id="1" name=""/>
+        <p:cNvGrpSpPr/>
+        <p:nvPr/>
+      </p:nvGrpSpPr>
+      <p:grpSpPr>
+        <a:xfrm>
+          <a:off x="0" y="0"/>
+          <a:ext cx="0" cy="0"/>
+          <a:chOff x="0" y="0"/>
+          <a:chExt cx="0" cy="0"/>
+        </a:xfrm>
+      </p:grpSpPr>
+      <p:sp>
+        <p:nvSpPr>
+          <p:cNvPr id="2" name="Slide Image Placeholder 1"/>
+          <p:cNvSpPr>
+            <a:spLocks noGrp="1" noRot="1" noChangeAspect="1"/>
+          </p:cNvSpPr>
+          <p:nvPr>
+            <p:ph type="sldImg"/>
+          </p:nvPr>
+        </p:nvSpPr>
+        <p:spPr/>
+      </p:sp>
+      <p:sp>
+        <p:nvSpPr>
+          <p:cNvPr id="3" name="Notes Placeholder 2"/>
+          <p:cNvSpPr>
+            <a:spLocks noGrp="1"/>
+          </p:cNvSpPr>
+          <p:nvPr>
+            <p:ph type="body" idx="1"/>
+          </p:nvPr>
+        </p:nvSpPr>
+        <p:spPr/>
+        <p:txBody>
+          <a:bodyPr/>
+          <a:lstStyle/>
+          <a:p>
+            <a:r>
+              <a:rPr lang="en-US" dirty="0"/>
+              <a:t/>
+            </a:r>
+            <a:endParaRPr lang="en-US" dirty="0"/>
+          </a:p>
+        </p:txBody>
+      </p:sp>
+      <p:sp>
+        <p:nvSpPr>
+          <p:cNvPr id="4" name="Slide Number Placeholder 3"/>
+          <p:cNvSpPr>
+            <a:spLocks noGrp="1"/>
+          </p:cNvSpPr>
+          <p:nvPr>
+            <p:ph type="sldNum" sz="quarter" idx="10"/>
+          </p:nvPr>
+        </p:nvSpPr>
+        <p:spPr/>
+        <p:txBody>
+          <a:bodyPr/>
+          <a:lstStyle/>
+          <a:p>
+            <a:fld id="{F7021451-1387-4CA6-816F-3879F97B5CBC}" type="slidenum">
+              <a:rPr lang="en-US"/>
+              <a:t>6</a:t>
+            </a:fld>
+            <a:endParaRPr lang="en-US"/>
+          </a:p>
+        </p:txBody>
+      </p:sp>
+    </p:spTree>
+    <p:extLst>
+      <p:ext uri="{BB962C8B-B14F-4D97-AF65-F5344CB8AC3E}">
+        <p14:creationId xmlns:p14="http://schemas.microsoft.com/office/powerpoint/2010/main" val="1024086991"/>
+      </p:ext>
+    </p:extLst>
+  </p:cSld>
+  <p:clrMapOvr>
+    <a:masterClrMapping/>
+  </p:clrMapOvr>
+</p:notes>
+</file>
+
+<file path=ppt/notesSlides/notesSlide7.xml><?xml version="1.0" encoding="utf-8"?>
+<p:notes xmlns:a="http://schemas.openxmlformats.org/drawingml/2006/main" xmlns:r="http://schemas.openxmlformats.org/officeDocument/2006/relationships" xmlns:p="http://schemas.openxmlformats.org/presentationml/2006/main">
+  <p:cSld>
+    <p:spTree>
+      <p:nvGrpSpPr>
+        <p:cNvPr id="1" name=""/>
+        <p:cNvGrpSpPr/>
+        <p:nvPr/>
+      </p:nvGrpSpPr>
+      <p:grpSpPr>
+        <a:xfrm>
+          <a:off x="0" y="0"/>
+          <a:ext cx="0" cy="0"/>
+          <a:chOff x="0" y="0"/>
+          <a:chExt cx="0" cy="0"/>
+        </a:xfrm>
+      </p:grpSpPr>
+      <p:sp>
+        <p:nvSpPr>
+          <p:cNvPr id="2" name="Slide Image Placeholder 1"/>
+          <p:cNvSpPr>
+            <a:spLocks noGrp="1" noRot="1" noChangeAspect="1"/>
+          </p:cNvSpPr>
+          <p:nvPr>
+            <p:ph type="sldImg"/>
+          </p:nvPr>
+        </p:nvSpPr>
+        <p:spPr/>
+      </p:sp>
+      <p:sp>
+        <p:nvSpPr>
+          <p:cNvPr id="3" name="Notes Placeholder 2"/>
+          <p:cNvSpPr>
+            <a:spLocks noGrp="1"/>
+          </p:cNvSpPr>
+          <p:nvPr>
+            <p:ph type="body" idx="1"/>
+          </p:nvPr>
+        </p:nvSpPr>
+        <p:spPr/>
+        <p:txBody>
+          <a:bodyPr/>
+          <a:lstStyle/>
+          <a:p>
+            <a:r>
+              <a:rPr lang="en-US" dirty="0"/>
+              <a:t/>
+            </a:r>
+            <a:endParaRPr lang="en-US" dirty="0"/>
+          </a:p>
+        </p:txBody>
+      </p:sp>
+      <p:sp>
+        <p:nvSpPr>
+          <p:cNvPr id="4" name="Slide Number Placeholder 3"/>
+          <p:cNvSpPr>
+            <a:spLocks noGrp="1"/>
+          </p:cNvSpPr>
+          <p:nvPr>
+            <p:ph type="sldNum" sz="quarter" idx="10"/>
+          </p:nvPr>
+        </p:nvSpPr>
+        <p:spPr/>
+        <p:txBody>
+          <a:bodyPr/>
+          <a:lstStyle/>
+          <a:p>
+            <a:fld id="{F7021451-1387-4CA6-816F-3879F97B5CBC}" type="slidenum">
+              <a:rPr lang="en-US"/>
+              <a:t>7</a:t>
+            </a:fld>
+            <a:endParaRPr lang="en-US"/>
+          </a:p>
+        </p:txBody>
+      </p:sp>
+    </p:spTree>
+    <p:extLst>
+      <p:ext uri="{BB962C8B-B14F-4D97-AF65-F5344CB8AC3E}">
+        <p14:creationId xmlns:p14="http://schemas.microsoft.com/office/powerpoint/2010/main" val="1024086991"/>
+      </p:ext>
+    </p:extLst>
+  </p:cSld>
+  <p:clrMapOvr>
+    <a:masterClrMapping/>
+  </p:clrMapOvr>
+</p:notes>
+</file>
+
 <file path=ppt/slideLayouts/slideLayout1.xml><?xml version="1.0" encoding="utf-8"?>
 <p:sldLayout xmlns:a="http://schemas.openxmlformats.org/drawingml/2006/main" xmlns:r="http://schemas.openxmlformats.org/officeDocument/2006/relationships" xmlns:p="http://schemas.openxmlformats.org/presentationml/2006/main" preserve="1">
   <p:cSld name="DEFAULT">
@@ -1210,13 +1388,6 @@
 <file path=ppt/slides/slide1.xml><?xml version="1.0" encoding="utf-8"?>
 <p:sld xmlns:a="http://schemas.openxmlformats.org/drawingml/2006/main" xmlns:r="http://schemas.openxmlformats.org/officeDocument/2006/relationships" xmlns:p="http://schemas.openxmlformats.org/presentationml/2006/main">
   <p:cSld name="Slide 1">
-    <p:bg>
-      <p:bgPr>
-        <a:solidFill>
-          <a:srgbClr val="1B2A4A"/>
-        </a:solidFill>
-      </p:bgPr>
-    </p:bg>
     <p:spTree>
       <p:nvGrpSpPr>
         <p:cNvPr id="1" name=""/>
@@ -1240,7 +1411,27 @@
         <p:spPr>
           <a:xfrm>
             <a:off x="0" y="0"/>
-            <a:ext cx="109728" cy="5143500"/>
+            <a:ext cx="9144000" cy="5143500"/>
+          </a:xfrm>
+          <a:prstGeom prst="rect">
+            <a:avLst/>
+          </a:prstGeom>
+          <a:solidFill>
+            <a:srgbClr val="1B2A4A"/>
+          </a:solidFill>
+          <a:ln/>
+        </p:spPr>
+      </p:sp>
+      <p:sp>
+        <p:nvSpPr>
+          <p:cNvPr id="3" name="Shape 1"/>
+          <p:cNvSpPr/>
+          <p:nvPr/>
+        </p:nvSpPr>
+        <p:spPr>
+          <a:xfrm>
+            <a:off x="0" y="4777740"/>
+            <a:ext cx="9144000" cy="365760"/>
           </a:xfrm>
           <a:prstGeom prst="rect">
             <a:avLst/>
@@ -1253,14 +1444,36 @@
       </p:sp>
       <p:sp>
         <p:nvSpPr>
-          <p:cNvPr id="3" name="Text 1"/>
-          <p:cNvSpPr/>
-          <p:nvPr/>
-        </p:nvSpPr>
-        <p:spPr>
-          <a:xfrm>
-            <a:off x="731520" y="1097280"/>
-            <a:ext cx="7772400" cy="1371600"/>
+          <p:cNvPr id="4" name="Shape 2"/>
+          <p:cNvSpPr/>
+          <p:nvPr/>
+        </p:nvSpPr>
+        <p:spPr>
+          <a:xfrm>
+            <a:off x="6858000" y="-1371600"/>
+            <a:ext cx="4572000" cy="4572000"/>
+          </a:xfrm>
+          <a:prstGeom prst="ellipse">
+            <a:avLst/>
+          </a:prstGeom>
+          <a:solidFill>
+            <a:srgbClr val="2A9D8F">
+              <a:alpha val="12000"/>
+            </a:srgbClr>
+          </a:solidFill>
+          <a:ln/>
+        </p:spPr>
+      </p:sp>
+      <p:sp>
+        <p:nvSpPr>
+          <p:cNvPr id="5" name="Text 3"/>
+          <p:cNvSpPr/>
+          <p:nvPr/>
+        </p:nvSpPr>
+        <p:spPr>
+          <a:xfrm>
+            <a:off x="731520" y="914400"/>
+            <a:ext cx="7680960" cy="457200"/>
           </a:xfrm>
           <a:prstGeom prst="rect">
             <a:avLst/>
@@ -1276,7 +1489,46 @@
               <a:buNone/>
             </a:pPr>
             <a:r>
-              <a:rPr lang="en-US" sz="4000" b="1" dirty="0">
+              <a:rPr lang="en-US" sz="1300" b="1" spc="500" kern="0" dirty="0">
+                <a:solidFill>
+                  <a:srgbClr val="2A9D8F"/>
+                </a:solidFill>
+                <a:latin typeface="Calibri" pitchFamily="34" charset="0"/>
+                <a:ea typeface="Calibri" pitchFamily="34" charset="-122"/>
+                <a:cs typeface="Calibri" pitchFamily="34" charset="-120"/>
+              </a:rPr>
+              <a:t>GRADE 6 MATHEMATICS</a:t>
+            </a:r>
+            <a:endParaRPr lang="en-US" sz="1300" dirty="0"/>
+          </a:p>
+        </p:txBody>
+      </p:sp>
+      <p:sp>
+        <p:nvSpPr>
+          <p:cNvPr id="6" name="Text 4"/>
+          <p:cNvSpPr/>
+          <p:nvPr/>
+        </p:nvSpPr>
+        <p:spPr>
+          <a:xfrm>
+            <a:off x="731520" y="1463040"/>
+            <a:ext cx="6858000" cy="1645920"/>
+          </a:xfrm>
+          <a:prstGeom prst="rect">
+            <a:avLst/>
+          </a:prstGeom>
+          <a:noFill/>
+          <a:ln/>
+        </p:spPr>
+        <p:txBody>
+          <a:bodyPr wrap="square" rtlCol="0" anchor="t"/>
+          <a:lstStyle/>
+          <a:p>
+            <a:pPr indent="0" marL="0">
+              <a:buNone/>
+            </a:pPr>
+            <a:r>
+              <a:rPr lang="en-US" sz="3800" b="1" dirty="0">
                 <a:solidFill>
                   <a:srgbClr val="FFFFFF"/>
                 </a:solidFill>
@@ -1284,46 +1536,63 @@
                 <a:ea typeface="Georgia" pitchFamily="34" charset="-122"/>
                 <a:cs typeface="Georgia" pitchFamily="34" charset="-120"/>
               </a:rPr>
-              <a:t>Understanding Fractions</a:t>
-            </a:r>
-            <a:endParaRPr lang="en-US" sz="4000" dirty="0"/>
-          </a:p>
-        </p:txBody>
-      </p:sp>
-      <p:sp>
-        <p:nvSpPr>
-          <p:cNvPr id="4" name="Text 2"/>
-          <p:cNvSpPr/>
-          <p:nvPr/>
-        </p:nvSpPr>
-        <p:spPr>
-          <a:xfrm>
-            <a:off x="731520" y="2560320"/>
-            <a:ext cx="7772400" cy="548640"/>
-          </a:xfrm>
-          <a:prstGeom prst="rect">
-            <a:avLst/>
-          </a:prstGeom>
-          <a:noFill/>
-          <a:ln/>
-        </p:spPr>
-        <p:txBody>
-          <a:bodyPr wrap="square" rtlCol="0" anchor="ctr"/>
-          <a:lstStyle/>
+              <a:t>Understanding</a:t>
+            </a:r>
+            <a:endParaRPr lang="en-US" sz="3800" dirty="0"/>
+          </a:p>
           <a:p>
             <a:pPr indent="0" marL="0">
               <a:buNone/>
             </a:pPr>
             <a:r>
-              <a:rPr lang="en-US" sz="1600" dirty="0">
-                <a:solidFill>
-                  <a:srgbClr val="E9C46A"/>
+              <a:rPr lang="en-US" sz="3800" b="1" dirty="0">
+                <a:solidFill>
+                  <a:srgbClr val="FFFFFF"/>
+                </a:solidFill>
+                <a:latin typeface="Georgia" pitchFamily="34" charset="0"/>
+                <a:ea typeface="Georgia" pitchFamily="34" charset="-122"/>
+                <a:cs typeface="Georgia" pitchFamily="34" charset="-120"/>
+              </a:rPr>
+              <a:t>Fractions</a:t>
+            </a:r>
+            <a:endParaRPr lang="en-US" sz="3800" dirty="0"/>
+          </a:p>
+        </p:txBody>
+      </p:sp>
+      <p:sp>
+        <p:nvSpPr>
+          <p:cNvPr id="7" name="Text 5"/>
+          <p:cNvSpPr/>
+          <p:nvPr/>
+        </p:nvSpPr>
+        <p:spPr>
+          <a:xfrm>
+            <a:off x="731520" y="3200400"/>
+            <a:ext cx="6400800" cy="548640"/>
+          </a:xfrm>
+          <a:prstGeom prst="rect">
+            <a:avLst/>
+          </a:prstGeom>
+          <a:noFill/>
+          <a:ln/>
+        </p:spPr>
+        <p:txBody>
+          <a:bodyPr wrap="square" rtlCol="0" anchor="ctr"/>
+          <a:lstStyle/>
+          <a:p>
+            <a:pPr indent="0" marL="0">
+              <a:buNone/>
+            </a:pPr>
+            <a:r>
+              <a:rPr lang="en-US" sz="1600" i="1" dirty="0">
+                <a:solidFill>
+                  <a:srgbClr val="9B9690"/>
                 </a:solidFill>
                 <a:latin typeface="Calibri" pitchFamily="34" charset="0"/>
                 <a:ea typeface="Calibri" pitchFamily="34" charset="-122"/>
                 <a:cs typeface="Calibri" pitchFamily="34" charset="-120"/>
               </a:rPr>
-              <a:t>Grade 6 Mathematics · Mr Zocchi</a:t>
+              <a:t>Parts of a whole</a:t>
             </a:r>
             <a:endParaRPr lang="en-US" sz="1600" dirty="0"/>
           </a:p>
@@ -1331,36 +1600,14 @@
       </p:sp>
       <p:sp>
         <p:nvSpPr>
-          <p:cNvPr id="5" name="Shape 3"/>
-          <p:cNvSpPr/>
-          <p:nvPr/>
-        </p:nvSpPr>
-        <p:spPr>
-          <a:xfrm>
-            <a:off x="731520" y="3474720"/>
-            <a:ext cx="2011680" cy="411480"/>
-          </a:xfrm>
-          <a:prstGeom prst="roundRect">
-            <a:avLst>
-              <a:gd name="adj" fmla="val 17778"/>
-            </a:avLst>
-          </a:prstGeom>
-          <a:solidFill>
-            <a:srgbClr val="2A9D8F"/>
-          </a:solidFill>
-          <a:ln/>
-        </p:spPr>
-      </p:sp>
-      <p:sp>
-        <p:nvSpPr>
-          <p:cNvPr id="6" name="Text 4"/>
-          <p:cNvSpPr/>
-          <p:nvPr/>
-        </p:nvSpPr>
-        <p:spPr>
-          <a:xfrm>
-            <a:off x="731520" y="3474720"/>
-            <a:ext cx="2011680" cy="411480"/>
+          <p:cNvPr id="8" name="Text 6"/>
+          <p:cNvSpPr/>
+          <p:nvPr/>
+        </p:nvSpPr>
+        <p:spPr>
+          <a:xfrm>
+            <a:off x="731520" y="4297680"/>
+            <a:ext cx="2743200" cy="365760"/>
           </a:xfrm>
           <a:prstGeom prst="rect">
             <a:avLst/>
@@ -1372,21 +1619,21 @@
           <a:bodyPr wrap="square" rtlCol="0" anchor="ctr"/>
           <a:lstStyle/>
           <a:p>
-            <a:pPr algn="ctr" indent="0" marL="0">
+            <a:pPr indent="0" marL="0">
               <a:buNone/>
             </a:pPr>
             <a:r>
-              <a:rPr lang="en-US" sz="1200" b="1" dirty="0">
-                <a:solidFill>
-                  <a:srgbClr val="FFFFFF"/>
+              <a:rPr lang="en-US" sz="1100" dirty="0">
+                <a:solidFill>
+                  <a:srgbClr val="9B9690"/>
                 </a:solidFill>
                 <a:latin typeface="Calibri" pitchFamily="34" charset="0"/>
                 <a:ea typeface="Calibri" pitchFamily="34" charset="-122"/>
                 <a:cs typeface="Calibri" pitchFamily="34" charset="-120"/>
               </a:rPr>
-              <a:t>Term 2 · Fractions &amp; Decimals</a:t>
-            </a:r>
-            <a:endParaRPr lang="en-US" sz="1200" dirty="0"/>
+              <a:t>mrzocchi.com</a:t>
+            </a:r>
+            <a:endParaRPr lang="en-US" sz="1100" dirty="0"/>
           </a:p>
         </p:txBody>
       </p:sp>
@@ -1431,7 +1678,47 @@
         <p:spPr>
           <a:xfrm>
             <a:off x="0" y="0"/>
-            <a:ext cx="9144000" cy="54864"/>
+            <a:ext cx="9144000" cy="822960"/>
+          </a:xfrm>
+          <a:prstGeom prst="rect">
+            <a:avLst/>
+          </a:prstGeom>
+          <a:solidFill>
+            <a:srgbClr val="FFFFFF"/>
+          </a:solidFill>
+          <a:ln/>
+        </p:spPr>
+      </p:sp>
+      <p:sp>
+        <p:nvSpPr>
+          <p:cNvPr id="3" name="Shape 1"/>
+          <p:cNvSpPr/>
+          <p:nvPr/>
+        </p:nvSpPr>
+        <p:spPr>
+          <a:xfrm>
+            <a:off x="0" y="804672"/>
+            <a:ext cx="9144000" cy="27432"/>
+          </a:xfrm>
+          <a:prstGeom prst="rect">
+            <a:avLst/>
+          </a:prstGeom>
+          <a:solidFill>
+            <a:srgbClr val="E5E2DC"/>
+          </a:solidFill>
+          <a:ln/>
+        </p:spPr>
+      </p:sp>
+      <p:sp>
+        <p:nvSpPr>
+          <p:cNvPr id="4" name="Shape 2"/>
+          <p:cNvSpPr/>
+          <p:nvPr/>
+        </p:nvSpPr>
+        <p:spPr>
+          <a:xfrm>
+            <a:off x="548640" y="201168"/>
+            <a:ext cx="54864" cy="420624"/>
           </a:xfrm>
           <a:prstGeom prst="rect">
             <a:avLst/>
@@ -1444,14 +1731,14 @@
       </p:sp>
       <p:sp>
         <p:nvSpPr>
-          <p:cNvPr id="3" name="Text 1"/>
-          <p:cNvSpPr/>
-          <p:nvPr/>
-        </p:nvSpPr>
-        <p:spPr>
-          <a:xfrm>
-            <a:off x="7772400" y="4709160"/>
-            <a:ext cx="1097280" cy="320040"/>
+          <p:cNvPr id="5" name="Text 3"/>
+          <p:cNvSpPr/>
+          <p:nvPr/>
+        </p:nvSpPr>
+        <p:spPr>
+          <a:xfrm>
+            <a:off x="777240" y="137160"/>
+            <a:ext cx="7772400" cy="548640"/>
           </a:xfrm>
           <a:prstGeom prst="rect">
             <a:avLst/>
@@ -1460,37 +1747,37 @@
           <a:ln/>
         </p:spPr>
         <p:txBody>
-          <a:bodyPr wrap="square" rtlCol="0" anchor="ctr"/>
-          <a:lstStyle/>
-          <a:p>
-            <a:pPr algn="r" indent="0" marL="0">
+          <a:bodyPr wrap="square" lIns="0" tIns="0" rIns="0" bIns="0" rtlCol="0" anchor="ctr"/>
+          <a:lstStyle/>
+          <a:p>
+            <a:pPr indent="0" marL="0">
               <a:buNone/>
             </a:pPr>
             <a:r>
-              <a:rPr lang="en-US" sz="900" dirty="0">
-                <a:solidFill>
-                  <a:srgbClr val="6B6660"/>
-                </a:solidFill>
-                <a:latin typeface="Calibri" pitchFamily="34" charset="0"/>
-                <a:ea typeface="Calibri" pitchFamily="34" charset="-122"/>
-                <a:cs typeface="Calibri" pitchFamily="34" charset="-120"/>
-              </a:rPr>
-              <a:t>2 / 5</a:t>
-            </a:r>
-            <a:endParaRPr lang="en-US" sz="900" dirty="0"/>
-          </a:p>
-        </p:txBody>
-      </p:sp>
-      <p:sp>
-        <p:nvSpPr>
-          <p:cNvPr id="4" name="Shape 2"/>
-          <p:cNvSpPr/>
-          <p:nvPr/>
-        </p:nvSpPr>
-        <p:spPr>
-          <a:xfrm>
-            <a:off x="1371600" y="914400"/>
-            <a:ext cx="6400800" cy="3200400"/>
+              <a:rPr lang="en-US" sz="2000" b="1" dirty="0">
+                <a:solidFill>
+                  <a:srgbClr val="1B2A4A"/>
+                </a:solidFill>
+                <a:latin typeface="Georgia" pitchFamily="34" charset="0"/>
+                <a:ea typeface="Georgia" pitchFamily="34" charset="-122"/>
+                <a:cs typeface="Georgia" pitchFamily="34" charset="-120"/>
+              </a:rPr>
+              <a:t>Key Vocabulary</a:t>
+            </a:r>
+            <a:endParaRPr lang="en-US" sz="2000" dirty="0"/>
+          </a:p>
+        </p:txBody>
+      </p:sp>
+      <p:sp>
+        <p:nvSpPr>
+          <p:cNvPr id="6" name="Shape 4"/>
+          <p:cNvSpPr/>
+          <p:nvPr/>
+        </p:nvSpPr>
+        <p:spPr>
+          <a:xfrm>
+            <a:off x="731520" y="1051560"/>
+            <a:ext cx="3657600" cy="658368"/>
           </a:xfrm>
           <a:prstGeom prst="rect">
             <a:avLst/>
@@ -1498,12 +1785,7 @@
           <a:solidFill>
             <a:srgbClr val="FFFFFF"/>
           </a:solidFill>
-          <a:ln w="12700">
-            <a:solidFill>
-              <a:srgbClr val="E5E2DC"/>
-            </a:solidFill>
-            <a:prstDash val="solid"/>
-          </a:ln>
+          <a:ln/>
           <a:effectLst>
             <a:outerShdw sx="100000" sy="100000" kx="0" ky="0" algn="bl" rotWithShape="0" blurRad="50800" dist="25400" dir="8100000">
               <a:srgbClr val="000000">
@@ -1515,14 +1797,14 @@
       </p:sp>
       <p:sp>
         <p:nvSpPr>
-          <p:cNvPr id="5" name="Shape 3"/>
-          <p:cNvSpPr/>
-          <p:nvPr/>
-        </p:nvSpPr>
-        <p:spPr>
-          <a:xfrm>
-            <a:off x="1371600" y="914400"/>
-            <a:ext cx="91440" cy="3200400"/>
+          <p:cNvPr id="7" name="Shape 5"/>
+          <p:cNvSpPr/>
+          <p:nvPr/>
+        </p:nvSpPr>
+        <p:spPr>
+          <a:xfrm>
+            <a:off x="731520" y="1051560"/>
+            <a:ext cx="54864" cy="658368"/>
           </a:xfrm>
           <a:prstGeom prst="rect">
             <a:avLst/>
@@ -1535,14 +1817,14 @@
       </p:sp>
       <p:sp>
         <p:nvSpPr>
-          <p:cNvPr id="6" name="Text 4"/>
-          <p:cNvSpPr/>
-          <p:nvPr/>
-        </p:nvSpPr>
-        <p:spPr>
-          <a:xfrm>
-            <a:off x="1828800" y="1097280"/>
-            <a:ext cx="5669280" cy="640080"/>
+          <p:cNvPr id="8" name="Text 6"/>
+          <p:cNvSpPr/>
+          <p:nvPr/>
+        </p:nvSpPr>
+        <p:spPr>
+          <a:xfrm>
+            <a:off x="914400" y="1051560"/>
+            <a:ext cx="1463040" cy="658368"/>
           </a:xfrm>
           <a:prstGeom prst="rect">
             <a:avLst/>
@@ -1551,14 +1833,14 @@
           <a:ln/>
         </p:spPr>
         <p:txBody>
-          <a:bodyPr wrap="square" rtlCol="0" anchor="ctr"/>
+          <a:bodyPr wrap="square" lIns="0" tIns="0" rIns="0" bIns="0" rtlCol="0" anchor="ctr"/>
           <a:lstStyle/>
           <a:p>
             <a:pPr indent="0" marL="0">
               <a:buNone/>
             </a:pPr>
             <a:r>
-              <a:rPr lang="en-US" sz="2400" b="1" dirty="0">
+              <a:rPr lang="en-US" sz="1300" b="1" dirty="0">
                 <a:solidFill>
                   <a:srgbClr val="1B2A4A"/>
                 </a:solidFill>
@@ -1566,22 +1848,22 @@
                 <a:ea typeface="Georgia" pitchFamily="34" charset="-122"/>
                 <a:cs typeface="Georgia" pitchFamily="34" charset="-120"/>
               </a:rPr>
-              <a:t>What is a Fraction?</a:t>
-            </a:r>
-            <a:endParaRPr lang="en-US" sz="2400" dirty="0"/>
-          </a:p>
-        </p:txBody>
-      </p:sp>
-      <p:sp>
-        <p:nvSpPr>
-          <p:cNvPr id="7" name="Text 5"/>
-          <p:cNvSpPr/>
-          <p:nvPr/>
-        </p:nvSpPr>
-        <p:spPr>
-          <a:xfrm>
-            <a:off x="1828800" y="1828800"/>
-            <a:ext cx="5669280" cy="2011680"/>
+              <a:t>Fraction</a:t>
+            </a:r>
+            <a:endParaRPr lang="en-US" sz="1300" dirty="0"/>
+          </a:p>
+        </p:txBody>
+      </p:sp>
+      <p:sp>
+        <p:nvSpPr>
+          <p:cNvPr id="9" name="Text 7"/>
+          <p:cNvSpPr/>
+          <p:nvPr/>
+        </p:nvSpPr>
+        <p:spPr>
+          <a:xfrm>
+            <a:off x="2377440" y="1051560"/>
+            <a:ext cx="1920240" cy="658368"/>
           </a:xfrm>
           <a:prstGeom prst="rect">
             <a:avLst/>
@@ -1590,27 +1872,649 @@
           <a:ln/>
         </p:spPr>
         <p:txBody>
-          <a:bodyPr wrap="square" rtlCol="0" anchor="t"/>
+          <a:bodyPr wrap="square" lIns="0" tIns="0" rIns="0" bIns="0" rtlCol="0" anchor="ctr"/>
           <a:lstStyle/>
           <a:p>
             <a:pPr indent="0" marL="0">
-              <a:lnSpc>
-                <a:spcPct val="130000"/>
-              </a:lnSpc>
               <a:buNone/>
             </a:pPr>
             <a:r>
-              <a:rPr lang="en-US" sz="1500" dirty="0">
-                <a:solidFill>
-                  <a:srgbClr val="3D3A36"/>
+              <a:rPr lang="en-US" sz="1100" dirty="0">
+                <a:solidFill>
+                  <a:srgbClr val="6B6660"/>
                 </a:solidFill>
                 <a:latin typeface="Calibri" pitchFamily="34" charset="0"/>
                 <a:ea typeface="Calibri" pitchFamily="34" charset="-122"/>
                 <a:cs typeface="Calibri" pitchFamily="34" charset="-120"/>
               </a:rPr>
-              <a:t>A fraction represents a part of a whole. The top number (numerator) tells us how many parts we have. The bottom number (denominator) tells us how many equal parts the whole is divided into. Example: ³⁄₄ means 3 out of 4 equal parts.</a:t>
-            </a:r>
-            <a:endParaRPr lang="en-US" sz="1500" dirty="0"/>
+              <a:t>A part of a whole</a:t>
+            </a:r>
+            <a:endParaRPr lang="en-US" sz="1100" dirty="0"/>
+          </a:p>
+        </p:txBody>
+      </p:sp>
+      <p:sp>
+        <p:nvSpPr>
+          <p:cNvPr id="10" name="Shape 8"/>
+          <p:cNvSpPr/>
+          <p:nvPr/>
+        </p:nvSpPr>
+        <p:spPr>
+          <a:xfrm>
+            <a:off x="4754880" y="1051560"/>
+            <a:ext cx="3657600" cy="658368"/>
+          </a:xfrm>
+          <a:prstGeom prst="rect">
+            <a:avLst/>
+          </a:prstGeom>
+          <a:solidFill>
+            <a:srgbClr val="FFFFFF"/>
+          </a:solidFill>
+          <a:ln/>
+          <a:effectLst>
+            <a:outerShdw sx="100000" sy="100000" kx="0" ky="0" algn="bl" rotWithShape="0" blurRad="50800" dist="25400" dir="8100000">
+              <a:srgbClr val="000000">
+                <a:alpha val="10000"/>
+              </a:srgbClr>
+            </a:outerShdw>
+          </a:effectLst>
+        </p:spPr>
+      </p:sp>
+      <p:sp>
+        <p:nvSpPr>
+          <p:cNvPr id="11" name="Shape 9"/>
+          <p:cNvSpPr/>
+          <p:nvPr/>
+        </p:nvSpPr>
+        <p:spPr>
+          <a:xfrm>
+            <a:off x="4754880" y="1051560"/>
+            <a:ext cx="54864" cy="658368"/>
+          </a:xfrm>
+          <a:prstGeom prst="rect">
+            <a:avLst/>
+          </a:prstGeom>
+          <a:solidFill>
+            <a:srgbClr val="2A9D8F"/>
+          </a:solidFill>
+          <a:ln/>
+        </p:spPr>
+      </p:sp>
+      <p:sp>
+        <p:nvSpPr>
+          <p:cNvPr id="12" name="Text 10"/>
+          <p:cNvSpPr/>
+          <p:nvPr/>
+        </p:nvSpPr>
+        <p:spPr>
+          <a:xfrm>
+            <a:off x="4937760" y="1051560"/>
+            <a:ext cx="1463040" cy="658368"/>
+          </a:xfrm>
+          <a:prstGeom prst="rect">
+            <a:avLst/>
+          </a:prstGeom>
+          <a:noFill/>
+          <a:ln/>
+        </p:spPr>
+        <p:txBody>
+          <a:bodyPr wrap="square" lIns="0" tIns="0" rIns="0" bIns="0" rtlCol="0" anchor="ctr"/>
+          <a:lstStyle/>
+          <a:p>
+            <a:pPr indent="0" marL="0">
+              <a:buNone/>
+            </a:pPr>
+            <a:r>
+              <a:rPr lang="en-US" sz="1300" b="1" dirty="0">
+                <a:solidFill>
+                  <a:srgbClr val="1B2A4A"/>
+                </a:solidFill>
+                <a:latin typeface="Georgia" pitchFamily="34" charset="0"/>
+                <a:ea typeface="Georgia" pitchFamily="34" charset="-122"/>
+                <a:cs typeface="Georgia" pitchFamily="34" charset="-120"/>
+              </a:rPr>
+              <a:t>Numerator</a:t>
+            </a:r>
+            <a:endParaRPr lang="en-US" sz="1300" dirty="0"/>
+          </a:p>
+        </p:txBody>
+      </p:sp>
+      <p:sp>
+        <p:nvSpPr>
+          <p:cNvPr id="13" name="Text 11"/>
+          <p:cNvSpPr/>
+          <p:nvPr/>
+        </p:nvSpPr>
+        <p:spPr>
+          <a:xfrm>
+            <a:off x="6400800" y="1051560"/>
+            <a:ext cx="1920240" cy="658368"/>
+          </a:xfrm>
+          <a:prstGeom prst="rect">
+            <a:avLst/>
+          </a:prstGeom>
+          <a:noFill/>
+          <a:ln/>
+        </p:spPr>
+        <p:txBody>
+          <a:bodyPr wrap="square" lIns="0" tIns="0" rIns="0" bIns="0" rtlCol="0" anchor="ctr"/>
+          <a:lstStyle/>
+          <a:p>
+            <a:pPr indent="0" marL="0">
+              <a:buNone/>
+            </a:pPr>
+            <a:r>
+              <a:rPr lang="en-US" sz="1100" dirty="0">
+                <a:solidFill>
+                  <a:srgbClr val="6B6660"/>
+                </a:solidFill>
+                <a:latin typeface="Calibri" pitchFamily="34" charset="0"/>
+                <a:ea typeface="Calibri" pitchFamily="34" charset="-122"/>
+                <a:cs typeface="Calibri" pitchFamily="34" charset="-120"/>
+              </a:rPr>
+              <a:t>Top number — how many parts you have</a:t>
+            </a:r>
+            <a:endParaRPr lang="en-US" sz="1100" dirty="0"/>
+          </a:p>
+        </p:txBody>
+      </p:sp>
+      <p:sp>
+        <p:nvSpPr>
+          <p:cNvPr id="14" name="Shape 12"/>
+          <p:cNvSpPr/>
+          <p:nvPr/>
+        </p:nvSpPr>
+        <p:spPr>
+          <a:xfrm>
+            <a:off x="731520" y="1819656"/>
+            <a:ext cx="3657600" cy="658368"/>
+          </a:xfrm>
+          <a:prstGeom prst="rect">
+            <a:avLst/>
+          </a:prstGeom>
+          <a:solidFill>
+            <a:srgbClr val="FFFFFF"/>
+          </a:solidFill>
+          <a:ln/>
+          <a:effectLst>
+            <a:outerShdw sx="100000" sy="100000" kx="0" ky="0" algn="bl" rotWithShape="0" blurRad="50800" dist="25400" dir="8100000">
+              <a:srgbClr val="000000">
+                <a:alpha val="10000"/>
+              </a:srgbClr>
+            </a:outerShdw>
+          </a:effectLst>
+        </p:spPr>
+      </p:sp>
+      <p:sp>
+        <p:nvSpPr>
+          <p:cNvPr id="15" name="Shape 13"/>
+          <p:cNvSpPr/>
+          <p:nvPr/>
+        </p:nvSpPr>
+        <p:spPr>
+          <a:xfrm>
+            <a:off x="731520" y="1819656"/>
+            <a:ext cx="54864" cy="658368"/>
+          </a:xfrm>
+          <a:prstGeom prst="rect">
+            <a:avLst/>
+          </a:prstGeom>
+          <a:solidFill>
+            <a:srgbClr val="2A9D8F"/>
+          </a:solidFill>
+          <a:ln/>
+        </p:spPr>
+      </p:sp>
+      <p:sp>
+        <p:nvSpPr>
+          <p:cNvPr id="16" name="Text 14"/>
+          <p:cNvSpPr/>
+          <p:nvPr/>
+        </p:nvSpPr>
+        <p:spPr>
+          <a:xfrm>
+            <a:off x="914400" y="1819656"/>
+            <a:ext cx="1463040" cy="658368"/>
+          </a:xfrm>
+          <a:prstGeom prst="rect">
+            <a:avLst/>
+          </a:prstGeom>
+          <a:noFill/>
+          <a:ln/>
+        </p:spPr>
+        <p:txBody>
+          <a:bodyPr wrap="square" lIns="0" tIns="0" rIns="0" bIns="0" rtlCol="0" anchor="ctr"/>
+          <a:lstStyle/>
+          <a:p>
+            <a:pPr indent="0" marL="0">
+              <a:buNone/>
+            </a:pPr>
+            <a:r>
+              <a:rPr lang="en-US" sz="1300" b="1" dirty="0">
+                <a:solidFill>
+                  <a:srgbClr val="1B2A4A"/>
+                </a:solidFill>
+                <a:latin typeface="Georgia" pitchFamily="34" charset="0"/>
+                <a:ea typeface="Georgia" pitchFamily="34" charset="-122"/>
+                <a:cs typeface="Georgia" pitchFamily="34" charset="-120"/>
+              </a:rPr>
+              <a:t>Denominator</a:t>
+            </a:r>
+            <a:endParaRPr lang="en-US" sz="1300" dirty="0"/>
+          </a:p>
+        </p:txBody>
+      </p:sp>
+      <p:sp>
+        <p:nvSpPr>
+          <p:cNvPr id="17" name="Text 15"/>
+          <p:cNvSpPr/>
+          <p:nvPr/>
+        </p:nvSpPr>
+        <p:spPr>
+          <a:xfrm>
+            <a:off x="2377440" y="1819656"/>
+            <a:ext cx="1920240" cy="658368"/>
+          </a:xfrm>
+          <a:prstGeom prst="rect">
+            <a:avLst/>
+          </a:prstGeom>
+          <a:noFill/>
+          <a:ln/>
+        </p:spPr>
+        <p:txBody>
+          <a:bodyPr wrap="square" lIns="0" tIns="0" rIns="0" bIns="0" rtlCol="0" anchor="ctr"/>
+          <a:lstStyle/>
+          <a:p>
+            <a:pPr indent="0" marL="0">
+              <a:buNone/>
+            </a:pPr>
+            <a:r>
+              <a:rPr lang="en-US" sz="1100" dirty="0">
+                <a:solidFill>
+                  <a:srgbClr val="6B6660"/>
+                </a:solidFill>
+                <a:latin typeface="Calibri" pitchFamily="34" charset="0"/>
+                <a:ea typeface="Calibri" pitchFamily="34" charset="-122"/>
+                <a:cs typeface="Calibri" pitchFamily="34" charset="-120"/>
+              </a:rPr>
+              <a:t>Bottom number — total equal parts</a:t>
+            </a:r>
+            <a:endParaRPr lang="en-US" sz="1100" dirty="0"/>
+          </a:p>
+        </p:txBody>
+      </p:sp>
+      <p:sp>
+        <p:nvSpPr>
+          <p:cNvPr id="18" name="Shape 16"/>
+          <p:cNvSpPr/>
+          <p:nvPr/>
+        </p:nvSpPr>
+        <p:spPr>
+          <a:xfrm>
+            <a:off x="4754880" y="1819656"/>
+            <a:ext cx="3657600" cy="658368"/>
+          </a:xfrm>
+          <a:prstGeom prst="rect">
+            <a:avLst/>
+          </a:prstGeom>
+          <a:solidFill>
+            <a:srgbClr val="FFFFFF"/>
+          </a:solidFill>
+          <a:ln/>
+          <a:effectLst>
+            <a:outerShdw sx="100000" sy="100000" kx="0" ky="0" algn="bl" rotWithShape="0" blurRad="50800" dist="25400" dir="8100000">
+              <a:srgbClr val="000000">
+                <a:alpha val="10000"/>
+              </a:srgbClr>
+            </a:outerShdw>
+          </a:effectLst>
+        </p:spPr>
+      </p:sp>
+      <p:sp>
+        <p:nvSpPr>
+          <p:cNvPr id="19" name="Shape 17"/>
+          <p:cNvSpPr/>
+          <p:nvPr/>
+        </p:nvSpPr>
+        <p:spPr>
+          <a:xfrm>
+            <a:off x="4754880" y="1819656"/>
+            <a:ext cx="54864" cy="658368"/>
+          </a:xfrm>
+          <a:prstGeom prst="rect">
+            <a:avLst/>
+          </a:prstGeom>
+          <a:solidFill>
+            <a:srgbClr val="2A9D8F"/>
+          </a:solidFill>
+          <a:ln/>
+        </p:spPr>
+      </p:sp>
+      <p:sp>
+        <p:nvSpPr>
+          <p:cNvPr id="20" name="Text 18"/>
+          <p:cNvSpPr/>
+          <p:nvPr/>
+        </p:nvSpPr>
+        <p:spPr>
+          <a:xfrm>
+            <a:off x="4937760" y="1819656"/>
+            <a:ext cx="1463040" cy="658368"/>
+          </a:xfrm>
+          <a:prstGeom prst="rect">
+            <a:avLst/>
+          </a:prstGeom>
+          <a:noFill/>
+          <a:ln/>
+        </p:spPr>
+        <p:txBody>
+          <a:bodyPr wrap="square" lIns="0" tIns="0" rIns="0" bIns="0" rtlCol="0" anchor="ctr"/>
+          <a:lstStyle/>
+          <a:p>
+            <a:pPr indent="0" marL="0">
+              <a:buNone/>
+            </a:pPr>
+            <a:r>
+              <a:rPr lang="en-US" sz="1300" b="1" dirty="0">
+                <a:solidFill>
+                  <a:srgbClr val="1B2A4A"/>
+                </a:solidFill>
+                <a:latin typeface="Georgia" pitchFamily="34" charset="0"/>
+                <a:ea typeface="Georgia" pitchFamily="34" charset="-122"/>
+                <a:cs typeface="Georgia" pitchFamily="34" charset="-120"/>
+              </a:rPr>
+              <a:t>Proper</a:t>
+            </a:r>
+            <a:endParaRPr lang="en-US" sz="1300" dirty="0"/>
+          </a:p>
+        </p:txBody>
+      </p:sp>
+      <p:sp>
+        <p:nvSpPr>
+          <p:cNvPr id="21" name="Text 19"/>
+          <p:cNvSpPr/>
+          <p:nvPr/>
+        </p:nvSpPr>
+        <p:spPr>
+          <a:xfrm>
+            <a:off x="6400800" y="1819656"/>
+            <a:ext cx="1920240" cy="658368"/>
+          </a:xfrm>
+          <a:prstGeom prst="rect">
+            <a:avLst/>
+          </a:prstGeom>
+          <a:noFill/>
+          <a:ln/>
+        </p:spPr>
+        <p:txBody>
+          <a:bodyPr wrap="square" lIns="0" tIns="0" rIns="0" bIns="0" rtlCol="0" anchor="ctr"/>
+          <a:lstStyle/>
+          <a:p>
+            <a:pPr indent="0" marL="0">
+              <a:buNone/>
+            </a:pPr>
+            <a:r>
+              <a:rPr lang="en-US" sz="1100" dirty="0">
+                <a:solidFill>
+                  <a:srgbClr val="6B6660"/>
+                </a:solidFill>
+                <a:latin typeface="Calibri" pitchFamily="34" charset="0"/>
+                <a:ea typeface="Calibri" pitchFamily="34" charset="-122"/>
+                <a:cs typeface="Calibri" pitchFamily="34" charset="-120"/>
+              </a:rPr>
+              <a:t>Numerator &lt; denominator (less than 1)</a:t>
+            </a:r>
+            <a:endParaRPr lang="en-US" sz="1100" dirty="0"/>
+          </a:p>
+        </p:txBody>
+      </p:sp>
+      <p:sp>
+        <p:nvSpPr>
+          <p:cNvPr id="22" name="Shape 20"/>
+          <p:cNvSpPr/>
+          <p:nvPr/>
+        </p:nvSpPr>
+        <p:spPr>
+          <a:xfrm>
+            <a:off x="731520" y="2587752"/>
+            <a:ext cx="3657600" cy="658368"/>
+          </a:xfrm>
+          <a:prstGeom prst="rect">
+            <a:avLst/>
+          </a:prstGeom>
+          <a:solidFill>
+            <a:srgbClr val="FFFFFF"/>
+          </a:solidFill>
+          <a:ln/>
+          <a:effectLst>
+            <a:outerShdw sx="100000" sy="100000" kx="0" ky="0" algn="bl" rotWithShape="0" blurRad="50800" dist="25400" dir="8100000">
+              <a:srgbClr val="000000">
+                <a:alpha val="10000"/>
+              </a:srgbClr>
+            </a:outerShdw>
+          </a:effectLst>
+        </p:spPr>
+      </p:sp>
+      <p:sp>
+        <p:nvSpPr>
+          <p:cNvPr id="23" name="Shape 21"/>
+          <p:cNvSpPr/>
+          <p:nvPr/>
+        </p:nvSpPr>
+        <p:spPr>
+          <a:xfrm>
+            <a:off x="731520" y="2587752"/>
+            <a:ext cx="54864" cy="658368"/>
+          </a:xfrm>
+          <a:prstGeom prst="rect">
+            <a:avLst/>
+          </a:prstGeom>
+          <a:solidFill>
+            <a:srgbClr val="2A9D8F"/>
+          </a:solidFill>
+          <a:ln/>
+        </p:spPr>
+      </p:sp>
+      <p:sp>
+        <p:nvSpPr>
+          <p:cNvPr id="24" name="Text 22"/>
+          <p:cNvSpPr/>
+          <p:nvPr/>
+        </p:nvSpPr>
+        <p:spPr>
+          <a:xfrm>
+            <a:off x="914400" y="2587752"/>
+            <a:ext cx="1463040" cy="658368"/>
+          </a:xfrm>
+          <a:prstGeom prst="rect">
+            <a:avLst/>
+          </a:prstGeom>
+          <a:noFill/>
+          <a:ln/>
+        </p:spPr>
+        <p:txBody>
+          <a:bodyPr wrap="square" lIns="0" tIns="0" rIns="0" bIns="0" rtlCol="0" anchor="ctr"/>
+          <a:lstStyle/>
+          <a:p>
+            <a:pPr indent="0" marL="0">
+              <a:buNone/>
+            </a:pPr>
+            <a:r>
+              <a:rPr lang="en-US" sz="1300" b="1" dirty="0">
+                <a:solidFill>
+                  <a:srgbClr val="1B2A4A"/>
+                </a:solidFill>
+                <a:latin typeface="Georgia" pitchFamily="34" charset="0"/>
+                <a:ea typeface="Georgia" pitchFamily="34" charset="-122"/>
+                <a:cs typeface="Georgia" pitchFamily="34" charset="-120"/>
+              </a:rPr>
+              <a:t>Improper</a:t>
+            </a:r>
+            <a:endParaRPr lang="en-US" sz="1300" dirty="0"/>
+          </a:p>
+        </p:txBody>
+      </p:sp>
+      <p:sp>
+        <p:nvSpPr>
+          <p:cNvPr id="25" name="Text 23"/>
+          <p:cNvSpPr/>
+          <p:nvPr/>
+        </p:nvSpPr>
+        <p:spPr>
+          <a:xfrm>
+            <a:off x="2377440" y="2587752"/>
+            <a:ext cx="1920240" cy="658368"/>
+          </a:xfrm>
+          <a:prstGeom prst="rect">
+            <a:avLst/>
+          </a:prstGeom>
+          <a:noFill/>
+          <a:ln/>
+        </p:spPr>
+        <p:txBody>
+          <a:bodyPr wrap="square" lIns="0" tIns="0" rIns="0" bIns="0" rtlCol="0" anchor="ctr"/>
+          <a:lstStyle/>
+          <a:p>
+            <a:pPr indent="0" marL="0">
+              <a:buNone/>
+            </a:pPr>
+            <a:r>
+              <a:rPr lang="en-US" sz="1100" dirty="0">
+                <a:solidFill>
+                  <a:srgbClr val="6B6660"/>
+                </a:solidFill>
+                <a:latin typeface="Calibri" pitchFamily="34" charset="0"/>
+                <a:ea typeface="Calibri" pitchFamily="34" charset="-122"/>
+                <a:cs typeface="Calibri" pitchFamily="34" charset="-120"/>
+              </a:rPr>
+              <a:t>Numerator ≥ denominator (1 or more)</a:t>
+            </a:r>
+            <a:endParaRPr lang="en-US" sz="1100" dirty="0"/>
+          </a:p>
+        </p:txBody>
+      </p:sp>
+      <p:sp>
+        <p:nvSpPr>
+          <p:cNvPr id="26" name="Shape 24"/>
+          <p:cNvSpPr/>
+          <p:nvPr/>
+        </p:nvSpPr>
+        <p:spPr>
+          <a:xfrm>
+            <a:off x="4754880" y="2587752"/>
+            <a:ext cx="3657600" cy="658368"/>
+          </a:xfrm>
+          <a:prstGeom prst="rect">
+            <a:avLst/>
+          </a:prstGeom>
+          <a:solidFill>
+            <a:srgbClr val="FFFFFF"/>
+          </a:solidFill>
+          <a:ln/>
+          <a:effectLst>
+            <a:outerShdw sx="100000" sy="100000" kx="0" ky="0" algn="bl" rotWithShape="0" blurRad="50800" dist="25400" dir="8100000">
+              <a:srgbClr val="000000">
+                <a:alpha val="10000"/>
+              </a:srgbClr>
+            </a:outerShdw>
+          </a:effectLst>
+        </p:spPr>
+      </p:sp>
+      <p:sp>
+        <p:nvSpPr>
+          <p:cNvPr id="27" name="Shape 25"/>
+          <p:cNvSpPr/>
+          <p:nvPr/>
+        </p:nvSpPr>
+        <p:spPr>
+          <a:xfrm>
+            <a:off x="4754880" y="2587752"/>
+            <a:ext cx="54864" cy="658368"/>
+          </a:xfrm>
+          <a:prstGeom prst="rect">
+            <a:avLst/>
+          </a:prstGeom>
+          <a:solidFill>
+            <a:srgbClr val="2A9D8F"/>
+          </a:solidFill>
+          <a:ln/>
+        </p:spPr>
+      </p:sp>
+      <p:sp>
+        <p:nvSpPr>
+          <p:cNvPr id="28" name="Text 26"/>
+          <p:cNvSpPr/>
+          <p:nvPr/>
+        </p:nvSpPr>
+        <p:spPr>
+          <a:xfrm>
+            <a:off x="4937760" y="2587752"/>
+            <a:ext cx="1463040" cy="658368"/>
+          </a:xfrm>
+          <a:prstGeom prst="rect">
+            <a:avLst/>
+          </a:prstGeom>
+          <a:noFill/>
+          <a:ln/>
+        </p:spPr>
+        <p:txBody>
+          <a:bodyPr wrap="square" lIns="0" tIns="0" rIns="0" bIns="0" rtlCol="0" anchor="ctr"/>
+          <a:lstStyle/>
+          <a:p>
+            <a:pPr indent="0" marL="0">
+              <a:buNone/>
+            </a:pPr>
+            <a:r>
+              <a:rPr lang="en-US" sz="1300" b="1" dirty="0">
+                <a:solidFill>
+                  <a:srgbClr val="1B2A4A"/>
+                </a:solidFill>
+                <a:latin typeface="Georgia" pitchFamily="34" charset="0"/>
+                <a:ea typeface="Georgia" pitchFamily="34" charset="-122"/>
+                <a:cs typeface="Georgia" pitchFamily="34" charset="-120"/>
+              </a:rPr>
+              <a:t>Mixed number</a:t>
+            </a:r>
+            <a:endParaRPr lang="en-US" sz="1300" dirty="0"/>
+          </a:p>
+        </p:txBody>
+      </p:sp>
+      <p:sp>
+        <p:nvSpPr>
+          <p:cNvPr id="29" name="Text 27"/>
+          <p:cNvSpPr/>
+          <p:nvPr/>
+        </p:nvSpPr>
+        <p:spPr>
+          <a:xfrm>
+            <a:off x="6400800" y="2587752"/>
+            <a:ext cx="1920240" cy="658368"/>
+          </a:xfrm>
+          <a:prstGeom prst="rect">
+            <a:avLst/>
+          </a:prstGeom>
+          <a:noFill/>
+          <a:ln/>
+        </p:spPr>
+        <p:txBody>
+          <a:bodyPr wrap="square" lIns="0" tIns="0" rIns="0" bIns="0" rtlCol="0" anchor="ctr"/>
+          <a:lstStyle/>
+          <a:p>
+            <a:pPr indent="0" marL="0">
+              <a:buNone/>
+            </a:pPr>
+            <a:r>
+              <a:rPr lang="en-US" sz="1100" dirty="0">
+                <a:solidFill>
+                  <a:srgbClr val="6B6660"/>
+                </a:solidFill>
+                <a:latin typeface="Calibri" pitchFamily="34" charset="0"/>
+                <a:ea typeface="Calibri" pitchFamily="34" charset="-122"/>
+                <a:cs typeface="Calibri" pitchFamily="34" charset="-120"/>
+              </a:rPr>
+              <a:t>Whole number + fraction (e.g. 2¾)</a:t>
+            </a:r>
+            <a:endParaRPr lang="en-US" sz="1100" dirty="0"/>
           </a:p>
         </p:txBody>
       </p:sp>
@@ -1655,7 +2559,47 @@
         <p:spPr>
           <a:xfrm>
             <a:off x="0" y="0"/>
-            <a:ext cx="9144000" cy="54864"/>
+            <a:ext cx="9144000" cy="822960"/>
+          </a:xfrm>
+          <a:prstGeom prst="rect">
+            <a:avLst/>
+          </a:prstGeom>
+          <a:solidFill>
+            <a:srgbClr val="FFFFFF"/>
+          </a:solidFill>
+          <a:ln/>
+        </p:spPr>
+      </p:sp>
+      <p:sp>
+        <p:nvSpPr>
+          <p:cNvPr id="3" name="Shape 1"/>
+          <p:cNvSpPr/>
+          <p:nvPr/>
+        </p:nvSpPr>
+        <p:spPr>
+          <a:xfrm>
+            <a:off x="0" y="804672"/>
+            <a:ext cx="9144000" cy="27432"/>
+          </a:xfrm>
+          <a:prstGeom prst="rect">
+            <a:avLst/>
+          </a:prstGeom>
+          <a:solidFill>
+            <a:srgbClr val="E5E2DC"/>
+          </a:solidFill>
+          <a:ln/>
+        </p:spPr>
+      </p:sp>
+      <p:sp>
+        <p:nvSpPr>
+          <p:cNvPr id="4" name="Shape 2"/>
+          <p:cNvSpPr/>
+          <p:nvPr/>
+        </p:nvSpPr>
+        <p:spPr>
+          <a:xfrm>
+            <a:off x="548640" y="201168"/>
+            <a:ext cx="54864" cy="420624"/>
           </a:xfrm>
           <a:prstGeom prst="rect">
             <a:avLst/>
@@ -1668,14 +2612,14 @@
       </p:sp>
       <p:sp>
         <p:nvSpPr>
-          <p:cNvPr id="3" name="Text 1"/>
-          <p:cNvSpPr/>
-          <p:nvPr/>
-        </p:nvSpPr>
-        <p:spPr>
-          <a:xfrm>
-            <a:off x="7772400" y="4709160"/>
-            <a:ext cx="1097280" cy="320040"/>
+          <p:cNvPr id="5" name="Text 3"/>
+          <p:cNvSpPr/>
+          <p:nvPr/>
+        </p:nvSpPr>
+        <p:spPr>
+          <a:xfrm>
+            <a:off x="777240" y="137160"/>
+            <a:ext cx="7772400" cy="548640"/>
           </a:xfrm>
           <a:prstGeom prst="rect">
             <a:avLst/>
@@ -1684,89 +2628,172 @@
           <a:ln/>
         </p:spPr>
         <p:txBody>
-          <a:bodyPr wrap="square" rtlCol="0" anchor="ctr"/>
-          <a:lstStyle/>
-          <a:p>
-            <a:pPr algn="r" indent="0" marL="0">
+          <a:bodyPr wrap="square" lIns="0" tIns="0" rIns="0" bIns="0" rtlCol="0" anchor="ctr"/>
+          <a:lstStyle/>
+          <a:p>
+            <a:pPr indent="0" marL="0">
               <a:buNone/>
             </a:pPr>
             <a:r>
-              <a:rPr lang="en-US" sz="900" dirty="0">
-                <a:solidFill>
-                  <a:srgbClr val="6B6660"/>
+              <a:rPr lang="en-US" sz="2000" b="1" dirty="0">
+                <a:solidFill>
+                  <a:srgbClr val="1B2A4A"/>
+                </a:solidFill>
+                <a:latin typeface="Georgia" pitchFamily="34" charset="0"/>
+                <a:ea typeface="Georgia" pitchFamily="34" charset="-122"/>
+                <a:cs typeface="Georgia" pitchFamily="34" charset="-120"/>
+              </a:rPr>
+              <a:t>What Is a Fraction?</a:t>
+            </a:r>
+            <a:endParaRPr lang="en-US" sz="2000" dirty="0"/>
+          </a:p>
+        </p:txBody>
+      </p:sp>
+      <p:sp>
+        <p:nvSpPr>
+          <p:cNvPr id="6" name="Text 4"/>
+          <p:cNvSpPr/>
+          <p:nvPr/>
+        </p:nvSpPr>
+        <p:spPr>
+          <a:xfrm>
+            <a:off x="731520" y="1051560"/>
+            <a:ext cx="7680960" cy="3108960"/>
+          </a:xfrm>
+          <a:prstGeom prst="rect">
+            <a:avLst/>
+          </a:prstGeom>
+          <a:noFill/>
+          <a:ln/>
+        </p:spPr>
+        <p:txBody>
+          <a:bodyPr wrap="square" rtlCol="0" anchor="t"/>
+          <a:lstStyle/>
+          <a:p>
+            <a:pPr marL="342900" indent="-342900">
+              <a:spcAft>
+                <a:spcPts val="800"/>
+              </a:spcAft>
+              <a:buSzPct val="100000"/>
+              <a:buChar char="•"/>
+            </a:pPr>
+            <a:r>
+              <a:rPr lang="en-US" sz="1500" dirty="0">
+                <a:solidFill>
+                  <a:srgbClr val="3D3A36"/>
                 </a:solidFill>
                 <a:latin typeface="Calibri" pitchFamily="34" charset="0"/>
                 <a:ea typeface="Calibri" pitchFamily="34" charset="-122"/>
                 <a:cs typeface="Calibri" pitchFamily="34" charset="-120"/>
               </a:rPr>
-              <a:t>3 / 5</a:t>
-            </a:r>
-            <a:endParaRPr lang="en-US" sz="900" dirty="0"/>
-          </a:p>
-        </p:txBody>
-      </p:sp>
-      <p:sp>
-        <p:nvSpPr>
-          <p:cNvPr id="4" name="Text 2"/>
-          <p:cNvSpPr/>
-          <p:nvPr/>
-        </p:nvSpPr>
-        <p:spPr>
-          <a:xfrm>
-            <a:off x="457200" y="274320"/>
-            <a:ext cx="8229600" cy="640080"/>
-          </a:xfrm>
-          <a:prstGeom prst="rect">
-            <a:avLst/>
-          </a:prstGeom>
-          <a:noFill/>
-          <a:ln/>
-        </p:spPr>
-        <p:txBody>
-          <a:bodyPr wrap="square" rtlCol="0" anchor="ctr"/>
-          <a:lstStyle/>
-          <a:p>
-            <a:pPr indent="0" marL="0">
-              <a:buNone/>
-            </a:pPr>
-            <a:r>
-              <a:rPr lang="en-US" sz="2600" b="1" dirty="0">
-                <a:solidFill>
-                  <a:srgbClr val="1B2A4A"/>
-                </a:solidFill>
-                <a:latin typeface="Georgia" pitchFamily="34" charset="0"/>
-                <a:ea typeface="Georgia" pitchFamily="34" charset="-122"/>
-                <a:cs typeface="Georgia" pitchFamily="34" charset="-120"/>
-              </a:rPr>
-              <a:t>Types of Fractions</a:t>
-            </a:r>
-            <a:endParaRPr lang="en-US" sz="2600" dirty="0"/>
-          </a:p>
-        </p:txBody>
-      </p:sp>
-      <p:sp>
-        <p:nvSpPr>
-          <p:cNvPr id="5" name="Shape 3"/>
-          <p:cNvSpPr/>
-          <p:nvPr/>
-        </p:nvSpPr>
-        <p:spPr>
-          <a:xfrm>
-            <a:off x="457200" y="1188720"/>
-            <a:ext cx="2560320" cy="1828800"/>
-          </a:xfrm>
-          <a:prstGeom prst="rect">
-            <a:avLst/>
-          </a:prstGeom>
-          <a:solidFill>
-            <a:srgbClr val="FFFFFF"/>
-          </a:solidFill>
-          <a:ln w="12700">
-            <a:solidFill>
-              <a:srgbClr val="E5E2DC"/>
-            </a:solidFill>
-            <a:prstDash val="solid"/>
-          </a:ln>
+              <a:t>A fraction represents EQUAL PARTS of a whole.</a:t>
+            </a:r>
+            <a:endParaRPr lang="en-US" sz="1500" dirty="0"/>
+          </a:p>
+          <a:p>
+            <a:pPr marL="342900" indent="-342900">
+              <a:spcAft>
+                <a:spcPts val="800"/>
+              </a:spcAft>
+              <a:buSzPct val="100000"/>
+              <a:buChar char="•"/>
+            </a:pPr>
+            <a:r>
+              <a:rPr lang="en-US" sz="1500" dirty="0">
+                <a:solidFill>
+                  <a:srgbClr val="3D3A36"/>
+                </a:solidFill>
+                <a:latin typeface="Calibri" pitchFamily="34" charset="0"/>
+                <a:ea typeface="Calibri" pitchFamily="34" charset="-122"/>
+                <a:cs typeface="Calibri" pitchFamily="34" charset="-120"/>
+              </a:rPr>
+              <a:t>¾ means 3 out of 4 equal parts.</a:t>
+            </a:r>
+            <a:endParaRPr lang="en-US" sz="1500" dirty="0"/>
+          </a:p>
+          <a:p>
+            <a:pPr marL="342900" indent="-342900">
+              <a:spcAft>
+                <a:spcPts val="800"/>
+              </a:spcAft>
+              <a:buSzPct val="100000"/>
+              <a:buChar char="•"/>
+            </a:pPr>
+            <a:r>
+              <a:rPr lang="en-US" sz="1500" dirty="0">
+                <a:solidFill>
+                  <a:srgbClr val="3D3A36"/>
+                </a:solidFill>
+                <a:latin typeface="Calibri" pitchFamily="34" charset="0"/>
+                <a:ea typeface="Calibri" pitchFamily="34" charset="-122"/>
+                <a:cs typeface="Calibri" pitchFamily="34" charset="-120"/>
+              </a:rPr>
+              <a:t>The DENOMINATOR tells you how many equal parts the whole is divided into.</a:t>
+            </a:r>
+            <a:endParaRPr lang="en-US" sz="1500" dirty="0"/>
+          </a:p>
+          <a:p>
+            <a:pPr marL="342900" indent="-342900">
+              <a:spcAft>
+                <a:spcPts val="800"/>
+              </a:spcAft>
+              <a:buSzPct val="100000"/>
+              <a:buChar char="•"/>
+            </a:pPr>
+            <a:r>
+              <a:rPr lang="en-US" sz="1500" dirty="0">
+                <a:solidFill>
+                  <a:srgbClr val="3D3A36"/>
+                </a:solidFill>
+                <a:latin typeface="Calibri" pitchFamily="34" charset="0"/>
+                <a:ea typeface="Calibri" pitchFamily="34" charset="-122"/>
+                <a:cs typeface="Calibri" pitchFamily="34" charset="-120"/>
+              </a:rPr>
+              <a:t>The NUMERATOR tells you how many of those parts you have.</a:t>
+            </a:r>
+            <a:endParaRPr lang="en-US" sz="1500" dirty="0"/>
+          </a:p>
+          <a:p>
+            <a:pPr marL="342900" indent="-342900">
+              <a:spcAft>
+                <a:spcPts val="800"/>
+              </a:spcAft>
+              <a:buSzPct val="100000"/>
+              <a:buChar char="•"/>
+            </a:pPr>
+            <a:r>
+              <a:rPr lang="en-US" sz="1500" dirty="0">
+                <a:solidFill>
+                  <a:srgbClr val="3D3A36"/>
+                </a:solidFill>
+                <a:latin typeface="Calibri" pitchFamily="34" charset="0"/>
+                <a:ea typeface="Calibri" pitchFamily="34" charset="-122"/>
+                <a:cs typeface="Calibri" pitchFamily="34" charset="-120"/>
+              </a:rPr>
+              <a:t>Fractions can represent parts of shapes, quantities, or amounts.</a:t>
+            </a:r>
+            <a:endParaRPr lang="en-US" sz="1500" dirty="0"/>
+          </a:p>
+        </p:txBody>
+      </p:sp>
+      <p:sp>
+        <p:nvSpPr>
+          <p:cNvPr id="7" name="Shape 5"/>
+          <p:cNvSpPr/>
+          <p:nvPr/>
+        </p:nvSpPr>
+        <p:spPr>
+          <a:xfrm>
+            <a:off x="731520" y="4206240"/>
+            <a:ext cx="7680960" cy="640080"/>
+          </a:xfrm>
+          <a:prstGeom prst="rect">
+            <a:avLst/>
+          </a:prstGeom>
+          <a:solidFill>
+            <a:srgbClr val="E8F5F3"/>
+          </a:solidFill>
+          <a:ln/>
           <a:effectLst>
             <a:outerShdw sx="100000" sy="100000" kx="0" ky="0" algn="bl" rotWithShape="0" blurRad="50800" dist="25400" dir="8100000">
               <a:srgbClr val="000000">
@@ -1778,34 +2805,14 @@
       </p:sp>
       <p:sp>
         <p:nvSpPr>
-          <p:cNvPr id="6" name="Shape 4"/>
-          <p:cNvSpPr/>
-          <p:nvPr/>
-        </p:nvSpPr>
-        <p:spPr>
-          <a:xfrm>
-            <a:off x="457200" y="1188720"/>
-            <a:ext cx="2560320" cy="54864"/>
-          </a:xfrm>
-          <a:prstGeom prst="rect">
-            <a:avLst/>
-          </a:prstGeom>
-          <a:solidFill>
-            <a:srgbClr val="2A9D8F"/>
-          </a:solidFill>
-          <a:ln/>
-        </p:spPr>
-      </p:sp>
-      <p:sp>
-        <p:nvSpPr>
-          <p:cNvPr id="7" name="Text 5"/>
-          <p:cNvSpPr/>
-          <p:nvPr/>
-        </p:nvSpPr>
-        <p:spPr>
-          <a:xfrm>
-            <a:off x="594360" y="1325880"/>
-            <a:ext cx="2286000" cy="365760"/>
+          <p:cNvPr id="8" name="Text 6"/>
+          <p:cNvSpPr/>
+          <p:nvPr/>
+        </p:nvSpPr>
+        <p:spPr>
+          <a:xfrm>
+            <a:off x="914400" y="4251960"/>
+            <a:ext cx="7315200" cy="548640"/>
           </a:xfrm>
           <a:prstGeom prst="rect">
             <a:avLst/>
@@ -1821,46 +2828,21 @@
               <a:buNone/>
             </a:pPr>
             <a:r>
-              <a:rPr lang="en-US" sz="1400" b="1" dirty="0">
-                <a:solidFill>
-                  <a:srgbClr val="1B2A4A"/>
+              <a:rPr lang="en-US" sz="1200" b="1" dirty="0">
+                <a:solidFill>
+                  <a:srgbClr val="2A9D8F"/>
                 </a:solidFill>
                 <a:latin typeface="Calibri" pitchFamily="34" charset="0"/>
                 <a:ea typeface="Calibri" pitchFamily="34" charset="-122"/>
                 <a:cs typeface="Calibri" pitchFamily="34" charset="-120"/>
               </a:rPr>
-              <a:t>Proper Fractions</a:t>
-            </a:r>
-            <a:endParaRPr lang="en-US" sz="1400" dirty="0"/>
-          </a:p>
-        </p:txBody>
-      </p:sp>
-      <p:sp>
-        <p:nvSpPr>
-          <p:cNvPr id="8" name="Text 6"/>
-          <p:cNvSpPr/>
-          <p:nvPr/>
-        </p:nvSpPr>
-        <p:spPr>
-          <a:xfrm>
-            <a:off x="594360" y="1737360"/>
-            <a:ext cx="2286000" cy="1097280"/>
-          </a:xfrm>
-          <a:prstGeom prst="rect">
-            <a:avLst/>
-          </a:prstGeom>
-          <a:noFill/>
-          <a:ln/>
-        </p:spPr>
-        <p:txBody>
-          <a:bodyPr wrap="square" rtlCol="0" anchor="t"/>
-          <a:lstStyle/>
-          <a:p>
+              <a:t>Key Idea: </a:t>
+            </a:r>
             <a:pPr indent="0" marL="0">
               <a:buNone/>
             </a:pPr>
             <a:r>
-              <a:rPr lang="en-US" sz="1100" dirty="0">
+              <a:rPr lang="en-US" sz="1200" i="1" dirty="0">
                 <a:solidFill>
                   <a:srgbClr val="3D3A36"/>
                 </a:solidFill>
@@ -1868,269 +2850,9 @@
                 <a:ea typeface="Calibri" pitchFamily="34" charset="-122"/>
                 <a:cs typeface="Calibri" pitchFamily="34" charset="-120"/>
               </a:rPr>
-              <a:t>Numerator &lt; denominator. Value is less than 1. Examples: ½, ³⁄₄, ²⁄₅. These are 'part of a whole'.</a:t>
-            </a:r>
-            <a:endParaRPr lang="en-US" sz="1100" dirty="0"/>
-          </a:p>
-        </p:txBody>
-      </p:sp>
-      <p:sp>
-        <p:nvSpPr>
-          <p:cNvPr id="9" name="Shape 7"/>
-          <p:cNvSpPr/>
-          <p:nvPr/>
-        </p:nvSpPr>
-        <p:spPr>
-          <a:xfrm>
-            <a:off x="3291840" y="1188720"/>
-            <a:ext cx="2560320" cy="1828800"/>
-          </a:xfrm>
-          <a:prstGeom prst="rect">
-            <a:avLst/>
-          </a:prstGeom>
-          <a:solidFill>
-            <a:srgbClr val="FFFFFF"/>
-          </a:solidFill>
-          <a:ln w="12700">
-            <a:solidFill>
-              <a:srgbClr val="E5E2DC"/>
-            </a:solidFill>
-            <a:prstDash val="solid"/>
-          </a:ln>
-          <a:effectLst>
-            <a:outerShdw sx="100000" sy="100000" kx="0" ky="0" algn="bl" rotWithShape="0" blurRad="50800" dist="25400" dir="8100000">
-              <a:srgbClr val="000000">
-                <a:alpha val="10000"/>
-              </a:srgbClr>
-            </a:outerShdw>
-          </a:effectLst>
-        </p:spPr>
-      </p:sp>
-      <p:sp>
-        <p:nvSpPr>
-          <p:cNvPr id="10" name="Shape 8"/>
-          <p:cNvSpPr/>
-          <p:nvPr/>
-        </p:nvSpPr>
-        <p:spPr>
-          <a:xfrm>
-            <a:off x="3291840" y="1188720"/>
-            <a:ext cx="2560320" cy="54864"/>
-          </a:xfrm>
-          <a:prstGeom prst="rect">
-            <a:avLst/>
-          </a:prstGeom>
-          <a:solidFill>
-            <a:srgbClr val="2A9D8F"/>
-          </a:solidFill>
-          <a:ln/>
-        </p:spPr>
-      </p:sp>
-      <p:sp>
-        <p:nvSpPr>
-          <p:cNvPr id="11" name="Text 9"/>
-          <p:cNvSpPr/>
-          <p:nvPr/>
-        </p:nvSpPr>
-        <p:spPr>
-          <a:xfrm>
-            <a:off x="3429000" y="1325880"/>
-            <a:ext cx="2286000" cy="365760"/>
-          </a:xfrm>
-          <a:prstGeom prst="rect">
-            <a:avLst/>
-          </a:prstGeom>
-          <a:noFill/>
-          <a:ln/>
-        </p:spPr>
-        <p:txBody>
-          <a:bodyPr wrap="square" rtlCol="0" anchor="ctr"/>
-          <a:lstStyle/>
-          <a:p>
-            <a:pPr indent="0" marL="0">
-              <a:buNone/>
-            </a:pPr>
-            <a:r>
-              <a:rPr lang="en-US" sz="1400" b="1" dirty="0">
-                <a:solidFill>
-                  <a:srgbClr val="1B2A4A"/>
-                </a:solidFill>
-                <a:latin typeface="Calibri" pitchFamily="34" charset="0"/>
-                <a:ea typeface="Calibri" pitchFamily="34" charset="-122"/>
-                <a:cs typeface="Calibri" pitchFamily="34" charset="-120"/>
-              </a:rPr>
-              <a:t>Improper Fractions</a:t>
-            </a:r>
-            <a:endParaRPr lang="en-US" sz="1400" dirty="0"/>
-          </a:p>
-        </p:txBody>
-      </p:sp>
-      <p:sp>
-        <p:nvSpPr>
-          <p:cNvPr id="12" name="Text 10"/>
-          <p:cNvSpPr/>
-          <p:nvPr/>
-        </p:nvSpPr>
-        <p:spPr>
-          <a:xfrm>
-            <a:off x="3429000" y="1737360"/>
-            <a:ext cx="2286000" cy="1097280"/>
-          </a:xfrm>
-          <a:prstGeom prst="rect">
-            <a:avLst/>
-          </a:prstGeom>
-          <a:noFill/>
-          <a:ln/>
-        </p:spPr>
-        <p:txBody>
-          <a:bodyPr wrap="square" rtlCol="0" anchor="t"/>
-          <a:lstStyle/>
-          <a:p>
-            <a:pPr indent="0" marL="0">
-              <a:buNone/>
-            </a:pPr>
-            <a:r>
-              <a:rPr lang="en-US" sz="1100" dirty="0">
-                <a:solidFill>
-                  <a:srgbClr val="3D3A36"/>
-                </a:solidFill>
-                <a:latin typeface="Calibri" pitchFamily="34" charset="0"/>
-                <a:ea typeface="Calibri" pitchFamily="34" charset="-122"/>
-                <a:cs typeface="Calibri" pitchFamily="34" charset="-120"/>
-              </a:rPr>
-              <a:t>Numerator ≥ denominator. Value is 1 or greater. Examples: ⁵⁄₃, ⁷⁄₄, ⁹⁄₂. 'More than a whole'.</a:t>
-            </a:r>
-            <a:endParaRPr lang="en-US" sz="1100" dirty="0"/>
-          </a:p>
-        </p:txBody>
-      </p:sp>
-      <p:sp>
-        <p:nvSpPr>
-          <p:cNvPr id="13" name="Shape 11"/>
-          <p:cNvSpPr/>
-          <p:nvPr/>
-        </p:nvSpPr>
-        <p:spPr>
-          <a:xfrm>
-            <a:off x="6126480" y="1188720"/>
-            <a:ext cx="2560320" cy="1828800"/>
-          </a:xfrm>
-          <a:prstGeom prst="rect">
-            <a:avLst/>
-          </a:prstGeom>
-          <a:solidFill>
-            <a:srgbClr val="FFFFFF"/>
-          </a:solidFill>
-          <a:ln w="12700">
-            <a:solidFill>
-              <a:srgbClr val="E5E2DC"/>
-            </a:solidFill>
-            <a:prstDash val="solid"/>
-          </a:ln>
-          <a:effectLst>
-            <a:outerShdw sx="100000" sy="100000" kx="0" ky="0" algn="bl" rotWithShape="0" blurRad="50800" dist="25400" dir="8100000">
-              <a:srgbClr val="000000">
-                <a:alpha val="10000"/>
-              </a:srgbClr>
-            </a:outerShdw>
-          </a:effectLst>
-        </p:spPr>
-      </p:sp>
-      <p:sp>
-        <p:nvSpPr>
-          <p:cNvPr id="14" name="Shape 12"/>
-          <p:cNvSpPr/>
-          <p:nvPr/>
-        </p:nvSpPr>
-        <p:spPr>
-          <a:xfrm>
-            <a:off x="6126480" y="1188720"/>
-            <a:ext cx="2560320" cy="54864"/>
-          </a:xfrm>
-          <a:prstGeom prst="rect">
-            <a:avLst/>
-          </a:prstGeom>
-          <a:solidFill>
-            <a:srgbClr val="2A9D8F"/>
-          </a:solidFill>
-          <a:ln/>
-        </p:spPr>
-      </p:sp>
-      <p:sp>
-        <p:nvSpPr>
-          <p:cNvPr id="15" name="Text 13"/>
-          <p:cNvSpPr/>
-          <p:nvPr/>
-        </p:nvSpPr>
-        <p:spPr>
-          <a:xfrm>
-            <a:off x="6263640" y="1325880"/>
-            <a:ext cx="2286000" cy="365760"/>
-          </a:xfrm>
-          <a:prstGeom prst="rect">
-            <a:avLst/>
-          </a:prstGeom>
-          <a:noFill/>
-          <a:ln/>
-        </p:spPr>
-        <p:txBody>
-          <a:bodyPr wrap="square" rtlCol="0" anchor="ctr"/>
-          <a:lstStyle/>
-          <a:p>
-            <a:pPr indent="0" marL="0">
-              <a:buNone/>
-            </a:pPr>
-            <a:r>
-              <a:rPr lang="en-US" sz="1400" b="1" dirty="0">
-                <a:solidFill>
-                  <a:srgbClr val="1B2A4A"/>
-                </a:solidFill>
-                <a:latin typeface="Calibri" pitchFamily="34" charset="0"/>
-                <a:ea typeface="Calibri" pitchFamily="34" charset="-122"/>
-                <a:cs typeface="Calibri" pitchFamily="34" charset="-120"/>
-              </a:rPr>
-              <a:t>Mixed Numbers</a:t>
-            </a:r>
-            <a:endParaRPr lang="en-US" sz="1400" dirty="0"/>
-          </a:p>
-        </p:txBody>
-      </p:sp>
-      <p:sp>
-        <p:nvSpPr>
-          <p:cNvPr id="16" name="Text 14"/>
-          <p:cNvSpPr/>
-          <p:nvPr/>
-        </p:nvSpPr>
-        <p:spPr>
-          <a:xfrm>
-            <a:off x="6263640" y="1737360"/>
-            <a:ext cx="2286000" cy="1097280"/>
-          </a:xfrm>
-          <a:prstGeom prst="rect">
-            <a:avLst/>
-          </a:prstGeom>
-          <a:noFill/>
-          <a:ln/>
-        </p:spPr>
-        <p:txBody>
-          <a:bodyPr wrap="square" rtlCol="0" anchor="t"/>
-          <a:lstStyle/>
-          <a:p>
-            <a:pPr indent="0" marL="0">
-              <a:buNone/>
-            </a:pPr>
-            <a:r>
-              <a:rPr lang="en-US" sz="1100" dirty="0">
-                <a:solidFill>
-                  <a:srgbClr val="3D3A36"/>
-                </a:solidFill>
-                <a:latin typeface="Calibri" pitchFamily="34" charset="0"/>
-                <a:ea typeface="Calibri" pitchFamily="34" charset="-122"/>
-                <a:cs typeface="Calibri" pitchFamily="34" charset="-120"/>
-              </a:rPr>
-              <a:t>A whole number plus a fraction. Examples: 1½, 2³⁄₄. Convert from improper: ⁷⁄₄ = 1³⁄₄ (7÷4 = 1 remainder 3).</a:t>
-            </a:r>
-            <a:endParaRPr lang="en-US" sz="1100" dirty="0"/>
+              <a:t>The fraction bar means DIVIDE: ¾ = 3 ÷ 4 = 0.75.</a:t>
+            </a:r>
+            <a:endParaRPr lang="en-US" sz="1200" dirty="0"/>
           </a:p>
         </p:txBody>
       </p:sp>
@@ -2175,7 +2897,47 @@
         <p:spPr>
           <a:xfrm>
             <a:off x="0" y="0"/>
-            <a:ext cx="9144000" cy="54864"/>
+            <a:ext cx="9144000" cy="822960"/>
+          </a:xfrm>
+          <a:prstGeom prst="rect">
+            <a:avLst/>
+          </a:prstGeom>
+          <a:solidFill>
+            <a:srgbClr val="FFFFFF"/>
+          </a:solidFill>
+          <a:ln/>
+        </p:spPr>
+      </p:sp>
+      <p:sp>
+        <p:nvSpPr>
+          <p:cNvPr id="3" name="Shape 1"/>
+          <p:cNvSpPr/>
+          <p:nvPr/>
+        </p:nvSpPr>
+        <p:spPr>
+          <a:xfrm>
+            <a:off x="0" y="804672"/>
+            <a:ext cx="9144000" cy="27432"/>
+          </a:xfrm>
+          <a:prstGeom prst="rect">
+            <a:avLst/>
+          </a:prstGeom>
+          <a:solidFill>
+            <a:srgbClr val="E5E2DC"/>
+          </a:solidFill>
+          <a:ln/>
+        </p:spPr>
+      </p:sp>
+      <p:sp>
+        <p:nvSpPr>
+          <p:cNvPr id="4" name="Shape 2"/>
+          <p:cNvSpPr/>
+          <p:nvPr/>
+        </p:nvSpPr>
+        <p:spPr>
+          <a:xfrm>
+            <a:off x="548640" y="201168"/>
+            <a:ext cx="54864" cy="420624"/>
           </a:xfrm>
           <a:prstGeom prst="rect">
             <a:avLst/>
@@ -2188,14 +2950,14 @@
       </p:sp>
       <p:sp>
         <p:nvSpPr>
-          <p:cNvPr id="3" name="Text 1"/>
-          <p:cNvSpPr/>
-          <p:nvPr/>
-        </p:nvSpPr>
-        <p:spPr>
-          <a:xfrm>
-            <a:off x="7772400" y="4709160"/>
-            <a:ext cx="1097280" cy="320040"/>
+          <p:cNvPr id="5" name="Text 3"/>
+          <p:cNvSpPr/>
+          <p:nvPr/>
+        </p:nvSpPr>
+        <p:spPr>
+          <a:xfrm>
+            <a:off x="777240" y="137160"/>
+            <a:ext cx="7772400" cy="548640"/>
           </a:xfrm>
           <a:prstGeom prst="rect">
             <a:avLst/>
@@ -2204,53 +2966,14 @@
           <a:ln/>
         </p:spPr>
         <p:txBody>
-          <a:bodyPr wrap="square" rtlCol="0" anchor="ctr"/>
-          <a:lstStyle/>
-          <a:p>
-            <a:pPr algn="r" indent="0" marL="0">
-              <a:buNone/>
-            </a:pPr>
-            <a:r>
-              <a:rPr lang="en-US" sz="900" dirty="0">
-                <a:solidFill>
-                  <a:srgbClr val="6B6660"/>
-                </a:solidFill>
-                <a:latin typeface="Calibri" pitchFamily="34" charset="0"/>
-                <a:ea typeface="Calibri" pitchFamily="34" charset="-122"/>
-                <a:cs typeface="Calibri" pitchFamily="34" charset="-120"/>
-              </a:rPr>
-              <a:t>4 / 5</a:t>
-            </a:r>
-            <a:endParaRPr lang="en-US" sz="900" dirty="0"/>
-          </a:p>
-        </p:txBody>
-      </p:sp>
-      <p:sp>
-        <p:nvSpPr>
-          <p:cNvPr id="4" name="Text 2"/>
-          <p:cNvSpPr/>
-          <p:nvPr/>
-        </p:nvSpPr>
-        <p:spPr>
-          <a:xfrm>
-            <a:off x="457200" y="274320"/>
-            <a:ext cx="8229600" cy="640080"/>
-          </a:xfrm>
-          <a:prstGeom prst="rect">
-            <a:avLst/>
-          </a:prstGeom>
-          <a:noFill/>
-          <a:ln/>
-        </p:spPr>
-        <p:txBody>
-          <a:bodyPr wrap="square" rtlCol="0" anchor="ctr"/>
+          <a:bodyPr wrap="square" lIns="0" tIns="0" rIns="0" bIns="0" rtlCol="0" anchor="ctr"/>
           <a:lstStyle/>
           <a:p>
             <a:pPr indent="0" marL="0">
               <a:buNone/>
             </a:pPr>
             <a:r>
-              <a:rPr lang="en-US" sz="2600" b="1" dirty="0">
+              <a:rPr lang="en-US" sz="2000" b="1" dirty="0">
                 <a:solidFill>
                   <a:srgbClr val="1B2A4A"/>
                 </a:solidFill>
@@ -2258,141 +2981,30 @@
                 <a:ea typeface="Georgia" pitchFamily="34" charset="-122"/>
                 <a:cs typeface="Georgia" pitchFamily="34" charset="-120"/>
               </a:rPr>
-              <a:t>Fractions of Amounts</a:t>
-            </a:r>
-            <a:endParaRPr lang="en-US" sz="2600" dirty="0"/>
-          </a:p>
-        </p:txBody>
-      </p:sp>
-      <p:sp>
-        <p:nvSpPr>
-          <p:cNvPr id="5" name="Text 3"/>
-          <p:cNvSpPr/>
-          <p:nvPr/>
-        </p:nvSpPr>
-        <p:spPr>
-          <a:xfrm>
-            <a:off x="457200" y="1188720"/>
+              <a:t>Types of Fractions</a:t>
+            </a:r>
+            <a:endParaRPr lang="en-US" sz="2000" dirty="0"/>
+          </a:p>
+        </p:txBody>
+      </p:sp>
+      <p:sp>
+        <p:nvSpPr>
+          <p:cNvPr id="6" name="Shape 4"/>
+          <p:cNvSpPr/>
+          <p:nvPr/>
+        </p:nvSpPr>
+        <p:spPr>
+          <a:xfrm>
+            <a:off x="548640" y="1051560"/>
             <a:ext cx="3840480" cy="3474720"/>
           </a:xfrm>
           <a:prstGeom prst="rect">
             <a:avLst/>
           </a:prstGeom>
-          <a:noFill/>
-          <a:ln/>
-        </p:spPr>
-        <p:txBody>
-          <a:bodyPr wrap="square" rtlCol="0" anchor="t"/>
-          <a:lstStyle/>
-          <a:p>
-            <a:pPr marL="342900" indent="-342900">
-              <a:spcAft>
-                <a:spcPts val="600"/>
-              </a:spcAft>
-              <a:buSzPct val="100000"/>
-              <a:buChar char="•"/>
-            </a:pPr>
-            <a:r>
-              <a:rPr lang="en-US" sz="1400" dirty="0">
-                <a:solidFill>
-                  <a:srgbClr val="3D3A36"/>
-                </a:solidFill>
-                <a:latin typeface="Calibri" pitchFamily="34" charset="0"/>
-                <a:ea typeface="Calibri" pitchFamily="34" charset="-122"/>
-                <a:cs typeface="Calibri" pitchFamily="34" charset="-120"/>
-              </a:rPr>
-              <a:t>To find a fraction of an amount: divide by denominator, multiply by numerator</a:t>
-            </a:r>
-            <a:endParaRPr lang="en-US" sz="1400" dirty="0"/>
-          </a:p>
-          <a:p>
-            <a:pPr marL="342900" indent="-342900">
-              <a:spcAft>
-                <a:spcPts val="600"/>
-              </a:spcAft>
-              <a:buSzPct val="100000"/>
-              <a:buChar char="•"/>
-            </a:pPr>
-            <a:r>
-              <a:rPr lang="en-US" sz="1400" dirty="0">
-                <a:solidFill>
-                  <a:srgbClr val="3D3A36"/>
-                </a:solidFill>
-                <a:latin typeface="Calibri" pitchFamily="34" charset="0"/>
-                <a:ea typeface="Calibri" pitchFamily="34" charset="-122"/>
-                <a:cs typeface="Calibri" pitchFamily="34" charset="-120"/>
-              </a:rPr>
-              <a:t>¾ of 20: 20 ÷ 4 = 5, then 5 × 3 = 15</a:t>
-            </a:r>
-            <a:endParaRPr lang="en-US" sz="1400" dirty="0"/>
-          </a:p>
-          <a:p>
-            <a:pPr marL="342900" indent="-342900">
-              <a:spcAft>
-                <a:spcPts val="600"/>
-              </a:spcAft>
-              <a:buSzPct val="100000"/>
-              <a:buChar char="•"/>
-            </a:pPr>
-            <a:r>
-              <a:rPr lang="en-US" sz="1400" dirty="0">
-                <a:solidFill>
-                  <a:srgbClr val="3D3A36"/>
-                </a:solidFill>
-                <a:latin typeface="Calibri" pitchFamily="34" charset="0"/>
-                <a:ea typeface="Calibri" pitchFamily="34" charset="-122"/>
-                <a:cs typeface="Calibri" pitchFamily="34" charset="-120"/>
-              </a:rPr>
-              <a:t>²⁄₅ of 30: 30 ÷ 5 = 6, then 6 × 2 = 12</a:t>
-            </a:r>
-            <a:endParaRPr lang="en-US" sz="1400" dirty="0"/>
-          </a:p>
-          <a:p>
-            <a:pPr marL="342900" indent="-342900">
-              <a:spcAft>
-                <a:spcPts val="600"/>
-              </a:spcAft>
-              <a:buSzPct val="100000"/>
-              <a:buChar char="•"/>
-            </a:pPr>
-            <a:r>
-              <a:rPr lang="en-US" sz="1400" dirty="0">
-                <a:solidFill>
-                  <a:srgbClr val="3D3A36"/>
-                </a:solidFill>
-                <a:latin typeface="Calibri" pitchFamily="34" charset="0"/>
-                <a:ea typeface="Calibri" pitchFamily="34" charset="-122"/>
-                <a:cs typeface="Calibri" pitchFamily="34" charset="-120"/>
-              </a:rPr>
-              <a:t>This works because ¹⁄₄ of 20 = 5, so ³⁄₄ = 3 × 5 = 15</a:t>
-            </a:r>
-            <a:endParaRPr lang="en-US" sz="1400" dirty="0"/>
-          </a:p>
-        </p:txBody>
-      </p:sp>
-      <p:sp>
-        <p:nvSpPr>
-          <p:cNvPr id="6" name="Shape 4"/>
-          <p:cNvSpPr/>
-          <p:nvPr/>
-        </p:nvSpPr>
-        <p:spPr>
-          <a:xfrm>
-            <a:off x="4846320" y="1188720"/>
-            <a:ext cx="3840480" cy="3474720"/>
-          </a:xfrm>
-          <a:prstGeom prst="rect">
-            <a:avLst/>
-          </a:prstGeom>
           <a:solidFill>
             <a:srgbClr val="FFFFFF"/>
           </a:solidFill>
-          <a:ln w="12700">
-            <a:solidFill>
-              <a:srgbClr val="E5E2DC"/>
-            </a:solidFill>
-            <a:prstDash val="solid"/>
-          </a:ln>
+          <a:ln/>
           <a:effectLst>
             <a:outerShdw sx="100000" sy="100000" kx="0" ky="0" algn="bl" rotWithShape="0" blurRad="50800" dist="25400" dir="8100000">
               <a:srgbClr val="000000">
@@ -2410,7 +3022,7 @@
         </p:nvSpPr>
         <p:spPr>
           <a:xfrm>
-            <a:off x="4846320" y="1188720"/>
+            <a:off x="548640" y="1051560"/>
             <a:ext cx="3840480" cy="54864"/>
           </a:xfrm>
           <a:prstGeom prst="rect">
@@ -2430,8 +3042,8 @@
         </p:nvSpPr>
         <p:spPr>
           <a:xfrm>
-            <a:off x="5120640" y="1371600"/>
-            <a:ext cx="3291840" cy="3108960"/>
+            <a:off x="777240" y="1188720"/>
+            <a:ext cx="3383280" cy="457200"/>
           </a:xfrm>
           <a:prstGeom prst="rect">
             <a:avLst/>
@@ -2440,43 +3052,75 @@
           <a:ln/>
         </p:spPr>
         <p:txBody>
+          <a:bodyPr wrap="square" lIns="0" tIns="0" rIns="0" bIns="0" rtlCol="0" anchor="ctr"/>
+          <a:lstStyle/>
+          <a:p>
+            <a:pPr indent="0" marL="0">
+              <a:buNone/>
+            </a:pPr>
+            <a:r>
+              <a:rPr lang="en-US" sz="1500" b="1" dirty="0">
+                <a:solidFill>
+                  <a:srgbClr val="1B2A4A"/>
+                </a:solidFill>
+                <a:latin typeface="Georgia" pitchFamily="34" charset="0"/>
+                <a:ea typeface="Georgia" pitchFamily="34" charset="-122"/>
+                <a:cs typeface="Georgia" pitchFamily="34" charset="-120"/>
+              </a:rPr>
+              <a:t>Proper Fractions</a:t>
+            </a:r>
+            <a:endParaRPr lang="en-US" sz="1500" dirty="0"/>
+          </a:p>
+        </p:txBody>
+      </p:sp>
+      <p:sp>
+        <p:nvSpPr>
+          <p:cNvPr id="9" name="Text 7"/>
+          <p:cNvSpPr/>
+          <p:nvPr/>
+        </p:nvSpPr>
+        <p:spPr>
+          <a:xfrm>
+            <a:off x="777240" y="1691640"/>
+            <a:ext cx="3383280" cy="2651760"/>
+          </a:xfrm>
+          <a:prstGeom prst="rect">
+            <a:avLst/>
+          </a:prstGeom>
+          <a:noFill/>
+          <a:ln/>
+        </p:spPr>
+        <p:txBody>
           <a:bodyPr wrap="square" rtlCol="0" anchor="t"/>
           <a:lstStyle/>
           <a:p>
-            <a:pPr indent="0" marL="0">
+            <a:pPr marL="342900" indent="-342900">
               <a:spcAft>
-                <a:spcPts val="400"/>
+                <a:spcPts val="600"/>
               </a:spcAft>
-              <a:buNone/>
-            </a:pPr>
-            <a:r>
-              <a:rPr lang="en-US" sz="1600" b="1" dirty="0">
-                <a:solidFill>
-                  <a:srgbClr val="1B2A4A"/>
+              <a:buSzPct val="100000"/>
+              <a:buChar char="•"/>
+            </a:pPr>
+            <a:r>
+              <a:rPr lang="en-US" sz="1300" dirty="0">
+                <a:solidFill>
+                  <a:srgbClr val="3D3A36"/>
                 </a:solidFill>
                 <a:latin typeface="Calibri" pitchFamily="34" charset="0"/>
                 <a:ea typeface="Calibri" pitchFamily="34" charset="-122"/>
                 <a:cs typeface="Calibri" pitchFamily="34" charset="-120"/>
               </a:rPr>
-              <a:t>Fractions on a Number Line</a:t>
-            </a:r>
-            <a:endParaRPr lang="en-US" sz="1600" dirty="0"/>
-          </a:p>
-          <a:p>
-            <a:pPr indent="0" marL="0">
+              <a:t>Numerator is SMALLER than denominator</a:t>
+            </a:r>
+            <a:endParaRPr lang="en-US" sz="1300" dirty="0"/>
+          </a:p>
+          <a:p>
+            <a:pPr marL="342900" indent="-342900">
               <a:spcAft>
-                <a:spcPts val="400"/>
+                <a:spcPts val="600"/>
               </a:spcAft>
-              <a:buNone/>
-            </a:pPr>
-            <a:endParaRPr lang="en-US" sz="1600" dirty="0"/>
-          </a:p>
-          <a:p>
-            <a:pPr indent="0" marL="0">
-              <a:spcAft>
-                <a:spcPts val="400"/>
-              </a:spcAft>
-              <a:buNone/>
+              <a:buSzPct val="100000"/>
+              <a:buChar char="•"/>
             </a:pPr>
             <a:r>
               <a:rPr lang="en-US" sz="1300" dirty="0">
@@ -2487,16 +3131,17 @@
                 <a:ea typeface="Calibri" pitchFamily="34" charset="-122"/>
                 <a:cs typeface="Calibri" pitchFamily="34" charset="-120"/>
               </a:rPr>
-              <a:t>Fractions sit between whole numbers on the number line</a:t>
-            </a:r>
-            <a:endParaRPr lang="en-US" sz="1600" dirty="0"/>
-          </a:p>
-          <a:p>
-            <a:pPr indent="0" marL="0">
+              <a:t>Value is LESS than 1</a:t>
+            </a:r>
+            <a:endParaRPr lang="en-US" sz="1300" dirty="0"/>
+          </a:p>
+          <a:p>
+            <a:pPr marL="342900" indent="-342900">
               <a:spcAft>
-                <a:spcPts val="400"/>
+                <a:spcPts val="600"/>
               </a:spcAft>
-              <a:buNone/>
+              <a:buSzPct val="100000"/>
+              <a:buChar char="•"/>
             </a:pPr>
             <a:r>
               <a:rPr lang="en-US" sz="1300" dirty="0">
@@ -2507,16 +3152,17 @@
                 <a:ea typeface="Calibri" pitchFamily="34" charset="-122"/>
                 <a:cs typeface="Calibri" pitchFamily="34" charset="-120"/>
               </a:rPr>
-              <a:t>½ is exactly halfway between 0 and 1</a:t>
-            </a:r>
-            <a:endParaRPr lang="en-US" sz="1600" dirty="0"/>
-          </a:p>
-          <a:p>
-            <a:pPr indent="0" marL="0">
+              <a:t>Examples: ½, ¾, ⅖</a:t>
+            </a:r>
+            <a:endParaRPr lang="en-US" sz="1300" dirty="0"/>
+          </a:p>
+          <a:p>
+            <a:pPr marL="342900" indent="-342900">
               <a:spcAft>
-                <a:spcPts val="400"/>
+                <a:spcPts val="600"/>
               </a:spcAft>
-              <a:buNone/>
+              <a:buSzPct val="100000"/>
+              <a:buChar char="•"/>
             </a:pPr>
             <a:r>
               <a:rPr lang="en-US" sz="1300" dirty="0">
@@ -2527,16 +3173,125 @@
                 <a:ea typeface="Calibri" pitchFamily="34" charset="-122"/>
                 <a:cs typeface="Calibri" pitchFamily="34" charset="-120"/>
               </a:rPr>
-              <a:t>¼ is halfway between 0 and ½</a:t>
-            </a:r>
-            <a:endParaRPr lang="en-US" sz="1600" dirty="0"/>
-          </a:p>
+              <a:t>These are the most common type</a:t>
+            </a:r>
+            <a:endParaRPr lang="en-US" sz="1300" dirty="0"/>
+          </a:p>
+        </p:txBody>
+      </p:sp>
+      <p:sp>
+        <p:nvSpPr>
+          <p:cNvPr id="10" name="Shape 8"/>
+          <p:cNvSpPr/>
+          <p:nvPr/>
+        </p:nvSpPr>
+        <p:spPr>
+          <a:xfrm>
+            <a:off x="4754880" y="1051560"/>
+            <a:ext cx="3840480" cy="3474720"/>
+          </a:xfrm>
+          <a:prstGeom prst="rect">
+            <a:avLst/>
+          </a:prstGeom>
+          <a:solidFill>
+            <a:srgbClr val="FFFFFF"/>
+          </a:solidFill>
+          <a:ln/>
+          <a:effectLst>
+            <a:outerShdw sx="100000" sy="100000" kx="0" ky="0" algn="bl" rotWithShape="0" blurRad="50800" dist="25400" dir="8100000">
+              <a:srgbClr val="000000">
+                <a:alpha val="10000"/>
+              </a:srgbClr>
+            </a:outerShdw>
+          </a:effectLst>
+        </p:spPr>
+      </p:sp>
+      <p:sp>
+        <p:nvSpPr>
+          <p:cNvPr id="11" name="Shape 9"/>
+          <p:cNvSpPr/>
+          <p:nvPr/>
+        </p:nvSpPr>
+        <p:spPr>
+          <a:xfrm>
+            <a:off x="4754880" y="1051560"/>
+            <a:ext cx="3840480" cy="54864"/>
+          </a:xfrm>
+          <a:prstGeom prst="rect">
+            <a:avLst/>
+          </a:prstGeom>
+          <a:solidFill>
+            <a:srgbClr val="E9C46A"/>
+          </a:solidFill>
+          <a:ln/>
+        </p:spPr>
+      </p:sp>
+      <p:sp>
+        <p:nvSpPr>
+          <p:cNvPr id="12" name="Text 10"/>
+          <p:cNvSpPr/>
+          <p:nvPr/>
+        </p:nvSpPr>
+        <p:spPr>
+          <a:xfrm>
+            <a:off x="4983480" y="1188720"/>
+            <a:ext cx="3383280" cy="457200"/>
+          </a:xfrm>
+          <a:prstGeom prst="rect">
+            <a:avLst/>
+          </a:prstGeom>
+          <a:noFill/>
+          <a:ln/>
+        </p:spPr>
+        <p:txBody>
+          <a:bodyPr wrap="square" lIns="0" tIns="0" rIns="0" bIns="0" rtlCol="0" anchor="ctr"/>
+          <a:lstStyle/>
           <a:p>
             <a:pPr indent="0" marL="0">
+              <a:buNone/>
+            </a:pPr>
+            <a:r>
+              <a:rPr lang="en-US" sz="1500" b="1" dirty="0">
+                <a:solidFill>
+                  <a:srgbClr val="1B2A4A"/>
+                </a:solidFill>
+                <a:latin typeface="Georgia" pitchFamily="34" charset="0"/>
+                <a:ea typeface="Georgia" pitchFamily="34" charset="-122"/>
+                <a:cs typeface="Georgia" pitchFamily="34" charset="-120"/>
+              </a:rPr>
+              <a:t>Improper &amp; Mixed</a:t>
+            </a:r>
+            <a:endParaRPr lang="en-US" sz="1500" dirty="0"/>
+          </a:p>
+        </p:txBody>
+      </p:sp>
+      <p:sp>
+        <p:nvSpPr>
+          <p:cNvPr id="13" name="Text 11"/>
+          <p:cNvSpPr/>
+          <p:nvPr/>
+        </p:nvSpPr>
+        <p:spPr>
+          <a:xfrm>
+            <a:off x="4983480" y="1691640"/>
+            <a:ext cx="3383280" cy="2651760"/>
+          </a:xfrm>
+          <a:prstGeom prst="rect">
+            <a:avLst/>
+          </a:prstGeom>
+          <a:noFill/>
+          <a:ln/>
+        </p:spPr>
+        <p:txBody>
+          <a:bodyPr wrap="square" rtlCol="0" anchor="t"/>
+          <a:lstStyle/>
+          <a:p>
+            <a:pPr marL="342900" indent="-342900">
               <a:spcAft>
-                <a:spcPts val="400"/>
+                <a:spcPts val="600"/>
               </a:spcAft>
-              <a:buNone/>
+              <a:buSzPct val="100000"/>
+              <a:buChar char="•"/>
             </a:pPr>
             <a:r>
               <a:rPr lang="en-US" sz="1300" dirty="0">
@@ -2547,16 +3302,17 @@
                 <a:ea typeface="Calibri" pitchFamily="34" charset="-122"/>
                 <a:cs typeface="Calibri" pitchFamily="34" charset="-120"/>
               </a:rPr>
-              <a:t>Equivalent fractions sit at the SAME point</a:t>
-            </a:r>
-            <a:endParaRPr lang="en-US" sz="1600" dirty="0"/>
-          </a:p>
-          <a:p>
-            <a:pPr indent="0" marL="0">
+              <a:t>Improper: numerator ≥ denominator (e.g. 7/4)</a:t>
+            </a:r>
+            <a:endParaRPr lang="en-US" sz="1300" dirty="0"/>
+          </a:p>
+          <a:p>
+            <a:pPr marL="342900" indent="-342900">
               <a:spcAft>
-                <a:spcPts val="400"/>
+                <a:spcPts val="600"/>
               </a:spcAft>
-              <a:buNone/>
+              <a:buSzPct val="100000"/>
+              <a:buChar char="•"/>
             </a:pPr>
             <a:r>
               <a:rPr lang="en-US" sz="1300" dirty="0">
@@ -2567,9 +3323,51 @@
                 <a:ea typeface="Calibri" pitchFamily="34" charset="-122"/>
                 <a:cs typeface="Calibri" pitchFamily="34" charset="-120"/>
               </a:rPr>
-              <a:t>Improper fractions and mixed numbers extend beyond 1</a:t>
-            </a:r>
-            <a:endParaRPr lang="en-US" sz="1600" dirty="0"/>
+              <a:t>Value is 1 or MORE</a:t>
+            </a:r>
+            <a:endParaRPr lang="en-US" sz="1300" dirty="0"/>
+          </a:p>
+          <a:p>
+            <a:pPr marL="342900" indent="-342900">
+              <a:spcAft>
+                <a:spcPts val="600"/>
+              </a:spcAft>
+              <a:buSzPct val="100000"/>
+              <a:buChar char="•"/>
+            </a:pPr>
+            <a:r>
+              <a:rPr lang="en-US" sz="1300" dirty="0">
+                <a:solidFill>
+                  <a:srgbClr val="3D3A36"/>
+                </a:solidFill>
+                <a:latin typeface="Calibri" pitchFamily="34" charset="0"/>
+                <a:ea typeface="Calibri" pitchFamily="34" charset="-122"/>
+                <a:cs typeface="Calibri" pitchFamily="34" charset="-120"/>
+              </a:rPr>
+              <a:t>Mixed number: whole + fraction (e.g. 1¾)</a:t>
+            </a:r>
+            <a:endParaRPr lang="en-US" sz="1300" dirty="0"/>
+          </a:p>
+          <a:p>
+            <a:pPr marL="342900" indent="-342900">
+              <a:spcAft>
+                <a:spcPts val="600"/>
+              </a:spcAft>
+              <a:buSzPct val="100000"/>
+              <a:buChar char="•"/>
+            </a:pPr>
+            <a:r>
+              <a:rPr lang="en-US" sz="1300" dirty="0">
+                <a:solidFill>
+                  <a:srgbClr val="3D3A36"/>
+                </a:solidFill>
+                <a:latin typeface="Calibri" pitchFamily="34" charset="0"/>
+                <a:ea typeface="Calibri" pitchFamily="34" charset="-122"/>
+                <a:cs typeface="Calibri" pitchFamily="34" charset="-120"/>
+              </a:rPr>
+              <a:t>Convert: 7/4 = 1 remainder 3 = 1¾</a:t>
+            </a:r>
+            <a:endParaRPr lang="en-US" sz="1300" dirty="0"/>
           </a:p>
         </p:txBody>
       </p:sp>
@@ -2587,7 +3385,7 @@
     <p:bg>
       <p:bgPr>
         <a:solidFill>
-          <a:srgbClr val="1B2A4A"/>
+          <a:srgbClr val="FAF8F5"/>
         </a:solidFill>
       </p:bgPr>
     </p:bg>
@@ -2614,27 +3412,67 @@
         <p:spPr>
           <a:xfrm>
             <a:off x="0" y="0"/>
-            <a:ext cx="109728" cy="5143500"/>
-          </a:xfrm>
-          <a:prstGeom prst="rect">
-            <a:avLst/>
-          </a:prstGeom>
-          <a:solidFill>
-            <a:srgbClr val="E9C46A"/>
-          </a:solidFill>
-          <a:ln/>
-        </p:spPr>
-      </p:sp>
-      <p:sp>
-        <p:nvSpPr>
-          <p:cNvPr id="3" name="Text 1"/>
-          <p:cNvSpPr/>
-          <p:nvPr/>
-        </p:nvSpPr>
-        <p:spPr>
-          <a:xfrm>
-            <a:off x="731520" y="457200"/>
-            <a:ext cx="7772400" cy="731520"/>
+            <a:ext cx="9144000" cy="822960"/>
+          </a:xfrm>
+          <a:prstGeom prst="rect">
+            <a:avLst/>
+          </a:prstGeom>
+          <a:solidFill>
+            <a:srgbClr val="FFFFFF"/>
+          </a:solidFill>
+          <a:ln/>
+        </p:spPr>
+      </p:sp>
+      <p:sp>
+        <p:nvSpPr>
+          <p:cNvPr id="3" name="Shape 1"/>
+          <p:cNvSpPr/>
+          <p:nvPr/>
+        </p:nvSpPr>
+        <p:spPr>
+          <a:xfrm>
+            <a:off x="0" y="804672"/>
+            <a:ext cx="9144000" cy="27432"/>
+          </a:xfrm>
+          <a:prstGeom prst="rect">
+            <a:avLst/>
+          </a:prstGeom>
+          <a:solidFill>
+            <a:srgbClr val="E5E2DC"/>
+          </a:solidFill>
+          <a:ln/>
+        </p:spPr>
+      </p:sp>
+      <p:sp>
+        <p:nvSpPr>
+          <p:cNvPr id="4" name="Shape 2"/>
+          <p:cNvSpPr/>
+          <p:nvPr/>
+        </p:nvSpPr>
+        <p:spPr>
+          <a:xfrm>
+            <a:off x="548640" y="201168"/>
+            <a:ext cx="54864" cy="420624"/>
+          </a:xfrm>
+          <a:prstGeom prst="rect">
+            <a:avLst/>
+          </a:prstGeom>
+          <a:solidFill>
+            <a:srgbClr val="2A9D8F"/>
+          </a:solidFill>
+          <a:ln/>
+        </p:spPr>
+      </p:sp>
+      <p:sp>
+        <p:nvSpPr>
+          <p:cNvPr id="5" name="Text 3"/>
+          <p:cNvSpPr/>
+          <p:nvPr/>
+        </p:nvSpPr>
+        <p:spPr>
+          <a:xfrm>
+            <a:off x="777240" y="137160"/>
+            <a:ext cx="7772400" cy="548640"/>
           </a:xfrm>
           <a:prstGeom prst="rect">
             <a:avLst/>
@@ -2643,37 +3481,37 @@
           <a:ln/>
         </p:spPr>
         <p:txBody>
-          <a:bodyPr wrap="square" rtlCol="0" anchor="ctr"/>
+          <a:bodyPr wrap="square" lIns="0" tIns="0" rIns="0" bIns="0" rtlCol="0" anchor="ctr"/>
           <a:lstStyle/>
           <a:p>
             <a:pPr indent="0" marL="0">
               <a:buNone/>
             </a:pPr>
             <a:r>
-              <a:rPr lang="en-US" sz="3200" b="1" dirty="0">
-                <a:solidFill>
-                  <a:srgbClr val="FFFFFF"/>
+              <a:rPr lang="en-US" sz="2000" b="1" dirty="0">
+                <a:solidFill>
+                  <a:srgbClr val="1B2A4A"/>
                 </a:solidFill>
                 <a:latin typeface="Georgia" pitchFamily="34" charset="0"/>
                 <a:ea typeface="Georgia" pitchFamily="34" charset="-122"/>
                 <a:cs typeface="Georgia" pitchFamily="34" charset="-120"/>
               </a:rPr>
-              <a:t>Key Takeaways</a:t>
-            </a:r>
-            <a:endParaRPr lang="en-US" sz="3200" dirty="0"/>
-          </a:p>
-        </p:txBody>
-      </p:sp>
-      <p:sp>
-        <p:nvSpPr>
-          <p:cNvPr id="4" name="Text 2"/>
-          <p:cNvSpPr/>
-          <p:nvPr/>
-        </p:nvSpPr>
-        <p:spPr>
-          <a:xfrm>
-            <a:off x="731520" y="1463040"/>
-            <a:ext cx="7772400" cy="3200400"/>
+              <a:t>Converting Between Improper and Mixed</a:t>
+            </a:r>
+            <a:endParaRPr lang="en-US" sz="2000" dirty="0"/>
+          </a:p>
+        </p:txBody>
+      </p:sp>
+      <p:sp>
+        <p:nvSpPr>
+          <p:cNvPr id="6" name="Text 4"/>
+          <p:cNvSpPr/>
+          <p:nvPr/>
+        </p:nvSpPr>
+        <p:spPr>
+          <a:xfrm>
+            <a:off x="731520" y="1051560"/>
+            <a:ext cx="7680960" cy="3108960"/>
           </a:xfrm>
           <a:prstGeom prst="rect">
             <a:avLst/>
@@ -2687,7 +3525,7 @@
           <a:p>
             <a:pPr marL="342900" indent="-342900">
               <a:spcAft>
-                <a:spcPts val="1000"/>
+                <a:spcPts val="800"/>
               </a:spcAft>
               <a:buSzPct val="100000"/>
               <a:buChar char="•"/>
@@ -2695,20 +3533,20 @@
             <a:r>
               <a:rPr lang="en-US" sz="1500" dirty="0">
                 <a:solidFill>
-                  <a:srgbClr val="CADCFC"/>
+                  <a:srgbClr val="3D3A36"/>
                 </a:solidFill>
                 <a:latin typeface="Calibri" pitchFamily="34" charset="0"/>
                 <a:ea typeface="Calibri" pitchFamily="34" charset="-122"/>
                 <a:cs typeface="Calibri" pitchFamily="34" charset="-120"/>
               </a:rPr>
-              <a:t>Fraction = part of a whole. Numerator (top) ÷ denominator (bottom)</a:t>
+              <a:t>Improper → Mixed: divide numerator by denominator.</a:t>
             </a:r>
             <a:endParaRPr lang="en-US" sz="1500" dirty="0"/>
           </a:p>
           <a:p>
             <a:pPr marL="342900" indent="-342900">
               <a:spcAft>
-                <a:spcPts val="1000"/>
+                <a:spcPts val="800"/>
               </a:spcAft>
               <a:buSzPct val="100000"/>
               <a:buChar char="•"/>
@@ -2716,20 +3554,20 @@
             <a:r>
               <a:rPr lang="en-US" sz="1500" dirty="0">
                 <a:solidFill>
-                  <a:srgbClr val="CADCFC"/>
+                  <a:srgbClr val="3D3A36"/>
                 </a:solidFill>
                 <a:latin typeface="Calibri" pitchFamily="34" charset="0"/>
                 <a:ea typeface="Calibri" pitchFamily="34" charset="-122"/>
                 <a:cs typeface="Calibri" pitchFamily="34" charset="-120"/>
               </a:rPr>
-              <a:t>Proper &lt; 1; improper ≥ 1; mixed = whole + fraction</a:t>
+              <a:t>Example: 11/3 → 11 ÷ 3 = 3 remainder 2 → 3⅔.</a:t>
             </a:r>
             <a:endParaRPr lang="en-US" sz="1500" dirty="0"/>
           </a:p>
           <a:p>
             <a:pPr marL="342900" indent="-342900">
               <a:spcAft>
-                <a:spcPts val="1000"/>
+                <a:spcPts val="800"/>
               </a:spcAft>
               <a:buSzPct val="100000"/>
               <a:buChar char="•"/>
@@ -2737,20 +3575,20 @@
             <a:r>
               <a:rPr lang="en-US" sz="1500" dirty="0">
                 <a:solidFill>
-                  <a:srgbClr val="CADCFC"/>
+                  <a:srgbClr val="3D3A36"/>
                 </a:solidFill>
                 <a:latin typeface="Calibri" pitchFamily="34" charset="0"/>
                 <a:ea typeface="Calibri" pitchFamily="34" charset="-122"/>
                 <a:cs typeface="Calibri" pitchFamily="34" charset="-120"/>
               </a:rPr>
-              <a:t>Convert improper to mixed: divide numerator by denominator</a:t>
+              <a:t>Mixed → Improper: multiply whole × denominator + numerator.</a:t>
             </a:r>
             <a:endParaRPr lang="en-US" sz="1500" dirty="0"/>
           </a:p>
           <a:p>
             <a:pPr marL="342900" indent="-342900">
               <a:spcAft>
-                <a:spcPts val="1000"/>
+                <a:spcPts val="800"/>
               </a:spcAft>
               <a:buSzPct val="100000"/>
               <a:buChar char="•"/>
@@ -2758,20 +3596,20 @@
             <a:r>
               <a:rPr lang="en-US" sz="1500" dirty="0">
                 <a:solidFill>
-                  <a:srgbClr val="CADCFC"/>
+                  <a:srgbClr val="3D3A36"/>
                 </a:solidFill>
                 <a:latin typeface="Calibri" pitchFamily="34" charset="0"/>
                 <a:ea typeface="Calibri" pitchFamily="34" charset="-122"/>
                 <a:cs typeface="Calibri" pitchFamily="34" charset="-120"/>
               </a:rPr>
-              <a:t>Fraction of amount: divide by denominator, multiply by numerator</a:t>
+              <a:t>Example: 2¾ → (2 × 4) + 3 = 11 → 11/4.</a:t>
             </a:r>
             <a:endParaRPr lang="en-US" sz="1500" dirty="0"/>
           </a:p>
           <a:p>
             <a:pPr marL="342900" indent="-342900">
               <a:spcAft>
-                <a:spcPts val="1000"/>
+                <a:spcPts val="800"/>
               </a:spcAft>
               <a:buSzPct val="100000"/>
               <a:buChar char="•"/>
@@ -2779,13 +3617,13 @@
             <a:r>
               <a:rPr lang="en-US" sz="1500" dirty="0">
                 <a:solidFill>
-                  <a:srgbClr val="CADCFC"/>
+                  <a:srgbClr val="3D3A36"/>
                 </a:solidFill>
                 <a:latin typeface="Calibri" pitchFamily="34" charset="0"/>
                 <a:ea typeface="Calibri" pitchFamily="34" charset="-122"/>
                 <a:cs typeface="Calibri" pitchFamily="34" charset="-120"/>
               </a:rPr>
-              <a:t>Fractions represent points on the number line</a:t>
+              <a:t>You MUST be able to do both conversions for assessments.</a:t>
             </a:r>
             <a:endParaRPr lang="en-US" sz="1500" dirty="0"/>
           </a:p>
@@ -2793,14 +3631,41 @@
       </p:sp>
       <p:sp>
         <p:nvSpPr>
-          <p:cNvPr id="5" name="Text 3"/>
-          <p:cNvSpPr/>
-          <p:nvPr/>
-        </p:nvSpPr>
-        <p:spPr>
-          <a:xfrm>
-            <a:off x="731520" y="4572000"/>
-            <a:ext cx="7772400" cy="365760"/>
+          <p:cNvPr id="7" name="Shape 5"/>
+          <p:cNvSpPr/>
+          <p:nvPr/>
+        </p:nvSpPr>
+        <p:spPr>
+          <a:xfrm>
+            <a:off x="731520" y="4206240"/>
+            <a:ext cx="7680960" cy="640080"/>
+          </a:xfrm>
+          <a:prstGeom prst="rect">
+            <a:avLst/>
+          </a:prstGeom>
+          <a:solidFill>
+            <a:srgbClr val="E8F5F3"/>
+          </a:solidFill>
+          <a:ln/>
+          <a:effectLst>
+            <a:outerShdw sx="100000" sy="100000" kx="0" ky="0" algn="bl" rotWithShape="0" blurRad="50800" dist="25400" dir="8100000">
+              <a:srgbClr val="000000">
+                <a:alpha val="10000"/>
+              </a:srgbClr>
+            </a:outerShdw>
+          </a:effectLst>
+        </p:spPr>
+      </p:sp>
+      <p:sp>
+        <p:nvSpPr>
+          <p:cNvPr id="8" name="Text 6"/>
+          <p:cNvSpPr/>
+          <p:nvPr/>
+        </p:nvSpPr>
+        <p:spPr>
+          <a:xfrm>
+            <a:off x="914400" y="4251960"/>
+            <a:ext cx="7315200" cy="548640"/>
           </a:xfrm>
           <a:prstGeom prst="rect">
             <a:avLst/>
@@ -2816,17 +3681,921 @@
               <a:buNone/>
             </a:pPr>
             <a:r>
-              <a:rPr lang="en-US" sz="1100" dirty="0">
-                <a:solidFill>
-                  <a:srgbClr val="E9C46A"/>
+              <a:rPr lang="en-US" sz="1200" b="1" dirty="0">
+                <a:solidFill>
+                  <a:srgbClr val="2A9D8F"/>
                 </a:solidFill>
                 <a:latin typeface="Calibri" pitchFamily="34" charset="0"/>
                 <a:ea typeface="Calibri" pitchFamily="34" charset="-122"/>
                 <a:cs typeface="Calibri" pitchFamily="34" charset="-120"/>
               </a:rPr>
+              <a:t>Key Idea: </a:t>
+            </a:r>
+            <a:pPr indent="0" marL="0">
+              <a:buNone/>
+            </a:pPr>
+            <a:r>
+              <a:rPr lang="en-US" sz="1200" i="1" dirty="0">
+                <a:solidFill>
+                  <a:srgbClr val="3D3A36"/>
+                </a:solidFill>
+                <a:latin typeface="Calibri" pitchFamily="34" charset="0"/>
+                <a:ea typeface="Calibri" pitchFamily="34" charset="-122"/>
+                <a:cs typeface="Calibri" pitchFamily="34" charset="-120"/>
+              </a:rPr>
+              <a:t>Improper fractions and mixed numbers show the SAME amount — just written differently.</a:t>
+            </a:r>
+            <a:endParaRPr lang="en-US" sz="1200" dirty="0"/>
+          </a:p>
+        </p:txBody>
+      </p:sp>
+    </p:spTree>
+  </p:cSld>
+  <p:clrMapOvr>
+    <a:masterClrMapping/>
+  </p:clrMapOvr>
+</p:sld>
+</file>
+
+<file path=ppt/slides/slide6.xml><?xml version="1.0" encoding="utf-8"?>
+<p:sld xmlns:a="http://schemas.openxmlformats.org/drawingml/2006/main" xmlns:r="http://schemas.openxmlformats.org/officeDocument/2006/relationships" xmlns:p="http://schemas.openxmlformats.org/presentationml/2006/main">
+  <p:cSld name="Slide 6">
+    <p:bg>
+      <p:bgPr>
+        <a:solidFill>
+          <a:srgbClr val="FAF8F5"/>
+        </a:solidFill>
+      </p:bgPr>
+    </p:bg>
+    <p:spTree>
+      <p:nvGrpSpPr>
+        <p:cNvPr id="1" name=""/>
+        <p:cNvGrpSpPr/>
+        <p:nvPr/>
+      </p:nvGrpSpPr>
+      <p:grpSpPr>
+        <a:xfrm>
+          <a:off x="0" y="0"/>
+          <a:ext cx="0" cy="0"/>
+          <a:chOff x="0" y="0"/>
+          <a:chExt cx="0" cy="0"/>
+        </a:xfrm>
+      </p:grpSpPr>
+      <p:sp>
+        <p:nvSpPr>
+          <p:cNvPr id="2" name="Shape 0"/>
+          <p:cNvSpPr/>
+          <p:nvPr/>
+        </p:nvSpPr>
+        <p:spPr>
+          <a:xfrm>
+            <a:off x="0" y="0"/>
+            <a:ext cx="9144000" cy="822960"/>
+          </a:xfrm>
+          <a:prstGeom prst="rect">
+            <a:avLst/>
+          </a:prstGeom>
+          <a:solidFill>
+            <a:srgbClr val="FFFFFF"/>
+          </a:solidFill>
+          <a:ln/>
+        </p:spPr>
+      </p:sp>
+      <p:sp>
+        <p:nvSpPr>
+          <p:cNvPr id="3" name="Shape 1"/>
+          <p:cNvSpPr/>
+          <p:nvPr/>
+        </p:nvSpPr>
+        <p:spPr>
+          <a:xfrm>
+            <a:off x="0" y="804672"/>
+            <a:ext cx="9144000" cy="27432"/>
+          </a:xfrm>
+          <a:prstGeom prst="rect">
+            <a:avLst/>
+          </a:prstGeom>
+          <a:solidFill>
+            <a:srgbClr val="E5E2DC"/>
+          </a:solidFill>
+          <a:ln/>
+        </p:spPr>
+      </p:sp>
+      <p:sp>
+        <p:nvSpPr>
+          <p:cNvPr id="4" name="Shape 2"/>
+          <p:cNvSpPr/>
+          <p:nvPr/>
+        </p:nvSpPr>
+        <p:spPr>
+          <a:xfrm>
+            <a:off x="548640" y="201168"/>
+            <a:ext cx="54864" cy="420624"/>
+          </a:xfrm>
+          <a:prstGeom prst="rect">
+            <a:avLst/>
+          </a:prstGeom>
+          <a:solidFill>
+            <a:srgbClr val="2A9D8F"/>
+          </a:solidFill>
+          <a:ln/>
+        </p:spPr>
+      </p:sp>
+      <p:sp>
+        <p:nvSpPr>
+          <p:cNvPr id="5" name="Text 3"/>
+          <p:cNvSpPr/>
+          <p:nvPr/>
+        </p:nvSpPr>
+        <p:spPr>
+          <a:xfrm>
+            <a:off x="777240" y="137160"/>
+            <a:ext cx="7772400" cy="548640"/>
+          </a:xfrm>
+          <a:prstGeom prst="rect">
+            <a:avLst/>
+          </a:prstGeom>
+          <a:noFill/>
+          <a:ln/>
+        </p:spPr>
+        <p:txBody>
+          <a:bodyPr wrap="square" lIns="0" tIns="0" rIns="0" bIns="0" rtlCol="0" anchor="ctr"/>
+          <a:lstStyle/>
+          <a:p>
+            <a:pPr indent="0" marL="0">
+              <a:buNone/>
+            </a:pPr>
+            <a:r>
+              <a:rPr lang="en-US" sz="2000" b="1" dirty="0">
+                <a:solidFill>
+                  <a:srgbClr val="1B2A4A"/>
+                </a:solidFill>
+                <a:latin typeface="Georgia" pitchFamily="34" charset="0"/>
+                <a:ea typeface="Georgia" pitchFamily="34" charset="-122"/>
+                <a:cs typeface="Georgia" pitchFamily="34" charset="-120"/>
+              </a:rPr>
+              <a:t>Check Your Understanding</a:t>
+            </a:r>
+            <a:endParaRPr lang="en-US" sz="2000" dirty="0"/>
+          </a:p>
+        </p:txBody>
+      </p:sp>
+      <p:sp>
+        <p:nvSpPr>
+          <p:cNvPr id="6" name="Shape 4"/>
+          <p:cNvSpPr/>
+          <p:nvPr/>
+        </p:nvSpPr>
+        <p:spPr>
+          <a:xfrm>
+            <a:off x="731520" y="1051560"/>
+            <a:ext cx="7680960" cy="438912"/>
+          </a:xfrm>
+          <a:prstGeom prst="rect">
+            <a:avLst/>
+          </a:prstGeom>
+          <a:solidFill>
+            <a:srgbClr val="FFFFFF"/>
+          </a:solidFill>
+          <a:ln/>
+        </p:spPr>
+      </p:sp>
+      <p:sp>
+        <p:nvSpPr>
+          <p:cNvPr id="7" name="Text 5"/>
+          <p:cNvSpPr/>
+          <p:nvPr/>
+        </p:nvSpPr>
+        <p:spPr>
+          <a:xfrm>
+            <a:off x="868680" y="1051560"/>
+            <a:ext cx="320040" cy="438912"/>
+          </a:xfrm>
+          <a:prstGeom prst="rect">
+            <a:avLst/>
+          </a:prstGeom>
+          <a:noFill/>
+          <a:ln/>
+        </p:spPr>
+        <p:txBody>
+          <a:bodyPr wrap="square" rtlCol="0" anchor="ctr"/>
+          <a:lstStyle/>
+          <a:p>
+            <a:pPr indent="0" marL="0">
+              <a:buNone/>
+            </a:pPr>
+            <a:r>
+              <a:rPr lang="en-US" sz="1400" dirty="0">
+                <a:solidFill>
+                  <a:srgbClr val="2A9D8F"/>
+                </a:solidFill>
+              </a:rPr>
+              <a:t>☐</a:t>
+            </a:r>
+            <a:endParaRPr lang="en-US" sz="1400" dirty="0"/>
+          </a:p>
+        </p:txBody>
+      </p:sp>
+      <p:sp>
+        <p:nvSpPr>
+          <p:cNvPr id="8" name="Text 6"/>
+          <p:cNvSpPr/>
+          <p:nvPr/>
+        </p:nvSpPr>
+        <p:spPr>
+          <a:xfrm>
+            <a:off x="1234440" y="1051560"/>
+            <a:ext cx="6949440" cy="438912"/>
+          </a:xfrm>
+          <a:prstGeom prst="rect">
+            <a:avLst/>
+          </a:prstGeom>
+          <a:noFill/>
+          <a:ln/>
+        </p:spPr>
+        <p:txBody>
+          <a:bodyPr wrap="square" rtlCol="0" anchor="ctr"/>
+          <a:lstStyle/>
+          <a:p>
+            <a:pPr indent="0" marL="0">
+              <a:buNone/>
+            </a:pPr>
+            <a:r>
+              <a:rPr lang="en-US" sz="1300" dirty="0">
+                <a:solidFill>
+                  <a:srgbClr val="3D3A36"/>
+                </a:solidFill>
+                <a:latin typeface="Calibri" pitchFamily="34" charset="0"/>
+                <a:ea typeface="Calibri" pitchFamily="34" charset="-122"/>
+                <a:cs typeface="Calibri" pitchFamily="34" charset="-120"/>
+              </a:rPr>
+              <a:t>I understand what numerator and denominator mean</a:t>
+            </a:r>
+            <a:endParaRPr lang="en-US" sz="1300" dirty="0"/>
+          </a:p>
+        </p:txBody>
+      </p:sp>
+      <p:sp>
+        <p:nvSpPr>
+          <p:cNvPr id="9" name="Shape 7"/>
+          <p:cNvSpPr/>
+          <p:nvPr/>
+        </p:nvSpPr>
+        <p:spPr>
+          <a:xfrm>
+            <a:off x="731520" y="1554480"/>
+            <a:ext cx="7680960" cy="438912"/>
+          </a:xfrm>
+          <a:prstGeom prst="rect">
+            <a:avLst/>
+          </a:prstGeom>
+          <a:solidFill>
+            <a:srgbClr val="F8F6F3"/>
+          </a:solidFill>
+          <a:ln/>
+        </p:spPr>
+      </p:sp>
+      <p:sp>
+        <p:nvSpPr>
+          <p:cNvPr id="10" name="Text 8"/>
+          <p:cNvSpPr/>
+          <p:nvPr/>
+        </p:nvSpPr>
+        <p:spPr>
+          <a:xfrm>
+            <a:off x="868680" y="1554480"/>
+            <a:ext cx="320040" cy="438912"/>
+          </a:xfrm>
+          <a:prstGeom prst="rect">
+            <a:avLst/>
+          </a:prstGeom>
+          <a:noFill/>
+          <a:ln/>
+        </p:spPr>
+        <p:txBody>
+          <a:bodyPr wrap="square" rtlCol="0" anchor="ctr"/>
+          <a:lstStyle/>
+          <a:p>
+            <a:pPr indent="0" marL="0">
+              <a:buNone/>
+            </a:pPr>
+            <a:r>
+              <a:rPr lang="en-US" sz="1400" dirty="0">
+                <a:solidFill>
+                  <a:srgbClr val="2A9D8F"/>
+                </a:solidFill>
+              </a:rPr>
+              <a:t>☐</a:t>
+            </a:r>
+            <a:endParaRPr lang="en-US" sz="1400" dirty="0"/>
+          </a:p>
+        </p:txBody>
+      </p:sp>
+      <p:sp>
+        <p:nvSpPr>
+          <p:cNvPr id="11" name="Text 9"/>
+          <p:cNvSpPr/>
+          <p:nvPr/>
+        </p:nvSpPr>
+        <p:spPr>
+          <a:xfrm>
+            <a:off x="1234440" y="1554480"/>
+            <a:ext cx="6949440" cy="438912"/>
+          </a:xfrm>
+          <a:prstGeom prst="rect">
+            <a:avLst/>
+          </a:prstGeom>
+          <a:noFill/>
+          <a:ln/>
+        </p:spPr>
+        <p:txBody>
+          <a:bodyPr wrap="square" rtlCol="0" anchor="ctr"/>
+          <a:lstStyle/>
+          <a:p>
+            <a:pPr indent="0" marL="0">
+              <a:buNone/>
+            </a:pPr>
+            <a:r>
+              <a:rPr lang="en-US" sz="1300" dirty="0">
+                <a:solidFill>
+                  <a:srgbClr val="3D3A36"/>
+                </a:solidFill>
+                <a:latin typeface="Calibri" pitchFamily="34" charset="0"/>
+                <a:ea typeface="Calibri" pitchFamily="34" charset="-122"/>
+                <a:cs typeface="Calibri" pitchFamily="34" charset="-120"/>
+              </a:rPr>
+              <a:t>I can identify proper, improper, and mixed number fractions</a:t>
+            </a:r>
+            <a:endParaRPr lang="en-US" sz="1300" dirty="0"/>
+          </a:p>
+        </p:txBody>
+      </p:sp>
+      <p:sp>
+        <p:nvSpPr>
+          <p:cNvPr id="12" name="Shape 10"/>
+          <p:cNvSpPr/>
+          <p:nvPr/>
+        </p:nvSpPr>
+        <p:spPr>
+          <a:xfrm>
+            <a:off x="731520" y="2057400"/>
+            <a:ext cx="7680960" cy="438912"/>
+          </a:xfrm>
+          <a:prstGeom prst="rect">
+            <a:avLst/>
+          </a:prstGeom>
+          <a:solidFill>
+            <a:srgbClr val="FFFFFF"/>
+          </a:solidFill>
+          <a:ln/>
+        </p:spPr>
+      </p:sp>
+      <p:sp>
+        <p:nvSpPr>
+          <p:cNvPr id="13" name="Text 11"/>
+          <p:cNvSpPr/>
+          <p:nvPr/>
+        </p:nvSpPr>
+        <p:spPr>
+          <a:xfrm>
+            <a:off x="868680" y="2057400"/>
+            <a:ext cx="320040" cy="438912"/>
+          </a:xfrm>
+          <a:prstGeom prst="rect">
+            <a:avLst/>
+          </a:prstGeom>
+          <a:noFill/>
+          <a:ln/>
+        </p:spPr>
+        <p:txBody>
+          <a:bodyPr wrap="square" rtlCol="0" anchor="ctr"/>
+          <a:lstStyle/>
+          <a:p>
+            <a:pPr indent="0" marL="0">
+              <a:buNone/>
+            </a:pPr>
+            <a:r>
+              <a:rPr lang="en-US" sz="1400" dirty="0">
+                <a:solidFill>
+                  <a:srgbClr val="2A9D8F"/>
+                </a:solidFill>
+              </a:rPr>
+              <a:t>☐</a:t>
+            </a:r>
+            <a:endParaRPr lang="en-US" sz="1400" dirty="0"/>
+          </a:p>
+        </p:txBody>
+      </p:sp>
+      <p:sp>
+        <p:nvSpPr>
+          <p:cNvPr id="14" name="Text 12"/>
+          <p:cNvSpPr/>
+          <p:nvPr/>
+        </p:nvSpPr>
+        <p:spPr>
+          <a:xfrm>
+            <a:off x="1234440" y="2057400"/>
+            <a:ext cx="6949440" cy="438912"/>
+          </a:xfrm>
+          <a:prstGeom prst="rect">
+            <a:avLst/>
+          </a:prstGeom>
+          <a:noFill/>
+          <a:ln/>
+        </p:spPr>
+        <p:txBody>
+          <a:bodyPr wrap="square" rtlCol="0" anchor="ctr"/>
+          <a:lstStyle/>
+          <a:p>
+            <a:pPr indent="0" marL="0">
+              <a:buNone/>
+            </a:pPr>
+            <a:r>
+              <a:rPr lang="en-US" sz="1300" dirty="0">
+                <a:solidFill>
+                  <a:srgbClr val="3D3A36"/>
+                </a:solidFill>
+                <a:latin typeface="Calibri" pitchFamily="34" charset="0"/>
+                <a:ea typeface="Calibri" pitchFamily="34" charset="-122"/>
+                <a:cs typeface="Calibri" pitchFamily="34" charset="-120"/>
+              </a:rPr>
+              <a:t>I can convert between improper fractions and mixed numbers</a:t>
+            </a:r>
+            <a:endParaRPr lang="en-US" sz="1300" dirty="0"/>
+          </a:p>
+        </p:txBody>
+      </p:sp>
+      <p:sp>
+        <p:nvSpPr>
+          <p:cNvPr id="15" name="Shape 13"/>
+          <p:cNvSpPr/>
+          <p:nvPr/>
+        </p:nvSpPr>
+        <p:spPr>
+          <a:xfrm>
+            <a:off x="731520" y="2560320"/>
+            <a:ext cx="7680960" cy="438912"/>
+          </a:xfrm>
+          <a:prstGeom prst="rect">
+            <a:avLst/>
+          </a:prstGeom>
+          <a:solidFill>
+            <a:srgbClr val="F8F6F3"/>
+          </a:solidFill>
+          <a:ln/>
+        </p:spPr>
+      </p:sp>
+      <p:sp>
+        <p:nvSpPr>
+          <p:cNvPr id="16" name="Text 14"/>
+          <p:cNvSpPr/>
+          <p:nvPr/>
+        </p:nvSpPr>
+        <p:spPr>
+          <a:xfrm>
+            <a:off x="868680" y="2560320"/>
+            <a:ext cx="320040" cy="438912"/>
+          </a:xfrm>
+          <a:prstGeom prst="rect">
+            <a:avLst/>
+          </a:prstGeom>
+          <a:noFill/>
+          <a:ln/>
+        </p:spPr>
+        <p:txBody>
+          <a:bodyPr wrap="square" rtlCol="0" anchor="ctr"/>
+          <a:lstStyle/>
+          <a:p>
+            <a:pPr indent="0" marL="0">
+              <a:buNone/>
+            </a:pPr>
+            <a:r>
+              <a:rPr lang="en-US" sz="1400" dirty="0">
+                <a:solidFill>
+                  <a:srgbClr val="2A9D8F"/>
+                </a:solidFill>
+              </a:rPr>
+              <a:t>☐</a:t>
+            </a:r>
+            <a:endParaRPr lang="en-US" sz="1400" dirty="0"/>
+          </a:p>
+        </p:txBody>
+      </p:sp>
+      <p:sp>
+        <p:nvSpPr>
+          <p:cNvPr id="17" name="Text 15"/>
+          <p:cNvSpPr/>
+          <p:nvPr/>
+        </p:nvSpPr>
+        <p:spPr>
+          <a:xfrm>
+            <a:off x="1234440" y="2560320"/>
+            <a:ext cx="6949440" cy="438912"/>
+          </a:xfrm>
+          <a:prstGeom prst="rect">
+            <a:avLst/>
+          </a:prstGeom>
+          <a:noFill/>
+          <a:ln/>
+        </p:spPr>
+        <p:txBody>
+          <a:bodyPr wrap="square" rtlCol="0" anchor="ctr"/>
+          <a:lstStyle/>
+          <a:p>
+            <a:pPr indent="0" marL="0">
+              <a:buNone/>
+            </a:pPr>
+            <a:r>
+              <a:rPr lang="en-US" sz="1300" dirty="0">
+                <a:solidFill>
+                  <a:srgbClr val="3D3A36"/>
+                </a:solidFill>
+                <a:latin typeface="Calibri" pitchFamily="34" charset="0"/>
+                <a:ea typeface="Calibri" pitchFamily="34" charset="-122"/>
+                <a:cs typeface="Calibri" pitchFamily="34" charset="-120"/>
+              </a:rPr>
+              <a:t>I can represent fractions on a number line or diagram</a:t>
+            </a:r>
+            <a:endParaRPr lang="en-US" sz="1300" dirty="0"/>
+          </a:p>
+        </p:txBody>
+      </p:sp>
+      <p:sp>
+        <p:nvSpPr>
+          <p:cNvPr id="18" name="Shape 16"/>
+          <p:cNvSpPr/>
+          <p:nvPr/>
+        </p:nvSpPr>
+        <p:spPr>
+          <a:xfrm>
+            <a:off x="731520" y="3063240"/>
+            <a:ext cx="7680960" cy="438912"/>
+          </a:xfrm>
+          <a:prstGeom prst="rect">
+            <a:avLst/>
+          </a:prstGeom>
+          <a:solidFill>
+            <a:srgbClr val="FFFFFF"/>
+          </a:solidFill>
+          <a:ln/>
+        </p:spPr>
+      </p:sp>
+      <p:sp>
+        <p:nvSpPr>
+          <p:cNvPr id="19" name="Text 17"/>
+          <p:cNvSpPr/>
+          <p:nvPr/>
+        </p:nvSpPr>
+        <p:spPr>
+          <a:xfrm>
+            <a:off x="868680" y="3063240"/>
+            <a:ext cx="320040" cy="438912"/>
+          </a:xfrm>
+          <a:prstGeom prst="rect">
+            <a:avLst/>
+          </a:prstGeom>
+          <a:noFill/>
+          <a:ln/>
+        </p:spPr>
+        <p:txBody>
+          <a:bodyPr wrap="square" rtlCol="0" anchor="ctr"/>
+          <a:lstStyle/>
+          <a:p>
+            <a:pPr indent="0" marL="0">
+              <a:buNone/>
+            </a:pPr>
+            <a:r>
+              <a:rPr lang="en-US" sz="1400" dirty="0">
+                <a:solidFill>
+                  <a:srgbClr val="2A9D8F"/>
+                </a:solidFill>
+              </a:rPr>
+              <a:t>☐</a:t>
+            </a:r>
+            <a:endParaRPr lang="en-US" sz="1400" dirty="0"/>
+          </a:p>
+        </p:txBody>
+      </p:sp>
+      <p:sp>
+        <p:nvSpPr>
+          <p:cNvPr id="20" name="Text 18"/>
+          <p:cNvSpPr/>
+          <p:nvPr/>
+        </p:nvSpPr>
+        <p:spPr>
+          <a:xfrm>
+            <a:off x="1234440" y="3063240"/>
+            <a:ext cx="6949440" cy="438912"/>
+          </a:xfrm>
+          <a:prstGeom prst="rect">
+            <a:avLst/>
+          </a:prstGeom>
+          <a:noFill/>
+          <a:ln/>
+        </p:spPr>
+        <p:txBody>
+          <a:bodyPr wrap="square" rtlCol="0" anchor="ctr"/>
+          <a:lstStyle/>
+          <a:p>
+            <a:pPr indent="0" marL="0">
+              <a:buNone/>
+            </a:pPr>
+            <a:r>
+              <a:rPr lang="en-US" sz="1300" dirty="0">
+                <a:solidFill>
+                  <a:srgbClr val="3D3A36"/>
+                </a:solidFill>
+                <a:latin typeface="Calibri" pitchFamily="34" charset="0"/>
+                <a:ea typeface="Calibri" pitchFamily="34" charset="-122"/>
+                <a:cs typeface="Calibri" pitchFamily="34" charset="-120"/>
+              </a:rPr>
+              <a:t>I know that a fraction is another way of writing division</a:t>
+            </a:r>
+            <a:endParaRPr lang="en-US" sz="1300" dirty="0"/>
+          </a:p>
+        </p:txBody>
+      </p:sp>
+      <p:sp>
+        <p:nvSpPr>
+          <p:cNvPr id="21" name="Shape 19"/>
+          <p:cNvSpPr/>
+          <p:nvPr/>
+        </p:nvSpPr>
+        <p:spPr>
+          <a:xfrm>
+            <a:off x="731520" y="3749040"/>
+            <a:ext cx="7680960" cy="594360"/>
+          </a:xfrm>
+          <a:prstGeom prst="rect">
+            <a:avLst/>
+          </a:prstGeom>
+          <a:solidFill>
+            <a:srgbClr val="E8F5F3"/>
+          </a:solidFill>
+          <a:ln/>
+          <a:effectLst>
+            <a:outerShdw sx="100000" sy="100000" kx="0" ky="0" algn="bl" rotWithShape="0" blurRad="50800" dist="25400" dir="8100000">
+              <a:srgbClr val="000000">
+                <a:alpha val="10000"/>
+              </a:srgbClr>
+            </a:outerShdw>
+          </a:effectLst>
+        </p:spPr>
+      </p:sp>
+      <p:sp>
+        <p:nvSpPr>
+          <p:cNvPr id="22" name="Text 20"/>
+          <p:cNvSpPr/>
+          <p:nvPr/>
+        </p:nvSpPr>
+        <p:spPr>
+          <a:xfrm>
+            <a:off x="914400" y="3749040"/>
+            <a:ext cx="7315200" cy="594360"/>
+          </a:xfrm>
+          <a:prstGeom prst="rect">
+            <a:avLst/>
+          </a:prstGeom>
+          <a:noFill/>
+          <a:ln/>
+        </p:spPr>
+        <p:txBody>
+          <a:bodyPr wrap="square" rtlCol="0" anchor="ctr"/>
+          <a:lstStyle/>
+          <a:p>
+            <a:pPr indent="0" marL="0">
+              <a:buNone/>
+            </a:pPr>
+            <a:r>
+              <a:rPr lang="en-US" sz="1200" b="1" dirty="0">
+                <a:solidFill>
+                  <a:srgbClr val="2A9D8F"/>
+                </a:solidFill>
+                <a:latin typeface="Calibri" pitchFamily="34" charset="0"/>
+                <a:ea typeface="Calibri" pitchFamily="34" charset="-122"/>
+                <a:cs typeface="Calibri" pitchFamily="34" charset="-120"/>
+              </a:rPr>
+              <a:t>Key Idea: </a:t>
+            </a:r>
+            <a:pPr indent="0" marL="0">
+              <a:buNone/>
+            </a:pPr>
+            <a:r>
+              <a:rPr lang="en-US" sz="1200" i="1" dirty="0">
+                <a:solidFill>
+                  <a:srgbClr val="3D3A36"/>
+                </a:solidFill>
+                <a:latin typeface="Calibri" pitchFamily="34" charset="0"/>
+                <a:ea typeface="Calibri" pitchFamily="34" charset="-122"/>
+                <a:cs typeface="Calibri" pitchFamily="34" charset="-120"/>
+              </a:rPr>
+              <a:t>Fractions are everywhere — sharing pizza, measuring ingredients, reading music.</a:t>
+            </a:r>
+            <a:endParaRPr lang="en-US" sz="1200" dirty="0"/>
+          </a:p>
+        </p:txBody>
+      </p:sp>
+    </p:spTree>
+  </p:cSld>
+  <p:clrMapOvr>
+    <a:masterClrMapping/>
+  </p:clrMapOvr>
+</p:sld>
+</file>
+
+<file path=ppt/slides/slide7.xml><?xml version="1.0" encoding="utf-8"?>
+<p:sld xmlns:a="http://schemas.openxmlformats.org/drawingml/2006/main" xmlns:r="http://schemas.openxmlformats.org/officeDocument/2006/relationships" xmlns:p="http://schemas.openxmlformats.org/presentationml/2006/main">
+  <p:cSld name="Slide 7">
+    <p:spTree>
+      <p:nvGrpSpPr>
+        <p:cNvPr id="1" name=""/>
+        <p:cNvGrpSpPr/>
+        <p:nvPr/>
+      </p:nvGrpSpPr>
+      <p:grpSpPr>
+        <a:xfrm>
+          <a:off x="0" y="0"/>
+          <a:ext cx="0" cy="0"/>
+          <a:chOff x="0" y="0"/>
+          <a:chExt cx="0" cy="0"/>
+        </a:xfrm>
+      </p:grpSpPr>
+      <p:sp>
+        <p:nvSpPr>
+          <p:cNvPr id="2" name="Shape 0"/>
+          <p:cNvSpPr/>
+          <p:nvPr/>
+        </p:nvSpPr>
+        <p:spPr>
+          <a:xfrm>
+            <a:off x="0" y="0"/>
+            <a:ext cx="9144000" cy="5143500"/>
+          </a:xfrm>
+          <a:prstGeom prst="rect">
+            <a:avLst/>
+          </a:prstGeom>
+          <a:solidFill>
+            <a:srgbClr val="1B2A4A"/>
+          </a:solidFill>
+          <a:ln/>
+        </p:spPr>
+      </p:sp>
+      <p:sp>
+        <p:nvSpPr>
+          <p:cNvPr id="3" name="Shape 1"/>
+          <p:cNvSpPr/>
+          <p:nvPr/>
+        </p:nvSpPr>
+        <p:spPr>
+          <a:xfrm>
+            <a:off x="0" y="4777740"/>
+            <a:ext cx="9144000" cy="365760"/>
+          </a:xfrm>
+          <a:prstGeom prst="rect">
+            <a:avLst/>
+          </a:prstGeom>
+          <a:solidFill>
+            <a:srgbClr val="2A9D8F"/>
+          </a:solidFill>
+          <a:ln/>
+        </p:spPr>
+      </p:sp>
+      <p:sp>
+        <p:nvSpPr>
+          <p:cNvPr id="4" name="Shape 2"/>
+          <p:cNvSpPr/>
+          <p:nvPr/>
+        </p:nvSpPr>
+        <p:spPr>
+          <a:xfrm>
+            <a:off x="-914400" y="-914400"/>
+            <a:ext cx="3657600" cy="3657600"/>
+          </a:xfrm>
+          <a:prstGeom prst="ellipse">
+            <a:avLst/>
+          </a:prstGeom>
+          <a:solidFill>
+            <a:srgbClr val="2A9D8F">
+              <a:alpha val="10000"/>
+            </a:srgbClr>
+          </a:solidFill>
+          <a:ln/>
+        </p:spPr>
+      </p:sp>
+      <p:sp>
+        <p:nvSpPr>
+          <p:cNvPr id="5" name="Text 3"/>
+          <p:cNvSpPr/>
+          <p:nvPr/>
+        </p:nvSpPr>
+        <p:spPr>
+          <a:xfrm>
+            <a:off x="731520" y="1463040"/>
+            <a:ext cx="7680960" cy="822960"/>
+          </a:xfrm>
+          <a:prstGeom prst="rect">
+            <a:avLst/>
+          </a:prstGeom>
+          <a:noFill/>
+          <a:ln/>
+        </p:spPr>
+        <p:txBody>
+          <a:bodyPr wrap="square" rtlCol="0" anchor="ctr"/>
+          <a:lstStyle/>
+          <a:p>
+            <a:pPr algn="ctr" indent="0" marL="0">
+              <a:buNone/>
+            </a:pPr>
+            <a:r>
+              <a:rPr lang="en-US" sz="3400" b="1" dirty="0">
+                <a:solidFill>
+                  <a:srgbClr val="FFFFFF"/>
+                </a:solidFill>
+                <a:latin typeface="Georgia" pitchFamily="34" charset="0"/>
+                <a:ea typeface="Georgia" pitchFamily="34" charset="-122"/>
+                <a:cs typeface="Georgia" pitchFamily="34" charset="-120"/>
+              </a:rPr>
+              <a:t>Review &amp; Practise</a:t>
+            </a:r>
+            <a:endParaRPr lang="en-US" sz="3400" dirty="0"/>
+          </a:p>
+        </p:txBody>
+      </p:sp>
+      <p:sp>
+        <p:nvSpPr>
+          <p:cNvPr id="6" name="Text 4"/>
+          <p:cNvSpPr/>
+          <p:nvPr/>
+        </p:nvSpPr>
+        <p:spPr>
+          <a:xfrm>
+            <a:off x="731520" y="2468880"/>
+            <a:ext cx="7680960" cy="457200"/>
+          </a:xfrm>
+          <a:prstGeom prst="rect">
+            <a:avLst/>
+          </a:prstGeom>
+          <a:noFill/>
+          <a:ln/>
+        </p:spPr>
+        <p:txBody>
+          <a:bodyPr wrap="square" rtlCol="0" anchor="ctr"/>
+          <a:lstStyle/>
+          <a:p>
+            <a:pPr algn="ctr" indent="0" marL="0">
+              <a:buNone/>
+            </a:pPr>
+            <a:r>
+              <a:rPr lang="en-US" sz="1800" dirty="0">
+                <a:solidFill>
+                  <a:srgbClr val="2A9D8F"/>
+                </a:solidFill>
+                <a:latin typeface="Calibri" pitchFamily="34" charset="0"/>
+                <a:ea typeface="Calibri" pitchFamily="34" charset="-122"/>
+                <a:cs typeface="Calibri" pitchFamily="34" charset="-120"/>
+              </a:rPr>
               <a:t>mrzocchi.com</a:t>
             </a:r>
-            <a:endParaRPr lang="en-US" sz="1100" dirty="0"/>
+            <a:endParaRPr lang="en-US" sz="1800" dirty="0"/>
+          </a:p>
+        </p:txBody>
+      </p:sp>
+      <p:sp>
+        <p:nvSpPr>
+          <p:cNvPr id="7" name="Text 5"/>
+          <p:cNvSpPr/>
+          <p:nvPr/>
+        </p:nvSpPr>
+        <p:spPr>
+          <a:xfrm>
+            <a:off x="731520" y="3108960"/>
+            <a:ext cx="7680960" cy="457200"/>
+          </a:xfrm>
+          <a:prstGeom prst="rect">
+            <a:avLst/>
+          </a:prstGeom>
+          <a:noFill/>
+          <a:ln/>
+        </p:spPr>
+        <p:txBody>
+          <a:bodyPr wrap="square" rtlCol="0" anchor="ctr"/>
+          <a:lstStyle/>
+          <a:p>
+            <a:pPr algn="ctr" indent="0" marL="0">
+              <a:buNone/>
+            </a:pPr>
+            <a:r>
+              <a:rPr lang="en-US" sz="1300" dirty="0">
+                <a:solidFill>
+                  <a:srgbClr val="9B9690"/>
+                </a:solidFill>
+                <a:latin typeface="Calibri" pitchFamily="34" charset="0"/>
+                <a:ea typeface="Calibri" pitchFamily="34" charset="-122"/>
+                <a:cs typeface="Calibri" pitchFamily="34" charset="-120"/>
+              </a:rPr>
+              <a:t>Use the Self-Quiz, Review Games, and Practice Builder to test yourself.</a:t>
+            </a:r>
+            <a:endParaRPr lang="en-US" sz="1300" dirty="0"/>
           </a:p>
         </p:txBody>
       </p:sp>

--- a/static/ppts/G6_Math_T2_Fraction_Basics.pptx
+++ b/static/ppts/G6_Math_T2_Fraction_Basics.pptx
@@ -16,8 +16,8 @@
   <p:notesMasterIdLst>
     <p:notesMasterId r:id="rId9"/>
   </p:notesMasterIdLst>
-  <p:sldSz cx="9144000" cy="5143500"/>
-  <p:notesSz cx="5143500" cy="9144000"/>
+  <p:sldSz cx="12192000" cy="6858000"/>
+  <p:notesSz cx="6858000" cy="12192000"/>
   <p:defaultTextStyle>
     <a:lvl1pPr marL="0" algn="l" defTabSz="914400" rtl="0" eaLnBrk="1" latinLnBrk="0" hangingPunct="1">
       <a:defRPr sz="1800" kern="1200">
@@ -1388,6 +1388,13 @@
 <file path=ppt/slides/slide1.xml><?xml version="1.0" encoding="utf-8"?>
 <p:sld xmlns:a="http://schemas.openxmlformats.org/drawingml/2006/main" xmlns:r="http://schemas.openxmlformats.org/officeDocument/2006/relationships" xmlns:p="http://schemas.openxmlformats.org/presentationml/2006/main">
   <p:cSld name="Slide 1">
+    <p:bg>
+      <p:bgPr>
+        <a:solidFill>
+          <a:srgbClr val="2A9D8F"/>
+        </a:solidFill>
+      </p:bgPr>
+    </p:bg>
     <p:spTree>
       <p:nvGrpSpPr>
         <p:cNvPr id="1" name=""/>
@@ -1410,55 +1417,15 @@
         </p:nvSpPr>
         <p:spPr>
           <a:xfrm>
-            <a:off x="0" y="0"/>
-            <a:ext cx="9144000" cy="5143500"/>
-          </a:xfrm>
-          <a:prstGeom prst="rect">
+            <a:off x="7772400" y="-914400"/>
+            <a:ext cx="3657600" cy="3657600"/>
+          </a:xfrm>
+          <a:prstGeom prst="ellipse">
             <a:avLst/>
           </a:prstGeom>
           <a:solidFill>
-            <a:srgbClr val="1B2A4A"/>
-          </a:solidFill>
-          <a:ln/>
-        </p:spPr>
-      </p:sp>
-      <p:sp>
-        <p:nvSpPr>
-          <p:cNvPr id="3" name="Shape 1"/>
-          <p:cNvSpPr/>
-          <p:nvPr/>
-        </p:nvSpPr>
-        <p:spPr>
-          <a:xfrm>
-            <a:off x="0" y="4777740"/>
-            <a:ext cx="9144000" cy="365760"/>
-          </a:xfrm>
-          <a:prstGeom prst="rect">
-            <a:avLst/>
-          </a:prstGeom>
-          <a:solidFill>
-            <a:srgbClr val="2A9D8F"/>
-          </a:solidFill>
-          <a:ln/>
-        </p:spPr>
-      </p:sp>
-      <p:sp>
-        <p:nvSpPr>
-          <p:cNvPr id="4" name="Shape 2"/>
-          <p:cNvSpPr/>
-          <p:nvPr/>
-        </p:nvSpPr>
-        <p:spPr>
-          <a:xfrm>
-            <a:off x="6858000" y="-1371600"/>
-            <a:ext cx="4572000" cy="4572000"/>
-          </a:xfrm>
-          <a:prstGeom prst="ellipse">
-            <a:avLst/>
-          </a:prstGeom>
-          <a:solidFill>
-            <a:srgbClr val="2A9D8F">
-              <a:alpha val="12000"/>
+            <a:srgbClr val="FFFFFF">
+              <a:alpha val="8000"/>
             </a:srgbClr>
           </a:solidFill>
           <a:ln/>
@@ -1466,14 +1433,14 @@
       </p:sp>
       <p:sp>
         <p:nvSpPr>
-          <p:cNvPr id="5" name="Text 3"/>
-          <p:cNvSpPr/>
-          <p:nvPr/>
-        </p:nvSpPr>
-        <p:spPr>
-          <a:xfrm>
-            <a:off x="731520" y="914400"/>
-            <a:ext cx="7680960" cy="457200"/>
+          <p:cNvPr id="3" name="Text 1"/>
+          <p:cNvSpPr/>
+          <p:nvPr/>
+        </p:nvSpPr>
+        <p:spPr>
+          <a:xfrm>
+            <a:off x="731520" y="548640"/>
+            <a:ext cx="7315200" cy="365760"/>
           </a:xfrm>
           <a:prstGeom prst="rect">
             <a:avLst/>
@@ -1489,46 +1456,49 @@
               <a:buNone/>
             </a:pPr>
             <a:r>
-              <a:rPr lang="en-US" sz="1300" b="1" spc="500" kern="0" dirty="0">
-                <a:solidFill>
-                  <a:srgbClr val="2A9D8F"/>
-                </a:solidFill>
-                <a:latin typeface="Calibri" pitchFamily="34" charset="0"/>
-                <a:ea typeface="Calibri" pitchFamily="34" charset="-122"/>
-                <a:cs typeface="Calibri" pitchFamily="34" charset="-120"/>
+              <a:rPr lang="en-US" sz="1100" b="1" dirty="0">
+                <a:solidFill>
+                  <a:srgbClr val="F2D68A"/>
+                </a:solidFill>
+                <a:latin typeface="Arial" pitchFamily="34" charset="0"/>
+                <a:ea typeface="Arial" pitchFamily="34" charset="-122"/>
+                <a:cs typeface="Arial" pitchFamily="34" charset="-120"/>
               </a:rPr>
               <a:t>GRADE 6 MATHEMATICS</a:t>
             </a:r>
-            <a:endParaRPr lang="en-US" sz="1300" dirty="0"/>
-          </a:p>
-        </p:txBody>
-      </p:sp>
-      <p:sp>
-        <p:nvSpPr>
-          <p:cNvPr id="6" name="Text 4"/>
-          <p:cNvSpPr/>
-          <p:nvPr/>
-        </p:nvSpPr>
-        <p:spPr>
-          <a:xfrm>
-            <a:off x="731520" y="1463040"/>
-            <a:ext cx="6858000" cy="1645920"/>
-          </a:xfrm>
-          <a:prstGeom prst="rect">
-            <a:avLst/>
-          </a:prstGeom>
-          <a:noFill/>
-          <a:ln/>
-        </p:spPr>
-        <p:txBody>
-          <a:bodyPr wrap="square" rtlCol="0" anchor="t"/>
+            <a:endParaRPr lang="en-US" sz="1100" dirty="0"/>
+          </a:p>
+        </p:txBody>
+      </p:sp>
+      <p:sp>
+        <p:nvSpPr>
+          <p:cNvPr id="4" name="Text 2"/>
+          <p:cNvSpPr/>
+          <p:nvPr/>
+        </p:nvSpPr>
+        <p:spPr>
+          <a:xfrm>
+            <a:off x="731520" y="1371600"/>
+            <a:ext cx="9144000" cy="1645920"/>
+          </a:xfrm>
+          <a:prstGeom prst="rect">
+            <a:avLst/>
+          </a:prstGeom>
+          <a:noFill/>
+          <a:ln/>
+        </p:spPr>
+        <p:txBody>
+          <a:bodyPr wrap="square" rtlCol="0" anchor="ctr"/>
           <a:lstStyle/>
           <a:p>
             <a:pPr indent="0" marL="0">
+              <a:lnSpc>
+                <a:spcPct val="110000"/>
+              </a:lnSpc>
               <a:buNone/>
             </a:pPr>
             <a:r>
-              <a:rPr lang="en-US" sz="3800" b="1" dirty="0">
+              <a:rPr lang="en-US" sz="3600" b="1" dirty="0">
                 <a:solidFill>
                   <a:srgbClr val="FFFFFF"/>
                 </a:solidFill>
@@ -1536,39 +1506,63 @@
                 <a:ea typeface="Georgia" pitchFamily="34" charset="-122"/>
                 <a:cs typeface="Georgia" pitchFamily="34" charset="-120"/>
               </a:rPr>
-              <a:t>Understanding</a:t>
-            </a:r>
-            <a:endParaRPr lang="en-US" sz="3800" dirty="0"/>
-          </a:p>
+              <a:t>Understanding Fractions</a:t>
+            </a:r>
+            <a:endParaRPr lang="en-US" sz="3600" dirty="0"/>
+          </a:p>
+        </p:txBody>
+      </p:sp>
+      <p:sp>
+        <p:nvSpPr>
+          <p:cNvPr id="5" name="Text 3"/>
+          <p:cNvSpPr/>
+          <p:nvPr/>
+        </p:nvSpPr>
+        <p:spPr>
+          <a:xfrm>
+            <a:off x="731520" y="3200400"/>
+            <a:ext cx="7315200" cy="548640"/>
+          </a:xfrm>
+          <a:prstGeom prst="rect">
+            <a:avLst/>
+          </a:prstGeom>
+          <a:noFill/>
+          <a:ln/>
+        </p:spPr>
+        <p:txBody>
+          <a:bodyPr wrap="square" rtlCol="0" anchor="ctr"/>
+          <a:lstStyle/>
           <a:p>
             <a:pPr indent="0" marL="0">
               <a:buNone/>
             </a:pPr>
             <a:r>
-              <a:rPr lang="en-US" sz="3800" b="1" dirty="0">
-                <a:solidFill>
-                  <a:srgbClr val="FFFFFF"/>
-                </a:solidFill>
-                <a:latin typeface="Georgia" pitchFamily="34" charset="0"/>
-                <a:ea typeface="Georgia" pitchFamily="34" charset="-122"/>
-                <a:cs typeface="Georgia" pitchFamily="34" charset="-120"/>
-              </a:rPr>
-              <a:t>Fractions</a:t>
-            </a:r>
-            <a:endParaRPr lang="en-US" sz="3800" dirty="0"/>
-          </a:p>
-        </p:txBody>
-      </p:sp>
-      <p:sp>
-        <p:nvSpPr>
-          <p:cNvPr id="7" name="Text 5"/>
-          <p:cNvSpPr/>
-          <p:nvPr/>
-        </p:nvSpPr>
-        <p:spPr>
-          <a:xfrm>
-            <a:off x="731520" y="3200400"/>
-            <a:ext cx="6400800" cy="548640"/>
+              <a:rPr lang="en-US" sz="1600" dirty="0">
+                <a:solidFill>
+                  <a:srgbClr val="FFFFFF">
+                    <a:alpha val="65000"/>
+                  </a:srgbClr>
+                </a:solidFill>
+                <a:latin typeface="Arial" pitchFamily="34" charset="0"/>
+                <a:ea typeface="Arial" pitchFamily="34" charset="-122"/>
+                <a:cs typeface="Arial" pitchFamily="34" charset="-120"/>
+              </a:rPr>
+              <a:t>Parts of a whole</a:t>
+            </a:r>
+            <a:endParaRPr lang="en-US" sz="1600" dirty="0"/>
+          </a:p>
+        </p:txBody>
+      </p:sp>
+      <p:sp>
+        <p:nvSpPr>
+          <p:cNvPr id="6" name="Text 4"/>
+          <p:cNvSpPr/>
+          <p:nvPr/>
+        </p:nvSpPr>
+        <p:spPr>
+          <a:xfrm>
+            <a:off x="731520" y="4389120"/>
+            <a:ext cx="2743200" cy="320040"/>
           </a:xfrm>
           <a:prstGeom prst="rect">
             <a:avLst/>
@@ -1584,56 +1578,19 @@
               <a:buNone/>
             </a:pPr>
             <a:r>
-              <a:rPr lang="en-US" sz="1600" i="1" dirty="0">
-                <a:solidFill>
-                  <a:srgbClr val="9B9690"/>
-                </a:solidFill>
-                <a:latin typeface="Calibri" pitchFamily="34" charset="0"/>
-                <a:ea typeface="Calibri" pitchFamily="34" charset="-122"/>
-                <a:cs typeface="Calibri" pitchFamily="34" charset="-120"/>
-              </a:rPr>
-              <a:t>Parts of a whole</a:t>
-            </a:r>
-            <a:endParaRPr lang="en-US" sz="1600" dirty="0"/>
-          </a:p>
-        </p:txBody>
-      </p:sp>
-      <p:sp>
-        <p:nvSpPr>
-          <p:cNvPr id="8" name="Text 6"/>
-          <p:cNvSpPr/>
-          <p:nvPr/>
-        </p:nvSpPr>
-        <p:spPr>
-          <a:xfrm>
-            <a:off x="731520" y="4297680"/>
-            <a:ext cx="2743200" cy="365760"/>
-          </a:xfrm>
-          <a:prstGeom prst="rect">
-            <a:avLst/>
-          </a:prstGeom>
-          <a:noFill/>
-          <a:ln/>
-        </p:spPr>
-        <p:txBody>
-          <a:bodyPr wrap="square" rtlCol="0" anchor="ctr"/>
-          <a:lstStyle/>
-          <a:p>
-            <a:pPr indent="0" marL="0">
-              <a:buNone/>
-            </a:pPr>
-            <a:r>
-              <a:rPr lang="en-US" sz="1100" dirty="0">
-                <a:solidFill>
-                  <a:srgbClr val="9B9690"/>
-                </a:solidFill>
-                <a:latin typeface="Calibri" pitchFamily="34" charset="0"/>
-                <a:ea typeface="Calibri" pitchFamily="34" charset="-122"/>
-                <a:cs typeface="Calibri" pitchFamily="34" charset="-120"/>
+              <a:rPr lang="en-US" sz="1000" dirty="0">
+                <a:solidFill>
+                  <a:srgbClr val="FFFFFF">
+                    <a:alpha val="40000"/>
+                  </a:srgbClr>
+                </a:solidFill>
+                <a:latin typeface="Arial" pitchFamily="34" charset="0"/>
+                <a:ea typeface="Arial" pitchFamily="34" charset="-122"/>
+                <a:cs typeface="Arial" pitchFamily="34" charset="-120"/>
               </a:rPr>
               <a:t>mrzocchi.com</a:t>
             </a:r>
-            <a:endParaRPr lang="en-US" sz="1100" dirty="0"/>
+            <a:endParaRPr lang="en-US" sz="1000" dirty="0"/>
           </a:p>
         </p:txBody>
       </p:sp>
@@ -1678,204 +1635,275 @@
         <p:spPr>
           <a:xfrm>
             <a:off x="0" y="0"/>
-            <a:ext cx="9144000" cy="822960"/>
-          </a:xfrm>
-          <a:prstGeom prst="rect">
-            <a:avLst/>
+            <a:ext cx="73152" cy="5148072"/>
+          </a:xfrm>
+          <a:prstGeom prst="rect">
+            <a:avLst/>
+          </a:prstGeom>
+          <a:solidFill>
+            <a:srgbClr val="2A9D8F"/>
+          </a:solidFill>
+          <a:ln/>
+        </p:spPr>
+      </p:sp>
+      <p:sp>
+        <p:nvSpPr>
+          <p:cNvPr id="3" name="Text 1"/>
+          <p:cNvSpPr/>
+          <p:nvPr/>
+        </p:nvSpPr>
+        <p:spPr>
+          <a:xfrm>
+            <a:off x="548640" y="274320"/>
+            <a:ext cx="9144000" cy="640080"/>
+          </a:xfrm>
+          <a:prstGeom prst="rect">
+            <a:avLst/>
+          </a:prstGeom>
+          <a:noFill/>
+          <a:ln/>
+        </p:spPr>
+        <p:txBody>
+          <a:bodyPr wrap="square" rtlCol="0" anchor="ctr"/>
+          <a:lstStyle/>
+          <a:p>
+            <a:pPr indent="0" marL="0">
+              <a:buNone/>
+            </a:pPr>
+            <a:r>
+              <a:rPr lang="en-US" sz="2400" b="1" dirty="0">
+                <a:solidFill>
+                  <a:srgbClr val="1B2A4A"/>
+                </a:solidFill>
+                <a:latin typeface="Georgia" pitchFamily="34" charset="0"/>
+                <a:ea typeface="Georgia" pitchFamily="34" charset="-122"/>
+                <a:cs typeface="Georgia" pitchFamily="34" charset="-120"/>
+              </a:rPr>
+              <a:t>Key Vocabulary</a:t>
+            </a:r>
+            <a:endParaRPr lang="en-US" sz="2400" dirty="0"/>
+          </a:p>
+        </p:txBody>
+      </p:sp>
+      <p:sp>
+        <p:nvSpPr>
+          <p:cNvPr id="4" name="Shape 2"/>
+          <p:cNvSpPr/>
+          <p:nvPr/>
+        </p:nvSpPr>
+        <p:spPr>
+          <a:xfrm>
+            <a:off x="548640" y="960120"/>
+            <a:ext cx="2286000" cy="36576"/>
+          </a:xfrm>
+          <a:prstGeom prst="rect">
+            <a:avLst/>
+          </a:prstGeom>
+          <a:solidFill>
+            <a:srgbClr val="2A9D8F"/>
+          </a:solidFill>
+          <a:ln/>
+        </p:spPr>
+      </p:sp>
+      <p:sp>
+        <p:nvSpPr>
+          <p:cNvPr id="5" name="Shape 3"/>
+          <p:cNvSpPr/>
+          <p:nvPr/>
+        </p:nvSpPr>
+        <p:spPr>
+          <a:xfrm>
+            <a:off x="548640" y="1234440"/>
+            <a:ext cx="3200400" cy="914400"/>
+          </a:xfrm>
+          <a:prstGeom prst="roundRect">
+            <a:avLst>
+              <a:gd name="adj" fmla="val 10000"/>
+            </a:avLst>
           </a:prstGeom>
           <a:solidFill>
             <a:srgbClr val="FFFFFF"/>
           </a:solidFill>
-          <a:ln/>
-        </p:spPr>
-      </p:sp>
-      <p:sp>
-        <p:nvSpPr>
-          <p:cNvPr id="3" name="Shape 1"/>
-          <p:cNvSpPr/>
-          <p:nvPr/>
-        </p:nvSpPr>
-        <p:spPr>
-          <a:xfrm>
-            <a:off x="0" y="804672"/>
-            <a:ext cx="9144000" cy="27432"/>
-          </a:xfrm>
-          <a:prstGeom prst="rect">
-            <a:avLst/>
-          </a:prstGeom>
-          <a:solidFill>
-            <a:srgbClr val="E5E2DC"/>
-          </a:solidFill>
-          <a:ln/>
-        </p:spPr>
-      </p:sp>
-      <p:sp>
-        <p:nvSpPr>
-          <p:cNvPr id="4" name="Shape 2"/>
-          <p:cNvSpPr/>
-          <p:nvPr/>
-        </p:nvSpPr>
-        <p:spPr>
-          <a:xfrm>
-            <a:off x="548640" y="201168"/>
-            <a:ext cx="54864" cy="420624"/>
-          </a:xfrm>
-          <a:prstGeom prst="rect">
-            <a:avLst/>
-          </a:prstGeom>
-          <a:solidFill>
-            <a:srgbClr val="2A9D8F"/>
-          </a:solidFill>
-          <a:ln/>
-        </p:spPr>
-      </p:sp>
-      <p:sp>
-        <p:nvSpPr>
-          <p:cNvPr id="5" name="Text 3"/>
-          <p:cNvSpPr/>
-          <p:nvPr/>
-        </p:nvSpPr>
-        <p:spPr>
-          <a:xfrm>
-            <a:off x="777240" y="137160"/>
-            <a:ext cx="7772400" cy="548640"/>
-          </a:xfrm>
-          <a:prstGeom prst="rect">
-            <a:avLst/>
-          </a:prstGeom>
-          <a:noFill/>
-          <a:ln/>
-        </p:spPr>
-        <p:txBody>
-          <a:bodyPr wrap="square" lIns="0" tIns="0" rIns="0" bIns="0" rtlCol="0" anchor="ctr"/>
+          <a:ln w="9525">
+            <a:solidFill>
+              <a:srgbClr val="E5E2DC"/>
+            </a:solidFill>
+            <a:prstDash val="solid"/>
+          </a:ln>
+        </p:spPr>
+      </p:sp>
+      <p:sp>
+        <p:nvSpPr>
+          <p:cNvPr id="6" name="Text 4"/>
+          <p:cNvSpPr/>
+          <p:nvPr/>
+        </p:nvSpPr>
+        <p:spPr>
+          <a:xfrm>
+            <a:off x="685800" y="1307592"/>
+            <a:ext cx="2926080" cy="320040"/>
+          </a:xfrm>
+          <a:prstGeom prst="rect">
+            <a:avLst/>
+          </a:prstGeom>
+          <a:noFill/>
+          <a:ln/>
+        </p:spPr>
+        <p:txBody>
+          <a:bodyPr wrap="square" rtlCol="0" anchor="ctr"/>
           <a:lstStyle/>
           <a:p>
             <a:pPr indent="0" marL="0">
               <a:buNone/>
             </a:pPr>
             <a:r>
-              <a:rPr lang="en-US" sz="2000" b="1" dirty="0">
-                <a:solidFill>
-                  <a:srgbClr val="1B2A4A"/>
+              <a:rPr lang="en-US" sz="1400" b="1" dirty="0">
+                <a:solidFill>
+                  <a:srgbClr val="2A9D8F"/>
                 </a:solidFill>
                 <a:latin typeface="Georgia" pitchFamily="34" charset="0"/>
                 <a:ea typeface="Georgia" pitchFamily="34" charset="-122"/>
                 <a:cs typeface="Georgia" pitchFamily="34" charset="-120"/>
               </a:rPr>
-              <a:t>Key Vocabulary</a:t>
-            </a:r>
-            <a:endParaRPr lang="en-US" sz="2000" dirty="0"/>
-          </a:p>
-        </p:txBody>
-      </p:sp>
-      <p:sp>
-        <p:nvSpPr>
-          <p:cNvPr id="6" name="Shape 4"/>
-          <p:cNvSpPr/>
-          <p:nvPr/>
-        </p:nvSpPr>
-        <p:spPr>
-          <a:xfrm>
-            <a:off x="731520" y="1051560"/>
-            <a:ext cx="3657600" cy="658368"/>
-          </a:xfrm>
-          <a:prstGeom prst="rect">
-            <a:avLst/>
+              <a:t>Fraction</a:t>
+            </a:r>
+            <a:endParaRPr lang="en-US" sz="1400" dirty="0"/>
+          </a:p>
+        </p:txBody>
+      </p:sp>
+      <p:sp>
+        <p:nvSpPr>
+          <p:cNvPr id="7" name="Text 5"/>
+          <p:cNvSpPr/>
+          <p:nvPr/>
+        </p:nvSpPr>
+        <p:spPr>
+          <a:xfrm>
+            <a:off x="685800" y="1645920"/>
+            <a:ext cx="2926080" cy="457200"/>
+          </a:xfrm>
+          <a:prstGeom prst="rect">
+            <a:avLst/>
+          </a:prstGeom>
+          <a:noFill/>
+          <a:ln/>
+        </p:spPr>
+        <p:txBody>
+          <a:bodyPr wrap="square" rtlCol="0" anchor="ctr"/>
+          <a:lstStyle/>
+          <a:p>
+            <a:pPr indent="0" marL="0">
+              <a:lnSpc>
+                <a:spcPct val="130000"/>
+              </a:lnSpc>
+              <a:buNone/>
+            </a:pPr>
+            <a:r>
+              <a:rPr lang="en-US" sz="1100" dirty="0">
+                <a:solidFill>
+                  <a:srgbClr val="6B6660"/>
+                </a:solidFill>
+                <a:latin typeface="Arial" pitchFamily="34" charset="0"/>
+                <a:ea typeface="Arial" pitchFamily="34" charset="-122"/>
+                <a:cs typeface="Arial" pitchFamily="34" charset="-120"/>
+              </a:rPr>
+              <a:t>A part of a whole — written as numerator/denominator.</a:t>
+            </a:r>
+            <a:endParaRPr lang="en-US" sz="1100" dirty="0"/>
+          </a:p>
+        </p:txBody>
+      </p:sp>
+      <p:sp>
+        <p:nvSpPr>
+          <p:cNvPr id="8" name="Shape 6"/>
+          <p:cNvSpPr/>
+          <p:nvPr/>
+        </p:nvSpPr>
+        <p:spPr>
+          <a:xfrm>
+            <a:off x="4023360" y="1234440"/>
+            <a:ext cx="3200400" cy="914400"/>
+          </a:xfrm>
+          <a:prstGeom prst="roundRect">
+            <a:avLst>
+              <a:gd name="adj" fmla="val 10000"/>
+            </a:avLst>
           </a:prstGeom>
           <a:solidFill>
             <a:srgbClr val="FFFFFF"/>
           </a:solidFill>
-          <a:ln/>
-          <a:effectLst>
-            <a:outerShdw sx="100000" sy="100000" kx="0" ky="0" algn="bl" rotWithShape="0" blurRad="50800" dist="25400" dir="8100000">
-              <a:srgbClr val="000000">
-                <a:alpha val="10000"/>
-              </a:srgbClr>
-            </a:outerShdw>
-          </a:effectLst>
-        </p:spPr>
-      </p:sp>
-      <p:sp>
-        <p:nvSpPr>
-          <p:cNvPr id="7" name="Shape 5"/>
-          <p:cNvSpPr/>
-          <p:nvPr/>
-        </p:nvSpPr>
-        <p:spPr>
-          <a:xfrm>
-            <a:off x="731520" y="1051560"/>
-            <a:ext cx="54864" cy="658368"/>
-          </a:xfrm>
-          <a:prstGeom prst="rect">
-            <a:avLst/>
-          </a:prstGeom>
-          <a:solidFill>
-            <a:srgbClr val="2A9D8F"/>
-          </a:solidFill>
-          <a:ln/>
-        </p:spPr>
-      </p:sp>
-      <p:sp>
-        <p:nvSpPr>
-          <p:cNvPr id="8" name="Text 6"/>
-          <p:cNvSpPr/>
-          <p:nvPr/>
-        </p:nvSpPr>
-        <p:spPr>
-          <a:xfrm>
-            <a:off x="914400" y="1051560"/>
-            <a:ext cx="1463040" cy="658368"/>
-          </a:xfrm>
-          <a:prstGeom prst="rect">
-            <a:avLst/>
-          </a:prstGeom>
-          <a:noFill/>
-          <a:ln/>
-        </p:spPr>
-        <p:txBody>
-          <a:bodyPr wrap="square" lIns="0" tIns="0" rIns="0" bIns="0" rtlCol="0" anchor="ctr"/>
+          <a:ln w="9525">
+            <a:solidFill>
+              <a:srgbClr val="E5E2DC"/>
+            </a:solidFill>
+            <a:prstDash val="solid"/>
+          </a:ln>
+        </p:spPr>
+      </p:sp>
+      <p:sp>
+        <p:nvSpPr>
+          <p:cNvPr id="9" name="Text 7"/>
+          <p:cNvSpPr/>
+          <p:nvPr/>
+        </p:nvSpPr>
+        <p:spPr>
+          <a:xfrm>
+            <a:off x="4160520" y="1307592"/>
+            <a:ext cx="2926080" cy="320040"/>
+          </a:xfrm>
+          <a:prstGeom prst="rect">
+            <a:avLst/>
+          </a:prstGeom>
+          <a:noFill/>
+          <a:ln/>
+        </p:spPr>
+        <p:txBody>
+          <a:bodyPr wrap="square" rtlCol="0" anchor="ctr"/>
           <a:lstStyle/>
           <a:p>
             <a:pPr indent="0" marL="0">
               <a:buNone/>
             </a:pPr>
             <a:r>
-              <a:rPr lang="en-US" sz="1300" b="1" dirty="0">
-                <a:solidFill>
-                  <a:srgbClr val="1B2A4A"/>
+              <a:rPr lang="en-US" sz="1400" b="1" dirty="0">
+                <a:solidFill>
+                  <a:srgbClr val="2A9D8F"/>
                 </a:solidFill>
                 <a:latin typeface="Georgia" pitchFamily="34" charset="0"/>
                 <a:ea typeface="Georgia" pitchFamily="34" charset="-122"/>
                 <a:cs typeface="Georgia" pitchFamily="34" charset="-120"/>
               </a:rPr>
-              <a:t>Fraction</a:t>
-            </a:r>
-            <a:endParaRPr lang="en-US" sz="1300" dirty="0"/>
-          </a:p>
-        </p:txBody>
-      </p:sp>
-      <p:sp>
-        <p:nvSpPr>
-          <p:cNvPr id="9" name="Text 7"/>
-          <p:cNvSpPr/>
-          <p:nvPr/>
-        </p:nvSpPr>
-        <p:spPr>
-          <a:xfrm>
-            <a:off x="2377440" y="1051560"/>
-            <a:ext cx="1920240" cy="658368"/>
-          </a:xfrm>
-          <a:prstGeom prst="rect">
-            <a:avLst/>
-          </a:prstGeom>
-          <a:noFill/>
-          <a:ln/>
-        </p:spPr>
-        <p:txBody>
-          <a:bodyPr wrap="square" lIns="0" tIns="0" rIns="0" bIns="0" rtlCol="0" anchor="ctr"/>
+              <a:t>Numerator</a:t>
+            </a:r>
+            <a:endParaRPr lang="en-US" sz="1400" dirty="0"/>
+          </a:p>
+        </p:txBody>
+      </p:sp>
+      <p:sp>
+        <p:nvSpPr>
+          <p:cNvPr id="10" name="Text 8"/>
+          <p:cNvSpPr/>
+          <p:nvPr/>
+        </p:nvSpPr>
+        <p:spPr>
+          <a:xfrm>
+            <a:off x="4160520" y="1645920"/>
+            <a:ext cx="2926080" cy="457200"/>
+          </a:xfrm>
+          <a:prstGeom prst="rect">
+            <a:avLst/>
+          </a:prstGeom>
+          <a:noFill/>
+          <a:ln/>
+        </p:spPr>
+        <p:txBody>
+          <a:bodyPr wrap="square" rtlCol="0" anchor="ctr"/>
           <a:lstStyle/>
           <a:p>
             <a:pPr indent="0" marL="0">
+              <a:lnSpc>
+                <a:spcPct val="130000"/>
+              </a:lnSpc>
               <a:buNone/>
             </a:pPr>
             <a:r>
@@ -1883,11 +1911,11 @@
                 <a:solidFill>
                   <a:srgbClr val="6B6660"/>
                 </a:solidFill>
-                <a:latin typeface="Calibri" pitchFamily="34" charset="0"/>
-                <a:ea typeface="Calibri" pitchFamily="34" charset="-122"/>
-                <a:cs typeface="Calibri" pitchFamily="34" charset="-120"/>
-              </a:rPr>
-              <a:t>A part of a whole</a:t>
+                <a:latin typeface="Arial" pitchFamily="34" charset="0"/>
+                <a:ea typeface="Arial" pitchFamily="34" charset="-122"/>
+                <a:cs typeface="Arial" pitchFamily="34" charset="-120"/>
+              </a:rPr>
+              <a:t>The top number — how many parts you HAVE.</a:t>
             </a:r>
             <a:endParaRPr lang="en-US" sz="1100" dirty="0"/>
           </a:p>
@@ -1895,49 +1923,29 @@
       </p:sp>
       <p:sp>
         <p:nvSpPr>
-          <p:cNvPr id="10" name="Shape 8"/>
-          <p:cNvSpPr/>
-          <p:nvPr/>
-        </p:nvSpPr>
-        <p:spPr>
-          <a:xfrm>
-            <a:off x="4754880" y="1051560"/>
-            <a:ext cx="3657600" cy="658368"/>
-          </a:xfrm>
-          <a:prstGeom prst="rect">
-            <a:avLst/>
+          <p:cNvPr id="11" name="Shape 9"/>
+          <p:cNvSpPr/>
+          <p:nvPr/>
+        </p:nvSpPr>
+        <p:spPr>
+          <a:xfrm>
+            <a:off x="7498080" y="1234440"/>
+            <a:ext cx="3200400" cy="914400"/>
+          </a:xfrm>
+          <a:prstGeom prst="roundRect">
+            <a:avLst>
+              <a:gd name="adj" fmla="val 10000"/>
+            </a:avLst>
           </a:prstGeom>
           <a:solidFill>
             <a:srgbClr val="FFFFFF"/>
           </a:solidFill>
-          <a:ln/>
-          <a:effectLst>
-            <a:outerShdw sx="100000" sy="100000" kx="0" ky="0" algn="bl" rotWithShape="0" blurRad="50800" dist="25400" dir="8100000">
-              <a:srgbClr val="000000">
-                <a:alpha val="10000"/>
-              </a:srgbClr>
-            </a:outerShdw>
-          </a:effectLst>
-        </p:spPr>
-      </p:sp>
-      <p:sp>
-        <p:nvSpPr>
-          <p:cNvPr id="11" name="Shape 9"/>
-          <p:cNvSpPr/>
-          <p:nvPr/>
-        </p:nvSpPr>
-        <p:spPr>
-          <a:xfrm>
-            <a:off x="4754880" y="1051560"/>
-            <a:ext cx="54864" cy="658368"/>
-          </a:xfrm>
-          <a:prstGeom prst="rect">
-            <a:avLst/>
-          </a:prstGeom>
-          <a:solidFill>
-            <a:srgbClr val="2A9D8F"/>
-          </a:solidFill>
-          <a:ln/>
+          <a:ln w="9525">
+            <a:solidFill>
+              <a:srgbClr val="E5E2DC"/>
+            </a:solidFill>
+            <a:prstDash val="solid"/>
+          </a:ln>
         </p:spPr>
       </p:sp>
       <p:sp>
@@ -1948,34 +1956,34 @@
         </p:nvSpPr>
         <p:spPr>
           <a:xfrm>
-            <a:off x="4937760" y="1051560"/>
-            <a:ext cx="1463040" cy="658368"/>
-          </a:xfrm>
-          <a:prstGeom prst="rect">
-            <a:avLst/>
-          </a:prstGeom>
-          <a:noFill/>
-          <a:ln/>
-        </p:spPr>
-        <p:txBody>
-          <a:bodyPr wrap="square" lIns="0" tIns="0" rIns="0" bIns="0" rtlCol="0" anchor="ctr"/>
+            <a:off x="7635240" y="1307592"/>
+            <a:ext cx="2926080" cy="320040"/>
+          </a:xfrm>
+          <a:prstGeom prst="rect">
+            <a:avLst/>
+          </a:prstGeom>
+          <a:noFill/>
+          <a:ln/>
+        </p:spPr>
+        <p:txBody>
+          <a:bodyPr wrap="square" rtlCol="0" anchor="ctr"/>
           <a:lstStyle/>
           <a:p>
             <a:pPr indent="0" marL="0">
               <a:buNone/>
             </a:pPr>
             <a:r>
-              <a:rPr lang="en-US" sz="1300" b="1" dirty="0">
-                <a:solidFill>
-                  <a:srgbClr val="1B2A4A"/>
+              <a:rPr lang="en-US" sz="1400" b="1" dirty="0">
+                <a:solidFill>
+                  <a:srgbClr val="2A9D8F"/>
                 </a:solidFill>
                 <a:latin typeface="Georgia" pitchFamily="34" charset="0"/>
                 <a:ea typeface="Georgia" pitchFamily="34" charset="-122"/>
                 <a:cs typeface="Georgia" pitchFamily="34" charset="-120"/>
               </a:rPr>
-              <a:t>Numerator</a:t>
-            </a:r>
-            <a:endParaRPr lang="en-US" sz="1300" dirty="0"/>
+              <a:t>Denominator</a:t>
+            </a:r>
+            <a:endParaRPr lang="en-US" sz="1400" dirty="0"/>
           </a:p>
         </p:txBody>
       </p:sp>
@@ -1987,20 +1995,23 @@
         </p:nvSpPr>
         <p:spPr>
           <a:xfrm>
-            <a:off x="6400800" y="1051560"/>
-            <a:ext cx="1920240" cy="658368"/>
-          </a:xfrm>
-          <a:prstGeom prst="rect">
-            <a:avLst/>
-          </a:prstGeom>
-          <a:noFill/>
-          <a:ln/>
-        </p:spPr>
-        <p:txBody>
-          <a:bodyPr wrap="square" lIns="0" tIns="0" rIns="0" bIns="0" rtlCol="0" anchor="ctr"/>
+            <a:off x="7635240" y="1645920"/>
+            <a:ext cx="2926080" cy="457200"/>
+          </a:xfrm>
+          <a:prstGeom prst="rect">
+            <a:avLst/>
+          </a:prstGeom>
+          <a:noFill/>
+          <a:ln/>
+        </p:spPr>
+        <p:txBody>
+          <a:bodyPr wrap="square" rtlCol="0" anchor="ctr"/>
           <a:lstStyle/>
           <a:p>
             <a:pPr indent="0" marL="0">
+              <a:lnSpc>
+                <a:spcPct val="130000"/>
+              </a:lnSpc>
               <a:buNone/>
             </a:pPr>
             <a:r>
@@ -2008,11 +2019,11 @@
                 <a:solidFill>
                   <a:srgbClr val="6B6660"/>
                 </a:solidFill>
-                <a:latin typeface="Calibri" pitchFamily="34" charset="0"/>
-                <a:ea typeface="Calibri" pitchFamily="34" charset="-122"/>
-                <a:cs typeface="Calibri" pitchFamily="34" charset="-120"/>
-              </a:rPr>
-              <a:t>Top number — how many parts you have</a:t>
+                <a:latin typeface="Arial" pitchFamily="34" charset="0"/>
+                <a:ea typeface="Arial" pitchFamily="34" charset="-122"/>
+                <a:cs typeface="Arial" pitchFamily="34" charset="-120"/>
+              </a:rPr>
+              <a:t>The bottom number — how many EQUAL parts in total.</a:t>
             </a:r>
             <a:endParaRPr lang="en-US" sz="1100" dirty="0"/>
           </a:p>
@@ -2026,106 +2037,89 @@
         </p:nvSpPr>
         <p:spPr>
           <a:xfrm>
-            <a:off x="731520" y="1819656"/>
-            <a:ext cx="3657600" cy="658368"/>
-          </a:xfrm>
-          <a:prstGeom prst="rect">
-            <a:avLst/>
+            <a:off x="548640" y="2286000"/>
+            <a:ext cx="3200400" cy="914400"/>
+          </a:xfrm>
+          <a:prstGeom prst="roundRect">
+            <a:avLst>
+              <a:gd name="adj" fmla="val 10000"/>
+            </a:avLst>
           </a:prstGeom>
           <a:solidFill>
             <a:srgbClr val="FFFFFF"/>
           </a:solidFill>
-          <a:ln/>
-          <a:effectLst>
-            <a:outerShdw sx="100000" sy="100000" kx="0" ky="0" algn="bl" rotWithShape="0" blurRad="50800" dist="25400" dir="8100000">
-              <a:srgbClr val="000000">
-                <a:alpha val="10000"/>
-              </a:srgbClr>
-            </a:outerShdw>
-          </a:effectLst>
-        </p:spPr>
-      </p:sp>
-      <p:sp>
-        <p:nvSpPr>
-          <p:cNvPr id="15" name="Shape 13"/>
-          <p:cNvSpPr/>
-          <p:nvPr/>
-        </p:nvSpPr>
-        <p:spPr>
-          <a:xfrm>
-            <a:off x="731520" y="1819656"/>
-            <a:ext cx="54864" cy="658368"/>
-          </a:xfrm>
-          <a:prstGeom prst="rect">
-            <a:avLst/>
-          </a:prstGeom>
-          <a:solidFill>
-            <a:srgbClr val="2A9D8F"/>
-          </a:solidFill>
-          <a:ln/>
-        </p:spPr>
-      </p:sp>
-      <p:sp>
-        <p:nvSpPr>
-          <p:cNvPr id="16" name="Text 14"/>
-          <p:cNvSpPr/>
-          <p:nvPr/>
-        </p:nvSpPr>
-        <p:spPr>
-          <a:xfrm>
-            <a:off x="914400" y="1819656"/>
-            <a:ext cx="1463040" cy="658368"/>
-          </a:xfrm>
-          <a:prstGeom prst="rect">
-            <a:avLst/>
-          </a:prstGeom>
-          <a:noFill/>
-          <a:ln/>
-        </p:spPr>
-        <p:txBody>
-          <a:bodyPr wrap="square" lIns="0" tIns="0" rIns="0" bIns="0" rtlCol="0" anchor="ctr"/>
+          <a:ln w="9525">
+            <a:solidFill>
+              <a:srgbClr val="E5E2DC"/>
+            </a:solidFill>
+            <a:prstDash val="solid"/>
+          </a:ln>
+        </p:spPr>
+      </p:sp>
+      <p:sp>
+        <p:nvSpPr>
+          <p:cNvPr id="15" name="Text 13"/>
+          <p:cNvSpPr/>
+          <p:nvPr/>
+        </p:nvSpPr>
+        <p:spPr>
+          <a:xfrm>
+            <a:off x="685800" y="2359152"/>
+            <a:ext cx="2926080" cy="320040"/>
+          </a:xfrm>
+          <a:prstGeom prst="rect">
+            <a:avLst/>
+          </a:prstGeom>
+          <a:noFill/>
+          <a:ln/>
+        </p:spPr>
+        <p:txBody>
+          <a:bodyPr wrap="square" rtlCol="0" anchor="ctr"/>
           <a:lstStyle/>
           <a:p>
             <a:pPr indent="0" marL="0">
               <a:buNone/>
             </a:pPr>
             <a:r>
-              <a:rPr lang="en-US" sz="1300" b="1" dirty="0">
-                <a:solidFill>
-                  <a:srgbClr val="1B2A4A"/>
+              <a:rPr lang="en-US" sz="1400" b="1" dirty="0">
+                <a:solidFill>
+                  <a:srgbClr val="2A9D8F"/>
                 </a:solidFill>
                 <a:latin typeface="Georgia" pitchFamily="34" charset="0"/>
                 <a:ea typeface="Georgia" pitchFamily="34" charset="-122"/>
                 <a:cs typeface="Georgia" pitchFamily="34" charset="-120"/>
               </a:rPr>
-              <a:t>Denominator</a:t>
-            </a:r>
-            <a:endParaRPr lang="en-US" sz="1300" dirty="0"/>
-          </a:p>
-        </p:txBody>
-      </p:sp>
-      <p:sp>
-        <p:nvSpPr>
-          <p:cNvPr id="17" name="Text 15"/>
-          <p:cNvSpPr/>
-          <p:nvPr/>
-        </p:nvSpPr>
-        <p:spPr>
-          <a:xfrm>
-            <a:off x="2377440" y="1819656"/>
-            <a:ext cx="1920240" cy="658368"/>
-          </a:xfrm>
-          <a:prstGeom prst="rect">
-            <a:avLst/>
-          </a:prstGeom>
-          <a:noFill/>
-          <a:ln/>
-        </p:spPr>
-        <p:txBody>
-          <a:bodyPr wrap="square" lIns="0" tIns="0" rIns="0" bIns="0" rtlCol="0" anchor="ctr"/>
+              <a:t>Proper Fraction</a:t>
+            </a:r>
+            <a:endParaRPr lang="en-US" sz="1400" dirty="0"/>
+          </a:p>
+        </p:txBody>
+      </p:sp>
+      <p:sp>
+        <p:nvSpPr>
+          <p:cNvPr id="16" name="Text 14"/>
+          <p:cNvSpPr/>
+          <p:nvPr/>
+        </p:nvSpPr>
+        <p:spPr>
+          <a:xfrm>
+            <a:off x="685800" y="2697480"/>
+            <a:ext cx="2926080" cy="457200"/>
+          </a:xfrm>
+          <a:prstGeom prst="rect">
+            <a:avLst/>
+          </a:prstGeom>
+          <a:noFill/>
+          <a:ln/>
+        </p:spPr>
+        <p:txBody>
+          <a:bodyPr wrap="square" rtlCol="0" anchor="ctr"/>
           <a:lstStyle/>
           <a:p>
             <a:pPr indent="0" marL="0">
+              <a:lnSpc>
+                <a:spcPct val="130000"/>
+              </a:lnSpc>
               <a:buNone/>
             </a:pPr>
             <a:r>
@@ -2133,11 +2127,11 @@
                 <a:solidFill>
                   <a:srgbClr val="6B6660"/>
                 </a:solidFill>
-                <a:latin typeface="Calibri" pitchFamily="34" charset="0"/>
-                <a:ea typeface="Calibri" pitchFamily="34" charset="-122"/>
-                <a:cs typeface="Calibri" pitchFamily="34" charset="-120"/>
-              </a:rPr>
-              <a:t>Bottom number — total equal parts</a:t>
+                <a:latin typeface="Arial" pitchFamily="34" charset="0"/>
+                <a:ea typeface="Arial" pitchFamily="34" charset="-122"/>
+                <a:cs typeface="Arial" pitchFamily="34" charset="-120"/>
+              </a:rPr>
+              <a:t>Numerator &lt; denominator (less than 1). E.g. ³⁄₄</a:t>
             </a:r>
             <a:endParaRPr lang="en-US" sz="1100" dirty="0"/>
           </a:p>
@@ -2145,112 +2139,95 @@
       </p:sp>
       <p:sp>
         <p:nvSpPr>
-          <p:cNvPr id="18" name="Shape 16"/>
-          <p:cNvSpPr/>
-          <p:nvPr/>
-        </p:nvSpPr>
-        <p:spPr>
-          <a:xfrm>
-            <a:off x="4754880" y="1819656"/>
-            <a:ext cx="3657600" cy="658368"/>
-          </a:xfrm>
-          <a:prstGeom prst="rect">
-            <a:avLst/>
+          <p:cNvPr id="17" name="Shape 15"/>
+          <p:cNvSpPr/>
+          <p:nvPr/>
+        </p:nvSpPr>
+        <p:spPr>
+          <a:xfrm>
+            <a:off x="4023360" y="2286000"/>
+            <a:ext cx="3200400" cy="914400"/>
+          </a:xfrm>
+          <a:prstGeom prst="roundRect">
+            <a:avLst>
+              <a:gd name="adj" fmla="val 10000"/>
+            </a:avLst>
           </a:prstGeom>
           <a:solidFill>
             <a:srgbClr val="FFFFFF"/>
           </a:solidFill>
-          <a:ln/>
-          <a:effectLst>
-            <a:outerShdw sx="100000" sy="100000" kx="0" ky="0" algn="bl" rotWithShape="0" blurRad="50800" dist="25400" dir="8100000">
-              <a:srgbClr val="000000">
-                <a:alpha val="10000"/>
-              </a:srgbClr>
-            </a:outerShdw>
-          </a:effectLst>
-        </p:spPr>
-      </p:sp>
-      <p:sp>
-        <p:nvSpPr>
-          <p:cNvPr id="19" name="Shape 17"/>
-          <p:cNvSpPr/>
-          <p:nvPr/>
-        </p:nvSpPr>
-        <p:spPr>
-          <a:xfrm>
-            <a:off x="4754880" y="1819656"/>
-            <a:ext cx="54864" cy="658368"/>
-          </a:xfrm>
-          <a:prstGeom prst="rect">
-            <a:avLst/>
-          </a:prstGeom>
-          <a:solidFill>
-            <a:srgbClr val="2A9D8F"/>
-          </a:solidFill>
-          <a:ln/>
-        </p:spPr>
-      </p:sp>
-      <p:sp>
-        <p:nvSpPr>
-          <p:cNvPr id="20" name="Text 18"/>
-          <p:cNvSpPr/>
-          <p:nvPr/>
-        </p:nvSpPr>
-        <p:spPr>
-          <a:xfrm>
-            <a:off x="4937760" y="1819656"/>
-            <a:ext cx="1463040" cy="658368"/>
-          </a:xfrm>
-          <a:prstGeom prst="rect">
-            <a:avLst/>
-          </a:prstGeom>
-          <a:noFill/>
-          <a:ln/>
-        </p:spPr>
-        <p:txBody>
-          <a:bodyPr wrap="square" lIns="0" tIns="0" rIns="0" bIns="0" rtlCol="0" anchor="ctr"/>
+          <a:ln w="9525">
+            <a:solidFill>
+              <a:srgbClr val="E5E2DC"/>
+            </a:solidFill>
+            <a:prstDash val="solid"/>
+          </a:ln>
+        </p:spPr>
+      </p:sp>
+      <p:sp>
+        <p:nvSpPr>
+          <p:cNvPr id="18" name="Text 16"/>
+          <p:cNvSpPr/>
+          <p:nvPr/>
+        </p:nvSpPr>
+        <p:spPr>
+          <a:xfrm>
+            <a:off x="4160520" y="2359152"/>
+            <a:ext cx="2926080" cy="320040"/>
+          </a:xfrm>
+          <a:prstGeom prst="rect">
+            <a:avLst/>
+          </a:prstGeom>
+          <a:noFill/>
+          <a:ln/>
+        </p:spPr>
+        <p:txBody>
+          <a:bodyPr wrap="square" rtlCol="0" anchor="ctr"/>
           <a:lstStyle/>
           <a:p>
             <a:pPr indent="0" marL="0">
               <a:buNone/>
             </a:pPr>
             <a:r>
-              <a:rPr lang="en-US" sz="1300" b="1" dirty="0">
-                <a:solidFill>
-                  <a:srgbClr val="1B2A4A"/>
+              <a:rPr lang="en-US" sz="1400" b="1" dirty="0">
+                <a:solidFill>
+                  <a:srgbClr val="2A9D8F"/>
                 </a:solidFill>
                 <a:latin typeface="Georgia" pitchFamily="34" charset="0"/>
                 <a:ea typeface="Georgia" pitchFamily="34" charset="-122"/>
                 <a:cs typeface="Georgia" pitchFamily="34" charset="-120"/>
               </a:rPr>
-              <a:t>Proper</a:t>
-            </a:r>
-            <a:endParaRPr lang="en-US" sz="1300" dirty="0"/>
-          </a:p>
-        </p:txBody>
-      </p:sp>
-      <p:sp>
-        <p:nvSpPr>
-          <p:cNvPr id="21" name="Text 19"/>
-          <p:cNvSpPr/>
-          <p:nvPr/>
-        </p:nvSpPr>
-        <p:spPr>
-          <a:xfrm>
-            <a:off x="6400800" y="1819656"/>
-            <a:ext cx="1920240" cy="658368"/>
-          </a:xfrm>
-          <a:prstGeom prst="rect">
-            <a:avLst/>
-          </a:prstGeom>
-          <a:noFill/>
-          <a:ln/>
-        </p:spPr>
-        <p:txBody>
-          <a:bodyPr wrap="square" lIns="0" tIns="0" rIns="0" bIns="0" rtlCol="0" anchor="ctr"/>
+              <a:t>Improper Fraction</a:t>
+            </a:r>
+            <a:endParaRPr lang="en-US" sz="1400" dirty="0"/>
+          </a:p>
+        </p:txBody>
+      </p:sp>
+      <p:sp>
+        <p:nvSpPr>
+          <p:cNvPr id="19" name="Text 17"/>
+          <p:cNvSpPr/>
+          <p:nvPr/>
+        </p:nvSpPr>
+        <p:spPr>
+          <a:xfrm>
+            <a:off x="4160520" y="2697480"/>
+            <a:ext cx="2926080" cy="457200"/>
+          </a:xfrm>
+          <a:prstGeom prst="rect">
+            <a:avLst/>
+          </a:prstGeom>
+          <a:noFill/>
+          <a:ln/>
+        </p:spPr>
+        <p:txBody>
+          <a:bodyPr wrap="square" rtlCol="0" anchor="ctr"/>
           <a:lstStyle/>
           <a:p>
             <a:pPr indent="0" marL="0">
+              <a:lnSpc>
+                <a:spcPct val="130000"/>
+              </a:lnSpc>
               <a:buNone/>
             </a:pPr>
             <a:r>
@@ -2258,11 +2235,11 @@
                 <a:solidFill>
                   <a:srgbClr val="6B6660"/>
                 </a:solidFill>
-                <a:latin typeface="Calibri" pitchFamily="34" charset="0"/>
-                <a:ea typeface="Calibri" pitchFamily="34" charset="-122"/>
-                <a:cs typeface="Calibri" pitchFamily="34" charset="-120"/>
-              </a:rPr>
-              <a:t>Numerator &lt; denominator (less than 1)</a:t>
+                <a:latin typeface="Arial" pitchFamily="34" charset="0"/>
+                <a:ea typeface="Arial" pitchFamily="34" charset="-122"/>
+                <a:cs typeface="Arial" pitchFamily="34" charset="-120"/>
+              </a:rPr>
+              <a:t>Numerator ≥ denominator (1 or more). E.g. ⁷⁄₄</a:t>
             </a:r>
             <a:endParaRPr lang="en-US" sz="1100" dirty="0"/>
           </a:p>
@@ -2270,112 +2247,95 @@
       </p:sp>
       <p:sp>
         <p:nvSpPr>
-          <p:cNvPr id="22" name="Shape 20"/>
-          <p:cNvSpPr/>
-          <p:nvPr/>
-        </p:nvSpPr>
-        <p:spPr>
-          <a:xfrm>
-            <a:off x="731520" y="2587752"/>
-            <a:ext cx="3657600" cy="658368"/>
-          </a:xfrm>
-          <a:prstGeom prst="rect">
-            <a:avLst/>
+          <p:cNvPr id="20" name="Shape 18"/>
+          <p:cNvSpPr/>
+          <p:nvPr/>
+        </p:nvSpPr>
+        <p:spPr>
+          <a:xfrm>
+            <a:off x="7498080" y="2286000"/>
+            <a:ext cx="3200400" cy="914400"/>
+          </a:xfrm>
+          <a:prstGeom prst="roundRect">
+            <a:avLst>
+              <a:gd name="adj" fmla="val 10000"/>
+            </a:avLst>
           </a:prstGeom>
           <a:solidFill>
             <a:srgbClr val="FFFFFF"/>
           </a:solidFill>
-          <a:ln/>
-          <a:effectLst>
-            <a:outerShdw sx="100000" sy="100000" kx="0" ky="0" algn="bl" rotWithShape="0" blurRad="50800" dist="25400" dir="8100000">
-              <a:srgbClr val="000000">
-                <a:alpha val="10000"/>
-              </a:srgbClr>
-            </a:outerShdw>
-          </a:effectLst>
-        </p:spPr>
-      </p:sp>
-      <p:sp>
-        <p:nvSpPr>
-          <p:cNvPr id="23" name="Shape 21"/>
-          <p:cNvSpPr/>
-          <p:nvPr/>
-        </p:nvSpPr>
-        <p:spPr>
-          <a:xfrm>
-            <a:off x="731520" y="2587752"/>
-            <a:ext cx="54864" cy="658368"/>
-          </a:xfrm>
-          <a:prstGeom prst="rect">
-            <a:avLst/>
-          </a:prstGeom>
-          <a:solidFill>
-            <a:srgbClr val="2A9D8F"/>
-          </a:solidFill>
-          <a:ln/>
-        </p:spPr>
-      </p:sp>
-      <p:sp>
-        <p:nvSpPr>
-          <p:cNvPr id="24" name="Text 22"/>
-          <p:cNvSpPr/>
-          <p:nvPr/>
-        </p:nvSpPr>
-        <p:spPr>
-          <a:xfrm>
-            <a:off x="914400" y="2587752"/>
-            <a:ext cx="1463040" cy="658368"/>
-          </a:xfrm>
-          <a:prstGeom prst="rect">
-            <a:avLst/>
-          </a:prstGeom>
-          <a:noFill/>
-          <a:ln/>
-        </p:spPr>
-        <p:txBody>
-          <a:bodyPr wrap="square" lIns="0" tIns="0" rIns="0" bIns="0" rtlCol="0" anchor="ctr"/>
+          <a:ln w="9525">
+            <a:solidFill>
+              <a:srgbClr val="E5E2DC"/>
+            </a:solidFill>
+            <a:prstDash val="solid"/>
+          </a:ln>
+        </p:spPr>
+      </p:sp>
+      <p:sp>
+        <p:nvSpPr>
+          <p:cNvPr id="21" name="Text 19"/>
+          <p:cNvSpPr/>
+          <p:nvPr/>
+        </p:nvSpPr>
+        <p:spPr>
+          <a:xfrm>
+            <a:off x="7635240" y="2359152"/>
+            <a:ext cx="2926080" cy="320040"/>
+          </a:xfrm>
+          <a:prstGeom prst="rect">
+            <a:avLst/>
+          </a:prstGeom>
+          <a:noFill/>
+          <a:ln/>
+        </p:spPr>
+        <p:txBody>
+          <a:bodyPr wrap="square" rtlCol="0" anchor="ctr"/>
           <a:lstStyle/>
           <a:p>
             <a:pPr indent="0" marL="0">
               <a:buNone/>
             </a:pPr>
             <a:r>
-              <a:rPr lang="en-US" sz="1300" b="1" dirty="0">
-                <a:solidFill>
-                  <a:srgbClr val="1B2A4A"/>
+              <a:rPr lang="en-US" sz="1400" b="1" dirty="0">
+                <a:solidFill>
+                  <a:srgbClr val="2A9D8F"/>
                 </a:solidFill>
                 <a:latin typeface="Georgia" pitchFamily="34" charset="0"/>
                 <a:ea typeface="Georgia" pitchFamily="34" charset="-122"/>
                 <a:cs typeface="Georgia" pitchFamily="34" charset="-120"/>
               </a:rPr>
-              <a:t>Improper</a:t>
-            </a:r>
-            <a:endParaRPr lang="en-US" sz="1300" dirty="0"/>
-          </a:p>
-        </p:txBody>
-      </p:sp>
-      <p:sp>
-        <p:nvSpPr>
-          <p:cNvPr id="25" name="Text 23"/>
-          <p:cNvSpPr/>
-          <p:nvPr/>
-        </p:nvSpPr>
-        <p:spPr>
-          <a:xfrm>
-            <a:off x="2377440" y="2587752"/>
-            <a:ext cx="1920240" cy="658368"/>
-          </a:xfrm>
-          <a:prstGeom prst="rect">
-            <a:avLst/>
-          </a:prstGeom>
-          <a:noFill/>
-          <a:ln/>
-        </p:spPr>
-        <p:txBody>
-          <a:bodyPr wrap="square" lIns="0" tIns="0" rIns="0" bIns="0" rtlCol="0" anchor="ctr"/>
+              <a:t>Mixed Number</a:t>
+            </a:r>
+            <a:endParaRPr lang="en-US" sz="1400" dirty="0"/>
+          </a:p>
+        </p:txBody>
+      </p:sp>
+      <p:sp>
+        <p:nvSpPr>
+          <p:cNvPr id="22" name="Text 20"/>
+          <p:cNvSpPr/>
+          <p:nvPr/>
+        </p:nvSpPr>
+        <p:spPr>
+          <a:xfrm>
+            <a:off x="7635240" y="2697480"/>
+            <a:ext cx="2926080" cy="457200"/>
+          </a:xfrm>
+          <a:prstGeom prst="rect">
+            <a:avLst/>
+          </a:prstGeom>
+          <a:noFill/>
+          <a:ln/>
+        </p:spPr>
+        <p:txBody>
+          <a:bodyPr wrap="square" rtlCol="0" anchor="ctr"/>
           <a:lstStyle/>
           <a:p>
             <a:pPr indent="0" marL="0">
+              <a:lnSpc>
+                <a:spcPct val="130000"/>
+              </a:lnSpc>
               <a:buNone/>
             </a:pPr>
             <a:r>
@@ -2383,136 +2343,11 @@
                 <a:solidFill>
                   <a:srgbClr val="6B6660"/>
                 </a:solidFill>
-                <a:latin typeface="Calibri" pitchFamily="34" charset="0"/>
-                <a:ea typeface="Calibri" pitchFamily="34" charset="-122"/>
-                <a:cs typeface="Calibri" pitchFamily="34" charset="-120"/>
-              </a:rPr>
-              <a:t>Numerator ≥ denominator (1 or more)</a:t>
-            </a:r>
-            <a:endParaRPr lang="en-US" sz="1100" dirty="0"/>
-          </a:p>
-        </p:txBody>
-      </p:sp>
-      <p:sp>
-        <p:nvSpPr>
-          <p:cNvPr id="26" name="Shape 24"/>
-          <p:cNvSpPr/>
-          <p:nvPr/>
-        </p:nvSpPr>
-        <p:spPr>
-          <a:xfrm>
-            <a:off x="4754880" y="2587752"/>
-            <a:ext cx="3657600" cy="658368"/>
-          </a:xfrm>
-          <a:prstGeom prst="rect">
-            <a:avLst/>
-          </a:prstGeom>
-          <a:solidFill>
-            <a:srgbClr val="FFFFFF"/>
-          </a:solidFill>
-          <a:ln/>
-          <a:effectLst>
-            <a:outerShdw sx="100000" sy="100000" kx="0" ky="0" algn="bl" rotWithShape="0" blurRad="50800" dist="25400" dir="8100000">
-              <a:srgbClr val="000000">
-                <a:alpha val="10000"/>
-              </a:srgbClr>
-            </a:outerShdw>
-          </a:effectLst>
-        </p:spPr>
-      </p:sp>
-      <p:sp>
-        <p:nvSpPr>
-          <p:cNvPr id="27" name="Shape 25"/>
-          <p:cNvSpPr/>
-          <p:nvPr/>
-        </p:nvSpPr>
-        <p:spPr>
-          <a:xfrm>
-            <a:off x="4754880" y="2587752"/>
-            <a:ext cx="54864" cy="658368"/>
-          </a:xfrm>
-          <a:prstGeom prst="rect">
-            <a:avLst/>
-          </a:prstGeom>
-          <a:solidFill>
-            <a:srgbClr val="2A9D8F"/>
-          </a:solidFill>
-          <a:ln/>
-        </p:spPr>
-      </p:sp>
-      <p:sp>
-        <p:nvSpPr>
-          <p:cNvPr id="28" name="Text 26"/>
-          <p:cNvSpPr/>
-          <p:nvPr/>
-        </p:nvSpPr>
-        <p:spPr>
-          <a:xfrm>
-            <a:off x="4937760" y="2587752"/>
-            <a:ext cx="1463040" cy="658368"/>
-          </a:xfrm>
-          <a:prstGeom prst="rect">
-            <a:avLst/>
-          </a:prstGeom>
-          <a:noFill/>
-          <a:ln/>
-        </p:spPr>
-        <p:txBody>
-          <a:bodyPr wrap="square" lIns="0" tIns="0" rIns="0" bIns="0" rtlCol="0" anchor="ctr"/>
-          <a:lstStyle/>
-          <a:p>
-            <a:pPr indent="0" marL="0">
-              <a:buNone/>
-            </a:pPr>
-            <a:r>
-              <a:rPr lang="en-US" sz="1300" b="1" dirty="0">
-                <a:solidFill>
-                  <a:srgbClr val="1B2A4A"/>
-                </a:solidFill>
-                <a:latin typeface="Georgia" pitchFamily="34" charset="0"/>
-                <a:ea typeface="Georgia" pitchFamily="34" charset="-122"/>
-                <a:cs typeface="Georgia" pitchFamily="34" charset="-120"/>
-              </a:rPr>
-              <a:t>Mixed number</a:t>
-            </a:r>
-            <a:endParaRPr lang="en-US" sz="1300" dirty="0"/>
-          </a:p>
-        </p:txBody>
-      </p:sp>
-      <p:sp>
-        <p:nvSpPr>
-          <p:cNvPr id="29" name="Text 27"/>
-          <p:cNvSpPr/>
-          <p:nvPr/>
-        </p:nvSpPr>
-        <p:spPr>
-          <a:xfrm>
-            <a:off x="6400800" y="2587752"/>
-            <a:ext cx="1920240" cy="658368"/>
-          </a:xfrm>
-          <a:prstGeom prst="rect">
-            <a:avLst/>
-          </a:prstGeom>
-          <a:noFill/>
-          <a:ln/>
-        </p:spPr>
-        <p:txBody>
-          <a:bodyPr wrap="square" lIns="0" tIns="0" rIns="0" bIns="0" rtlCol="0" anchor="ctr"/>
-          <a:lstStyle/>
-          <a:p>
-            <a:pPr indent="0" marL="0">
-              <a:buNone/>
-            </a:pPr>
-            <a:r>
-              <a:rPr lang="en-US" sz="1100" dirty="0">
-                <a:solidFill>
-                  <a:srgbClr val="6B6660"/>
-                </a:solidFill>
-                <a:latin typeface="Calibri" pitchFamily="34" charset="0"/>
-                <a:ea typeface="Calibri" pitchFamily="34" charset="-122"/>
-                <a:cs typeface="Calibri" pitchFamily="34" charset="-120"/>
-              </a:rPr>
-              <a:t>Whole number + fraction (e.g. 2¾)</a:t>
+                <a:latin typeface="Arial" pitchFamily="34" charset="0"/>
+                <a:ea typeface="Arial" pitchFamily="34" charset="-122"/>
+                <a:cs typeface="Arial" pitchFamily="34" charset="-120"/>
+              </a:rPr>
+              <a:t>A whole number + a fraction. E.g. 1³⁄₄</a:t>
             </a:r>
             <a:endParaRPr lang="en-US" sz="1100" dirty="0"/>
           </a:p>
@@ -2559,47 +2394,7 @@
         <p:spPr>
           <a:xfrm>
             <a:off x="0" y="0"/>
-            <a:ext cx="9144000" cy="822960"/>
-          </a:xfrm>
-          <a:prstGeom prst="rect">
-            <a:avLst/>
-          </a:prstGeom>
-          <a:solidFill>
-            <a:srgbClr val="FFFFFF"/>
-          </a:solidFill>
-          <a:ln/>
-        </p:spPr>
-      </p:sp>
-      <p:sp>
-        <p:nvSpPr>
-          <p:cNvPr id="3" name="Shape 1"/>
-          <p:cNvSpPr/>
-          <p:nvPr/>
-        </p:nvSpPr>
-        <p:spPr>
-          <a:xfrm>
-            <a:off x="0" y="804672"/>
-            <a:ext cx="9144000" cy="27432"/>
-          </a:xfrm>
-          <a:prstGeom prst="rect">
-            <a:avLst/>
-          </a:prstGeom>
-          <a:solidFill>
-            <a:srgbClr val="E5E2DC"/>
-          </a:solidFill>
-          <a:ln/>
-        </p:spPr>
-      </p:sp>
-      <p:sp>
-        <p:nvSpPr>
-          <p:cNvPr id="4" name="Shape 2"/>
-          <p:cNvSpPr/>
-          <p:nvPr/>
-        </p:nvSpPr>
-        <p:spPr>
-          <a:xfrm>
-            <a:off x="548640" y="201168"/>
-            <a:ext cx="54864" cy="420624"/>
+            <a:ext cx="73152" cy="5148072"/>
           </a:xfrm>
           <a:prstGeom prst="rect">
             <a:avLst/>
@@ -2612,30 +2407,30 @@
       </p:sp>
       <p:sp>
         <p:nvSpPr>
-          <p:cNvPr id="5" name="Text 3"/>
-          <p:cNvSpPr/>
-          <p:nvPr/>
-        </p:nvSpPr>
-        <p:spPr>
-          <a:xfrm>
-            <a:off x="777240" y="137160"/>
-            <a:ext cx="7772400" cy="548640"/>
-          </a:xfrm>
-          <a:prstGeom prst="rect">
-            <a:avLst/>
-          </a:prstGeom>
-          <a:noFill/>
-          <a:ln/>
-        </p:spPr>
-        <p:txBody>
-          <a:bodyPr wrap="square" lIns="0" tIns="0" rIns="0" bIns="0" rtlCol="0" anchor="ctr"/>
+          <p:cNvPr id="3" name="Text 1"/>
+          <p:cNvSpPr/>
+          <p:nvPr/>
+        </p:nvSpPr>
+        <p:spPr>
+          <a:xfrm>
+            <a:off x="548640" y="274320"/>
+            <a:ext cx="9144000" cy="640080"/>
+          </a:xfrm>
+          <a:prstGeom prst="rect">
+            <a:avLst/>
+          </a:prstGeom>
+          <a:noFill/>
+          <a:ln/>
+        </p:spPr>
+        <p:txBody>
+          <a:bodyPr wrap="square" rtlCol="0" anchor="ctr"/>
           <a:lstStyle/>
           <a:p>
             <a:pPr indent="0" marL="0">
               <a:buNone/>
             </a:pPr>
             <a:r>
-              <a:rPr lang="en-US" sz="2000" b="1" dirty="0">
+              <a:rPr lang="en-US" sz="2400" b="1" dirty="0">
                 <a:solidFill>
                   <a:srgbClr val="1B2A4A"/>
                 </a:solidFill>
@@ -2643,22 +2438,42 @@
                 <a:ea typeface="Georgia" pitchFamily="34" charset="-122"/>
                 <a:cs typeface="Georgia" pitchFamily="34" charset="-120"/>
               </a:rPr>
-              <a:t>What Is a Fraction?</a:t>
-            </a:r>
-            <a:endParaRPr lang="en-US" sz="2000" dirty="0"/>
-          </a:p>
-        </p:txBody>
-      </p:sp>
-      <p:sp>
-        <p:nvSpPr>
-          <p:cNvPr id="6" name="Text 4"/>
-          <p:cNvSpPr/>
-          <p:nvPr/>
-        </p:nvSpPr>
-        <p:spPr>
-          <a:xfrm>
-            <a:off x="731520" y="1051560"/>
-            <a:ext cx="7680960" cy="3108960"/>
+              <a:t>What Does a Fraction Mean?</a:t>
+            </a:r>
+            <a:endParaRPr lang="en-US" sz="2400" dirty="0"/>
+          </a:p>
+        </p:txBody>
+      </p:sp>
+      <p:sp>
+        <p:nvSpPr>
+          <p:cNvPr id="4" name="Shape 2"/>
+          <p:cNvSpPr/>
+          <p:nvPr/>
+        </p:nvSpPr>
+        <p:spPr>
+          <a:xfrm>
+            <a:off x="548640" y="960120"/>
+            <a:ext cx="2286000" cy="36576"/>
+          </a:xfrm>
+          <a:prstGeom prst="rect">
+            <a:avLst/>
+          </a:prstGeom>
+          <a:solidFill>
+            <a:srgbClr val="2A9D8F"/>
+          </a:solidFill>
+          <a:ln/>
+        </p:spPr>
+      </p:sp>
+      <p:sp>
+        <p:nvSpPr>
+          <p:cNvPr id="5" name="Text 3"/>
+          <p:cNvSpPr/>
+          <p:nvPr/>
+        </p:nvSpPr>
+        <p:spPr>
+          <a:xfrm>
+            <a:off x="548640" y="1188720"/>
+            <a:ext cx="10058400" cy="3474720"/>
           </a:xfrm>
           <a:prstGeom prst="rect">
             <a:avLst/>
@@ -2670,189 +2485,114 @@
           <a:bodyPr wrap="square" rtlCol="0" anchor="t"/>
           <a:lstStyle/>
           <a:p>
-            <a:pPr marL="342900" indent="-342900">
+            <a:pPr>
+              <a:lnSpc>
+                <a:spcPct val="150000"/>
+              </a:lnSpc>
               <a:spcAft>
-                <a:spcPts val="800"/>
+                <a:spcPts val="600"/>
               </a:spcAft>
-              <a:buSzPct val="100000"/>
-              <a:buChar char="•"/>
             </a:pPr>
             <a:r>
               <a:rPr lang="en-US" sz="1500" dirty="0">
                 <a:solidFill>
                   <a:srgbClr val="3D3A36"/>
                 </a:solidFill>
-                <a:latin typeface="Calibri" pitchFamily="34" charset="0"/>
-                <a:ea typeface="Calibri" pitchFamily="34" charset="-122"/>
-                <a:cs typeface="Calibri" pitchFamily="34" charset="-120"/>
-              </a:rPr>
-              <a:t>A fraction represents EQUAL PARTS of a whole.</a:t>
+                <a:latin typeface="Arial" pitchFamily="34" charset="0"/>
+                <a:ea typeface="Arial" pitchFamily="34" charset="-122"/>
+                <a:cs typeface="Arial" pitchFamily="34" charset="-120"/>
+              </a:rPr>
+              <a:t>³⁄₄ means: divide something into 4 EQUAL parts, take 3 of them.</a:t>
             </a:r>
             <a:endParaRPr lang="en-US" sz="1500" dirty="0"/>
           </a:p>
           <a:p>
-            <a:pPr marL="342900" indent="-342900">
+            <a:pPr>
+              <a:lnSpc>
+                <a:spcPct val="150000"/>
+              </a:lnSpc>
               <a:spcAft>
-                <a:spcPts val="800"/>
+                <a:spcPts val="600"/>
               </a:spcAft>
-              <a:buSzPct val="100000"/>
-              <a:buChar char="•"/>
             </a:pPr>
             <a:r>
               <a:rPr lang="en-US" sz="1500" dirty="0">
                 <a:solidFill>
                   <a:srgbClr val="3D3A36"/>
                 </a:solidFill>
-                <a:latin typeface="Calibri" pitchFamily="34" charset="0"/>
-                <a:ea typeface="Calibri" pitchFamily="34" charset="-122"/>
-                <a:cs typeface="Calibri" pitchFamily="34" charset="-120"/>
-              </a:rPr>
-              <a:t>¾ means 3 out of 4 equal parts.</a:t>
+                <a:latin typeface="Arial" pitchFamily="34" charset="0"/>
+                <a:ea typeface="Arial" pitchFamily="34" charset="-122"/>
+                <a:cs typeface="Arial" pitchFamily="34" charset="-120"/>
+              </a:rPr>
+              <a:t>The denominator tells you the SIZE of each piece.</a:t>
             </a:r>
             <a:endParaRPr lang="en-US" sz="1500" dirty="0"/>
           </a:p>
           <a:p>
-            <a:pPr marL="342900" indent="-342900">
+            <a:pPr>
+              <a:lnSpc>
+                <a:spcPct val="150000"/>
+              </a:lnSpc>
               <a:spcAft>
-                <a:spcPts val="800"/>
+                <a:spcPts val="600"/>
               </a:spcAft>
-              <a:buSzPct val="100000"/>
-              <a:buChar char="•"/>
             </a:pPr>
             <a:r>
               <a:rPr lang="en-US" sz="1500" dirty="0">
                 <a:solidFill>
                   <a:srgbClr val="3D3A36"/>
                 </a:solidFill>
-                <a:latin typeface="Calibri" pitchFamily="34" charset="0"/>
-                <a:ea typeface="Calibri" pitchFamily="34" charset="-122"/>
-                <a:cs typeface="Calibri" pitchFamily="34" charset="-120"/>
-              </a:rPr>
-              <a:t>The DENOMINATOR tells you how many equal parts the whole is divided into.</a:t>
+                <a:latin typeface="Arial" pitchFamily="34" charset="0"/>
+                <a:ea typeface="Arial" pitchFamily="34" charset="-122"/>
+                <a:cs typeface="Arial" pitchFamily="34" charset="-120"/>
+              </a:rPr>
+              <a:t>The numerator tells you HOW MANY pieces.</a:t>
             </a:r>
             <a:endParaRPr lang="en-US" sz="1500" dirty="0"/>
           </a:p>
           <a:p>
-            <a:pPr marL="342900" indent="-342900">
+            <a:pPr>
+              <a:lnSpc>
+                <a:spcPct val="150000"/>
+              </a:lnSpc>
               <a:spcAft>
-                <a:spcPts val="800"/>
+                <a:spcPts val="600"/>
               </a:spcAft>
-              <a:buSzPct val="100000"/>
-              <a:buChar char="•"/>
             </a:pPr>
             <a:r>
               <a:rPr lang="en-US" sz="1500" dirty="0">
                 <a:solidFill>
                   <a:srgbClr val="3D3A36"/>
                 </a:solidFill>
-                <a:latin typeface="Calibri" pitchFamily="34" charset="0"/>
-                <a:ea typeface="Calibri" pitchFamily="34" charset="-122"/>
-                <a:cs typeface="Calibri" pitchFamily="34" charset="-120"/>
-              </a:rPr>
-              <a:t>The NUMERATOR tells you how many of those parts you have.</a:t>
+                <a:latin typeface="Arial" pitchFamily="34" charset="0"/>
+                <a:ea typeface="Arial" pitchFamily="34" charset="-122"/>
+                <a:cs typeface="Arial" pitchFamily="34" charset="-120"/>
+              </a:rPr>
+              <a:t>½ of a pizza = cut into 2, take 1 piece.</a:t>
             </a:r>
             <a:endParaRPr lang="en-US" sz="1500" dirty="0"/>
           </a:p>
           <a:p>
-            <a:pPr marL="342900" indent="-342900">
+            <a:pPr>
+              <a:lnSpc>
+                <a:spcPct val="150000"/>
+              </a:lnSpc>
               <a:spcAft>
-                <a:spcPts val="800"/>
+                <a:spcPts val="600"/>
               </a:spcAft>
-              <a:buSzPct val="100000"/>
-              <a:buChar char="•"/>
             </a:pPr>
             <a:r>
               <a:rPr lang="en-US" sz="1500" dirty="0">
                 <a:solidFill>
                   <a:srgbClr val="3D3A36"/>
                 </a:solidFill>
-                <a:latin typeface="Calibri" pitchFamily="34" charset="0"/>
-                <a:ea typeface="Calibri" pitchFamily="34" charset="-122"/>
-                <a:cs typeface="Calibri" pitchFamily="34" charset="-120"/>
-              </a:rPr>
-              <a:t>Fractions can represent parts of shapes, quantities, or amounts.</a:t>
+                <a:latin typeface="Arial" pitchFamily="34" charset="0"/>
+                <a:ea typeface="Arial" pitchFamily="34" charset="-122"/>
+                <a:cs typeface="Arial" pitchFamily="34" charset="-120"/>
+              </a:rPr>
+              <a:t>³⁄₈ of a chocolate bar = cut into 8, take 3 pieces.</a:t>
             </a:r>
             <a:endParaRPr lang="en-US" sz="1500" dirty="0"/>
-          </a:p>
-        </p:txBody>
-      </p:sp>
-      <p:sp>
-        <p:nvSpPr>
-          <p:cNvPr id="7" name="Shape 5"/>
-          <p:cNvSpPr/>
-          <p:nvPr/>
-        </p:nvSpPr>
-        <p:spPr>
-          <a:xfrm>
-            <a:off x="731520" y="4206240"/>
-            <a:ext cx="7680960" cy="640080"/>
-          </a:xfrm>
-          <a:prstGeom prst="rect">
-            <a:avLst/>
-          </a:prstGeom>
-          <a:solidFill>
-            <a:srgbClr val="E8F5F3"/>
-          </a:solidFill>
-          <a:ln/>
-          <a:effectLst>
-            <a:outerShdw sx="100000" sy="100000" kx="0" ky="0" algn="bl" rotWithShape="0" blurRad="50800" dist="25400" dir="8100000">
-              <a:srgbClr val="000000">
-                <a:alpha val="10000"/>
-              </a:srgbClr>
-            </a:outerShdw>
-          </a:effectLst>
-        </p:spPr>
-      </p:sp>
-      <p:sp>
-        <p:nvSpPr>
-          <p:cNvPr id="8" name="Text 6"/>
-          <p:cNvSpPr/>
-          <p:nvPr/>
-        </p:nvSpPr>
-        <p:spPr>
-          <a:xfrm>
-            <a:off x="914400" y="4251960"/>
-            <a:ext cx="7315200" cy="548640"/>
-          </a:xfrm>
-          <a:prstGeom prst="rect">
-            <a:avLst/>
-          </a:prstGeom>
-          <a:noFill/>
-          <a:ln/>
-        </p:spPr>
-        <p:txBody>
-          <a:bodyPr wrap="square" rtlCol="0" anchor="ctr"/>
-          <a:lstStyle/>
-          <a:p>
-            <a:pPr indent="0" marL="0">
-              <a:buNone/>
-            </a:pPr>
-            <a:r>
-              <a:rPr lang="en-US" sz="1200" b="1" dirty="0">
-                <a:solidFill>
-                  <a:srgbClr val="2A9D8F"/>
-                </a:solidFill>
-                <a:latin typeface="Calibri" pitchFamily="34" charset="0"/>
-                <a:ea typeface="Calibri" pitchFamily="34" charset="-122"/>
-                <a:cs typeface="Calibri" pitchFamily="34" charset="-120"/>
-              </a:rPr>
-              <a:t>Key Idea: </a:t>
-            </a:r>
-            <a:pPr indent="0" marL="0">
-              <a:buNone/>
-            </a:pPr>
-            <a:r>
-              <a:rPr lang="en-US" sz="1200" i="1" dirty="0">
-                <a:solidFill>
-                  <a:srgbClr val="3D3A36"/>
-                </a:solidFill>
-                <a:latin typeface="Calibri" pitchFamily="34" charset="0"/>
-                <a:ea typeface="Calibri" pitchFamily="34" charset="-122"/>
-                <a:cs typeface="Calibri" pitchFamily="34" charset="-120"/>
-              </a:rPr>
-              <a:t>The fraction bar means DIVIDE: ¾ = 3 ÷ 4 = 0.75.</a:t>
-            </a:r>
-            <a:endParaRPr lang="en-US" sz="1200" dirty="0"/>
           </a:p>
         </p:txBody>
       </p:sp>
@@ -2897,47 +2637,7 @@
         <p:spPr>
           <a:xfrm>
             <a:off x="0" y="0"/>
-            <a:ext cx="9144000" cy="822960"/>
-          </a:xfrm>
-          <a:prstGeom prst="rect">
-            <a:avLst/>
-          </a:prstGeom>
-          <a:solidFill>
-            <a:srgbClr val="FFFFFF"/>
-          </a:solidFill>
-          <a:ln/>
-        </p:spPr>
-      </p:sp>
-      <p:sp>
-        <p:nvSpPr>
-          <p:cNvPr id="3" name="Shape 1"/>
-          <p:cNvSpPr/>
-          <p:nvPr/>
-        </p:nvSpPr>
-        <p:spPr>
-          <a:xfrm>
-            <a:off x="0" y="804672"/>
-            <a:ext cx="9144000" cy="27432"/>
-          </a:xfrm>
-          <a:prstGeom prst="rect">
-            <a:avLst/>
-          </a:prstGeom>
-          <a:solidFill>
-            <a:srgbClr val="E5E2DC"/>
-          </a:solidFill>
-          <a:ln/>
-        </p:spPr>
-      </p:sp>
-      <p:sp>
-        <p:nvSpPr>
-          <p:cNvPr id="4" name="Shape 2"/>
-          <p:cNvSpPr/>
-          <p:nvPr/>
-        </p:nvSpPr>
-        <p:spPr>
-          <a:xfrm>
-            <a:off x="548640" y="201168"/>
-            <a:ext cx="54864" cy="420624"/>
+            <a:ext cx="73152" cy="5148072"/>
           </a:xfrm>
           <a:prstGeom prst="rect">
             <a:avLst/>
@@ -2950,23 +2650,84 @@
       </p:sp>
       <p:sp>
         <p:nvSpPr>
+          <p:cNvPr id="3" name="Shape 1"/>
+          <p:cNvSpPr/>
+          <p:nvPr/>
+        </p:nvSpPr>
+        <p:spPr>
+          <a:xfrm>
+            <a:off x="548640" y="274320"/>
+            <a:ext cx="2011680" cy="320040"/>
+          </a:xfrm>
+          <a:prstGeom prst="roundRect">
+            <a:avLst>
+              <a:gd name="adj" fmla="val 17143"/>
+            </a:avLst>
+          </a:prstGeom>
+          <a:solidFill>
+            <a:srgbClr val="2A9D8F"/>
+          </a:solidFill>
+          <a:ln/>
+        </p:spPr>
+      </p:sp>
+      <p:sp>
+        <p:nvSpPr>
+          <p:cNvPr id="4" name="Text 2"/>
+          <p:cNvSpPr/>
+          <p:nvPr/>
+        </p:nvSpPr>
+        <p:spPr>
+          <a:xfrm>
+            <a:off x="548640" y="274320"/>
+            <a:ext cx="2011680" cy="320040"/>
+          </a:xfrm>
+          <a:prstGeom prst="rect">
+            <a:avLst/>
+          </a:prstGeom>
+          <a:noFill/>
+          <a:ln/>
+        </p:spPr>
+        <p:txBody>
+          <a:bodyPr wrap="square" rtlCol="0" anchor="ctr"/>
+          <a:lstStyle/>
+          <a:p>
+            <a:pPr algn="ctr" indent="0" marL="0">
+              <a:buNone/>
+            </a:pPr>
+            <a:r>
+              <a:rPr lang="en-US" sz="1000" b="1" dirty="0">
+                <a:solidFill>
+                  <a:srgbClr val="FFFFFF"/>
+                </a:solidFill>
+                <a:latin typeface="Arial" pitchFamily="34" charset="0"/>
+                <a:ea typeface="Arial" pitchFamily="34" charset="-122"/>
+                <a:cs typeface="Arial" pitchFamily="34" charset="-120"/>
+              </a:rPr>
+              <a:t>WORKED EXAMPLE</a:t>
+            </a:r>
+            <a:endParaRPr lang="en-US" sz="1000" dirty="0"/>
+          </a:p>
+        </p:txBody>
+      </p:sp>
+      <p:sp>
+        <p:nvSpPr>
           <p:cNvPr id="5" name="Text 3"/>
           <p:cNvSpPr/>
           <p:nvPr/>
         </p:nvSpPr>
         <p:spPr>
           <a:xfrm>
-            <a:off x="777240" y="137160"/>
-            <a:ext cx="7772400" cy="548640"/>
-          </a:xfrm>
-          <a:prstGeom prst="rect">
-            <a:avLst/>
-          </a:prstGeom>
-          <a:noFill/>
-          <a:ln/>
-        </p:spPr>
-        <p:txBody>
-          <a:bodyPr wrap="square" lIns="0" tIns="0" rIns="0" bIns="0" rtlCol="0" anchor="ctr"/>
+            <a:off x="2743200" y="274320"/>
+            <a:ext cx="7315200" cy="457200"/>
+          </a:xfrm>
+          <a:prstGeom prst="rect">
+            <a:avLst/>
+          </a:prstGeom>
+          <a:noFill/>
+          <a:ln/>
+        </p:spPr>
+        <p:txBody>
+          <a:bodyPr wrap="square" rtlCol="0" anchor="ctr"/>
           <a:lstStyle/>
           <a:p>
             <a:pPr indent="0" marL="0">
@@ -2981,7 +2742,7 @@
                 <a:ea typeface="Georgia" pitchFamily="34" charset="-122"/>
                 <a:cs typeface="Georgia" pitchFamily="34" charset="-120"/>
               </a:rPr>
-              <a:t>Types of Fractions</a:t>
+              <a:t>Convert Mixed ↔ Improper</a:t>
             </a:r>
             <a:endParaRPr lang="en-US" sz="2000" dirty="0"/>
           </a:p>
@@ -2996,36 +2757,401 @@
         <p:spPr>
           <a:xfrm>
             <a:off x="548640" y="1051560"/>
-            <a:ext cx="3840480" cy="3474720"/>
-          </a:xfrm>
-          <a:prstGeom prst="rect">
+            <a:ext cx="365760" cy="365760"/>
+          </a:xfrm>
+          <a:prstGeom prst="ellipse">
             <a:avLst/>
           </a:prstGeom>
           <a:solidFill>
-            <a:srgbClr val="FFFFFF"/>
+            <a:srgbClr val="111D35"/>
           </a:solidFill>
           <a:ln/>
-          <a:effectLst>
-            <a:outerShdw sx="100000" sy="100000" kx="0" ky="0" algn="bl" rotWithShape="0" blurRad="50800" dist="25400" dir="8100000">
-              <a:srgbClr val="000000">
-                <a:alpha val="10000"/>
-              </a:srgbClr>
-            </a:outerShdw>
-          </a:effectLst>
-        </p:spPr>
-      </p:sp>
-      <p:sp>
-        <p:nvSpPr>
-          <p:cNvPr id="7" name="Shape 5"/>
+        </p:spPr>
+      </p:sp>
+      <p:sp>
+        <p:nvSpPr>
+          <p:cNvPr id="7" name="Text 5"/>
           <p:cNvSpPr/>
           <p:nvPr/>
         </p:nvSpPr>
         <p:spPr>
           <a:xfrm>
             <a:off x="548640" y="1051560"/>
-            <a:ext cx="3840480" cy="54864"/>
-          </a:xfrm>
-          <a:prstGeom prst="rect">
+            <a:ext cx="365760" cy="365760"/>
+          </a:xfrm>
+          <a:prstGeom prst="rect">
+            <a:avLst/>
+          </a:prstGeom>
+          <a:noFill/>
+          <a:ln/>
+        </p:spPr>
+        <p:txBody>
+          <a:bodyPr wrap="square" rtlCol="0" anchor="ctr"/>
+          <a:lstStyle/>
+          <a:p>
+            <a:pPr algn="ctr" indent="0" marL="0">
+              <a:buNone/>
+            </a:pPr>
+            <a:r>
+              <a:rPr lang="en-US" sz="1300" b="1" dirty="0">
+                <a:solidFill>
+                  <a:srgbClr val="FFFFFF"/>
+                </a:solidFill>
+                <a:latin typeface="Arial" pitchFamily="34" charset="0"/>
+                <a:ea typeface="Arial" pitchFamily="34" charset="-122"/>
+                <a:cs typeface="Arial" pitchFamily="34" charset="-120"/>
+              </a:rPr>
+              <a:t>1</a:t>
+            </a:r>
+            <a:endParaRPr lang="en-US" sz="1300" dirty="0"/>
+          </a:p>
+        </p:txBody>
+      </p:sp>
+      <p:sp>
+        <p:nvSpPr>
+          <p:cNvPr id="8" name="Text 6"/>
+          <p:cNvSpPr/>
+          <p:nvPr/>
+        </p:nvSpPr>
+        <p:spPr>
+          <a:xfrm>
+            <a:off x="1097280" y="1005840"/>
+            <a:ext cx="9601200" cy="502920"/>
+          </a:xfrm>
+          <a:prstGeom prst="rect">
+            <a:avLst/>
+          </a:prstGeom>
+          <a:noFill/>
+          <a:ln/>
+        </p:spPr>
+        <p:txBody>
+          <a:bodyPr wrap="square" rtlCol="0" anchor="ctr"/>
+          <a:lstStyle/>
+          <a:p>
+            <a:pPr indent="0" marL="0">
+              <a:buNone/>
+            </a:pPr>
+            <a:r>
+              <a:rPr lang="en-US" sz="1500" dirty="0">
+                <a:solidFill>
+                  <a:srgbClr val="3D3A36"/>
+                </a:solidFill>
+                <a:latin typeface="Arial" pitchFamily="34" charset="0"/>
+                <a:ea typeface="Arial" pitchFamily="34" charset="-122"/>
+                <a:cs typeface="Arial" pitchFamily="34" charset="-120"/>
+              </a:rPr>
+              <a:t>Mixed → Improper: 2³⁄₅</a:t>
+            </a:r>
+            <a:endParaRPr lang="en-US" sz="1500" dirty="0"/>
+          </a:p>
+        </p:txBody>
+      </p:sp>
+      <p:sp>
+        <p:nvSpPr>
+          <p:cNvPr id="9" name="Shape 7"/>
+          <p:cNvSpPr/>
+          <p:nvPr/>
+        </p:nvSpPr>
+        <p:spPr>
+          <a:xfrm>
+            <a:off x="548640" y="1783080"/>
+            <a:ext cx="365760" cy="365760"/>
+          </a:xfrm>
+          <a:prstGeom prst="ellipse">
+            <a:avLst/>
+          </a:prstGeom>
+          <a:solidFill>
+            <a:srgbClr val="111D35"/>
+          </a:solidFill>
+          <a:ln/>
+        </p:spPr>
+      </p:sp>
+      <p:sp>
+        <p:nvSpPr>
+          <p:cNvPr id="10" name="Text 8"/>
+          <p:cNvSpPr/>
+          <p:nvPr/>
+        </p:nvSpPr>
+        <p:spPr>
+          <a:xfrm>
+            <a:off x="548640" y="1783080"/>
+            <a:ext cx="365760" cy="365760"/>
+          </a:xfrm>
+          <a:prstGeom prst="rect">
+            <a:avLst/>
+          </a:prstGeom>
+          <a:noFill/>
+          <a:ln/>
+        </p:spPr>
+        <p:txBody>
+          <a:bodyPr wrap="square" rtlCol="0" anchor="ctr"/>
+          <a:lstStyle/>
+          <a:p>
+            <a:pPr algn="ctr" indent="0" marL="0">
+              <a:buNone/>
+            </a:pPr>
+            <a:r>
+              <a:rPr lang="en-US" sz="1300" b="1" dirty="0">
+                <a:solidFill>
+                  <a:srgbClr val="FFFFFF"/>
+                </a:solidFill>
+                <a:latin typeface="Arial" pitchFamily="34" charset="0"/>
+                <a:ea typeface="Arial" pitchFamily="34" charset="-122"/>
+                <a:cs typeface="Arial" pitchFamily="34" charset="-120"/>
+              </a:rPr>
+              <a:t>2</a:t>
+            </a:r>
+            <a:endParaRPr lang="en-US" sz="1300" dirty="0"/>
+          </a:p>
+        </p:txBody>
+      </p:sp>
+      <p:sp>
+        <p:nvSpPr>
+          <p:cNvPr id="11" name="Text 9"/>
+          <p:cNvSpPr/>
+          <p:nvPr/>
+        </p:nvSpPr>
+        <p:spPr>
+          <a:xfrm>
+            <a:off x="1097280" y="1737360"/>
+            <a:ext cx="9601200" cy="502920"/>
+          </a:xfrm>
+          <a:prstGeom prst="rect">
+            <a:avLst/>
+          </a:prstGeom>
+          <a:noFill/>
+          <a:ln/>
+        </p:spPr>
+        <p:txBody>
+          <a:bodyPr wrap="square" rtlCol="0" anchor="ctr"/>
+          <a:lstStyle/>
+          <a:p>
+            <a:pPr indent="0" marL="0">
+              <a:buNone/>
+            </a:pPr>
+            <a:r>
+              <a:rPr lang="en-US" sz="1500" dirty="0">
+                <a:solidFill>
+                  <a:srgbClr val="3D3A36"/>
+                </a:solidFill>
+                <a:latin typeface="Arial" pitchFamily="34" charset="0"/>
+                <a:ea typeface="Arial" pitchFamily="34" charset="-122"/>
+                <a:cs typeface="Arial" pitchFamily="34" charset="-120"/>
+              </a:rPr>
+              <a:t>Multiply whole × denominator: 2 × 5 = 10</a:t>
+            </a:r>
+            <a:endParaRPr lang="en-US" sz="1500" dirty="0"/>
+          </a:p>
+        </p:txBody>
+      </p:sp>
+      <p:sp>
+        <p:nvSpPr>
+          <p:cNvPr id="12" name="Shape 10"/>
+          <p:cNvSpPr/>
+          <p:nvPr/>
+        </p:nvSpPr>
+        <p:spPr>
+          <a:xfrm>
+            <a:off x="548640" y="2514600"/>
+            <a:ext cx="365760" cy="365760"/>
+          </a:xfrm>
+          <a:prstGeom prst="ellipse">
+            <a:avLst/>
+          </a:prstGeom>
+          <a:solidFill>
+            <a:srgbClr val="111D35"/>
+          </a:solidFill>
+          <a:ln/>
+        </p:spPr>
+      </p:sp>
+      <p:sp>
+        <p:nvSpPr>
+          <p:cNvPr id="13" name="Text 11"/>
+          <p:cNvSpPr/>
+          <p:nvPr/>
+        </p:nvSpPr>
+        <p:spPr>
+          <a:xfrm>
+            <a:off x="548640" y="2514600"/>
+            <a:ext cx="365760" cy="365760"/>
+          </a:xfrm>
+          <a:prstGeom prst="rect">
+            <a:avLst/>
+          </a:prstGeom>
+          <a:noFill/>
+          <a:ln/>
+        </p:spPr>
+        <p:txBody>
+          <a:bodyPr wrap="square" rtlCol="0" anchor="ctr"/>
+          <a:lstStyle/>
+          <a:p>
+            <a:pPr algn="ctr" indent="0" marL="0">
+              <a:buNone/>
+            </a:pPr>
+            <a:r>
+              <a:rPr lang="en-US" sz="1300" b="1" dirty="0">
+                <a:solidFill>
+                  <a:srgbClr val="FFFFFF"/>
+                </a:solidFill>
+                <a:latin typeface="Arial" pitchFamily="34" charset="0"/>
+                <a:ea typeface="Arial" pitchFamily="34" charset="-122"/>
+                <a:cs typeface="Arial" pitchFamily="34" charset="-120"/>
+              </a:rPr>
+              <a:t>3</a:t>
+            </a:r>
+            <a:endParaRPr lang="en-US" sz="1300" dirty="0"/>
+          </a:p>
+        </p:txBody>
+      </p:sp>
+      <p:sp>
+        <p:nvSpPr>
+          <p:cNvPr id="14" name="Text 12"/>
+          <p:cNvSpPr/>
+          <p:nvPr/>
+        </p:nvSpPr>
+        <p:spPr>
+          <a:xfrm>
+            <a:off x="1097280" y="2468880"/>
+            <a:ext cx="9601200" cy="502920"/>
+          </a:xfrm>
+          <a:prstGeom prst="rect">
+            <a:avLst/>
+          </a:prstGeom>
+          <a:noFill/>
+          <a:ln/>
+        </p:spPr>
+        <p:txBody>
+          <a:bodyPr wrap="square" rtlCol="0" anchor="ctr"/>
+          <a:lstStyle/>
+          <a:p>
+            <a:pPr indent="0" marL="0">
+              <a:buNone/>
+            </a:pPr>
+            <a:r>
+              <a:rPr lang="en-US" sz="1500" dirty="0">
+                <a:solidFill>
+                  <a:srgbClr val="3D3A36"/>
+                </a:solidFill>
+                <a:latin typeface="Arial" pitchFamily="34" charset="0"/>
+                <a:ea typeface="Arial" pitchFamily="34" charset="-122"/>
+                <a:cs typeface="Arial" pitchFamily="34" charset="-120"/>
+              </a:rPr>
+              <a:t>Add numerator: 10 + 3 = 13</a:t>
+            </a:r>
+            <a:endParaRPr lang="en-US" sz="1500" dirty="0"/>
+          </a:p>
+        </p:txBody>
+      </p:sp>
+      <p:sp>
+        <p:nvSpPr>
+          <p:cNvPr id="15" name="Shape 13"/>
+          <p:cNvSpPr/>
+          <p:nvPr/>
+        </p:nvSpPr>
+        <p:spPr>
+          <a:xfrm>
+            <a:off x="548640" y="3246120"/>
+            <a:ext cx="365760" cy="365760"/>
+          </a:xfrm>
+          <a:prstGeom prst="ellipse">
+            <a:avLst/>
+          </a:prstGeom>
+          <a:solidFill>
+            <a:srgbClr val="111D35"/>
+          </a:solidFill>
+          <a:ln/>
+        </p:spPr>
+      </p:sp>
+      <p:sp>
+        <p:nvSpPr>
+          <p:cNvPr id="16" name="Text 14"/>
+          <p:cNvSpPr/>
+          <p:nvPr/>
+        </p:nvSpPr>
+        <p:spPr>
+          <a:xfrm>
+            <a:off x="548640" y="3246120"/>
+            <a:ext cx="365760" cy="365760"/>
+          </a:xfrm>
+          <a:prstGeom prst="rect">
+            <a:avLst/>
+          </a:prstGeom>
+          <a:noFill/>
+          <a:ln/>
+        </p:spPr>
+        <p:txBody>
+          <a:bodyPr wrap="square" rtlCol="0" anchor="ctr"/>
+          <a:lstStyle/>
+          <a:p>
+            <a:pPr algn="ctr" indent="0" marL="0">
+              <a:buNone/>
+            </a:pPr>
+            <a:r>
+              <a:rPr lang="en-US" sz="1300" b="1" dirty="0">
+                <a:solidFill>
+                  <a:srgbClr val="FFFFFF"/>
+                </a:solidFill>
+                <a:latin typeface="Arial" pitchFamily="34" charset="0"/>
+                <a:ea typeface="Arial" pitchFamily="34" charset="-122"/>
+                <a:cs typeface="Arial" pitchFamily="34" charset="-120"/>
+              </a:rPr>
+              <a:t>4</a:t>
+            </a:r>
+            <a:endParaRPr lang="en-US" sz="1300" dirty="0"/>
+          </a:p>
+        </p:txBody>
+      </p:sp>
+      <p:sp>
+        <p:nvSpPr>
+          <p:cNvPr id="17" name="Text 15"/>
+          <p:cNvSpPr/>
+          <p:nvPr/>
+        </p:nvSpPr>
+        <p:spPr>
+          <a:xfrm>
+            <a:off x="1097280" y="3200400"/>
+            <a:ext cx="9601200" cy="502920"/>
+          </a:xfrm>
+          <a:prstGeom prst="rect">
+            <a:avLst/>
+          </a:prstGeom>
+          <a:noFill/>
+          <a:ln/>
+        </p:spPr>
+        <p:txBody>
+          <a:bodyPr wrap="square" rtlCol="0" anchor="ctr"/>
+          <a:lstStyle/>
+          <a:p>
+            <a:pPr indent="0" marL="0">
+              <a:buNone/>
+            </a:pPr>
+            <a:r>
+              <a:rPr lang="en-US" sz="1500" dirty="0">
+                <a:solidFill>
+                  <a:srgbClr val="3D3A36"/>
+                </a:solidFill>
+                <a:latin typeface="Arial" pitchFamily="34" charset="0"/>
+                <a:ea typeface="Arial" pitchFamily="34" charset="-122"/>
+                <a:cs typeface="Arial" pitchFamily="34" charset="-120"/>
+              </a:rPr>
+              <a:t>Keep denominator: ¹³⁄₅</a:t>
+            </a:r>
+            <a:endParaRPr lang="en-US" sz="1500" dirty="0"/>
+          </a:p>
+        </p:txBody>
+      </p:sp>
+      <p:sp>
+        <p:nvSpPr>
+          <p:cNvPr id="18" name="Shape 16"/>
+          <p:cNvSpPr/>
+          <p:nvPr/>
+        </p:nvSpPr>
+        <p:spPr>
+          <a:xfrm>
+            <a:off x="548640" y="3977640"/>
+            <a:ext cx="365760" cy="365760"/>
+          </a:xfrm>
+          <a:prstGeom prst="ellipse">
             <a:avLst/>
           </a:prstGeom>
           <a:solidFill>
@@ -3036,23 +3162,62 @@
       </p:sp>
       <p:sp>
         <p:nvSpPr>
-          <p:cNvPr id="8" name="Text 6"/>
-          <p:cNvSpPr/>
-          <p:nvPr/>
-        </p:nvSpPr>
-        <p:spPr>
-          <a:xfrm>
-            <a:off x="777240" y="1188720"/>
-            <a:ext cx="3383280" cy="457200"/>
-          </a:xfrm>
-          <a:prstGeom prst="rect">
-            <a:avLst/>
-          </a:prstGeom>
-          <a:noFill/>
-          <a:ln/>
-        </p:spPr>
-        <p:txBody>
-          <a:bodyPr wrap="square" lIns="0" tIns="0" rIns="0" bIns="0" rtlCol="0" anchor="ctr"/>
+          <p:cNvPr id="19" name="Text 17"/>
+          <p:cNvSpPr/>
+          <p:nvPr/>
+        </p:nvSpPr>
+        <p:spPr>
+          <a:xfrm>
+            <a:off x="548640" y="3977640"/>
+            <a:ext cx="365760" cy="365760"/>
+          </a:xfrm>
+          <a:prstGeom prst="rect">
+            <a:avLst/>
+          </a:prstGeom>
+          <a:noFill/>
+          <a:ln/>
+        </p:spPr>
+        <p:txBody>
+          <a:bodyPr wrap="square" rtlCol="0" anchor="ctr"/>
+          <a:lstStyle/>
+          <a:p>
+            <a:pPr algn="ctr" indent="0" marL="0">
+              <a:buNone/>
+            </a:pPr>
+            <a:r>
+              <a:rPr lang="en-US" sz="1300" b="1" dirty="0">
+                <a:solidFill>
+                  <a:srgbClr val="FFFFFF"/>
+                </a:solidFill>
+                <a:latin typeface="Arial" pitchFamily="34" charset="0"/>
+                <a:ea typeface="Arial" pitchFamily="34" charset="-122"/>
+                <a:cs typeface="Arial" pitchFamily="34" charset="-120"/>
+              </a:rPr>
+              <a:t>5</a:t>
+            </a:r>
+            <a:endParaRPr lang="en-US" sz="1300" dirty="0"/>
+          </a:p>
+        </p:txBody>
+      </p:sp>
+      <p:sp>
+        <p:nvSpPr>
+          <p:cNvPr id="20" name="Text 18"/>
+          <p:cNvSpPr/>
+          <p:nvPr/>
+        </p:nvSpPr>
+        <p:spPr>
+          <a:xfrm>
+            <a:off x="1097280" y="3931920"/>
+            <a:ext cx="9601200" cy="502920"/>
+          </a:xfrm>
+          <a:prstGeom prst="rect">
+            <a:avLst/>
+          </a:prstGeom>
+          <a:noFill/>
+          <a:ln/>
+        </p:spPr>
+        <p:txBody>
+          <a:bodyPr wrap="square" rtlCol="0" anchor="ctr"/>
           <a:lstStyle/>
           <a:p>
             <a:pPr indent="0" marL="0">
@@ -3061,313 +3226,15 @@
             <a:r>
               <a:rPr lang="en-US" sz="1500" b="1" dirty="0">
                 <a:solidFill>
-                  <a:srgbClr val="1B2A4A"/>
-                </a:solidFill>
-                <a:latin typeface="Georgia" pitchFamily="34" charset="0"/>
-                <a:ea typeface="Georgia" pitchFamily="34" charset="-122"/>
-                <a:cs typeface="Georgia" pitchFamily="34" charset="-120"/>
-              </a:rPr>
-              <a:t>Proper Fractions</a:t>
+                  <a:srgbClr val="2A9D8F"/>
+                </a:solidFill>
+                <a:latin typeface="Arial" pitchFamily="34" charset="0"/>
+                <a:ea typeface="Arial" pitchFamily="34" charset="-122"/>
+                <a:cs typeface="Arial" pitchFamily="34" charset="-120"/>
+              </a:rPr>
+              <a:t>Improper → Mixed: ¹³⁄₅ → 13 ÷ 5 = 2 remainder 3 → 2³⁄₅</a:t>
             </a:r>
             <a:endParaRPr lang="en-US" sz="1500" dirty="0"/>
-          </a:p>
-        </p:txBody>
-      </p:sp>
-      <p:sp>
-        <p:nvSpPr>
-          <p:cNvPr id="9" name="Text 7"/>
-          <p:cNvSpPr/>
-          <p:nvPr/>
-        </p:nvSpPr>
-        <p:spPr>
-          <a:xfrm>
-            <a:off x="777240" y="1691640"/>
-            <a:ext cx="3383280" cy="2651760"/>
-          </a:xfrm>
-          <a:prstGeom prst="rect">
-            <a:avLst/>
-          </a:prstGeom>
-          <a:noFill/>
-          <a:ln/>
-        </p:spPr>
-        <p:txBody>
-          <a:bodyPr wrap="square" rtlCol="0" anchor="t"/>
-          <a:lstStyle/>
-          <a:p>
-            <a:pPr marL="342900" indent="-342900">
-              <a:spcAft>
-                <a:spcPts val="600"/>
-              </a:spcAft>
-              <a:buSzPct val="100000"/>
-              <a:buChar char="•"/>
-            </a:pPr>
-            <a:r>
-              <a:rPr lang="en-US" sz="1300" dirty="0">
-                <a:solidFill>
-                  <a:srgbClr val="3D3A36"/>
-                </a:solidFill>
-                <a:latin typeface="Calibri" pitchFamily="34" charset="0"/>
-                <a:ea typeface="Calibri" pitchFamily="34" charset="-122"/>
-                <a:cs typeface="Calibri" pitchFamily="34" charset="-120"/>
-              </a:rPr>
-              <a:t>Numerator is SMALLER than denominator</a:t>
-            </a:r>
-            <a:endParaRPr lang="en-US" sz="1300" dirty="0"/>
-          </a:p>
-          <a:p>
-            <a:pPr marL="342900" indent="-342900">
-              <a:spcAft>
-                <a:spcPts val="600"/>
-              </a:spcAft>
-              <a:buSzPct val="100000"/>
-              <a:buChar char="•"/>
-            </a:pPr>
-            <a:r>
-              <a:rPr lang="en-US" sz="1300" dirty="0">
-                <a:solidFill>
-                  <a:srgbClr val="3D3A36"/>
-                </a:solidFill>
-                <a:latin typeface="Calibri" pitchFamily="34" charset="0"/>
-                <a:ea typeface="Calibri" pitchFamily="34" charset="-122"/>
-                <a:cs typeface="Calibri" pitchFamily="34" charset="-120"/>
-              </a:rPr>
-              <a:t>Value is LESS than 1</a:t>
-            </a:r>
-            <a:endParaRPr lang="en-US" sz="1300" dirty="0"/>
-          </a:p>
-          <a:p>
-            <a:pPr marL="342900" indent="-342900">
-              <a:spcAft>
-                <a:spcPts val="600"/>
-              </a:spcAft>
-              <a:buSzPct val="100000"/>
-              <a:buChar char="•"/>
-            </a:pPr>
-            <a:r>
-              <a:rPr lang="en-US" sz="1300" dirty="0">
-                <a:solidFill>
-                  <a:srgbClr val="3D3A36"/>
-                </a:solidFill>
-                <a:latin typeface="Calibri" pitchFamily="34" charset="0"/>
-                <a:ea typeface="Calibri" pitchFamily="34" charset="-122"/>
-                <a:cs typeface="Calibri" pitchFamily="34" charset="-120"/>
-              </a:rPr>
-              <a:t>Examples: ½, ¾, ⅖</a:t>
-            </a:r>
-            <a:endParaRPr lang="en-US" sz="1300" dirty="0"/>
-          </a:p>
-          <a:p>
-            <a:pPr marL="342900" indent="-342900">
-              <a:spcAft>
-                <a:spcPts val="600"/>
-              </a:spcAft>
-              <a:buSzPct val="100000"/>
-              <a:buChar char="•"/>
-            </a:pPr>
-            <a:r>
-              <a:rPr lang="en-US" sz="1300" dirty="0">
-                <a:solidFill>
-                  <a:srgbClr val="3D3A36"/>
-                </a:solidFill>
-                <a:latin typeface="Calibri" pitchFamily="34" charset="0"/>
-                <a:ea typeface="Calibri" pitchFamily="34" charset="-122"/>
-                <a:cs typeface="Calibri" pitchFamily="34" charset="-120"/>
-              </a:rPr>
-              <a:t>These are the most common type</a:t>
-            </a:r>
-            <a:endParaRPr lang="en-US" sz="1300" dirty="0"/>
-          </a:p>
-        </p:txBody>
-      </p:sp>
-      <p:sp>
-        <p:nvSpPr>
-          <p:cNvPr id="10" name="Shape 8"/>
-          <p:cNvSpPr/>
-          <p:nvPr/>
-        </p:nvSpPr>
-        <p:spPr>
-          <a:xfrm>
-            <a:off x="4754880" y="1051560"/>
-            <a:ext cx="3840480" cy="3474720"/>
-          </a:xfrm>
-          <a:prstGeom prst="rect">
-            <a:avLst/>
-          </a:prstGeom>
-          <a:solidFill>
-            <a:srgbClr val="FFFFFF"/>
-          </a:solidFill>
-          <a:ln/>
-          <a:effectLst>
-            <a:outerShdw sx="100000" sy="100000" kx="0" ky="0" algn="bl" rotWithShape="0" blurRad="50800" dist="25400" dir="8100000">
-              <a:srgbClr val="000000">
-                <a:alpha val="10000"/>
-              </a:srgbClr>
-            </a:outerShdw>
-          </a:effectLst>
-        </p:spPr>
-      </p:sp>
-      <p:sp>
-        <p:nvSpPr>
-          <p:cNvPr id="11" name="Shape 9"/>
-          <p:cNvSpPr/>
-          <p:nvPr/>
-        </p:nvSpPr>
-        <p:spPr>
-          <a:xfrm>
-            <a:off x="4754880" y="1051560"/>
-            <a:ext cx="3840480" cy="54864"/>
-          </a:xfrm>
-          <a:prstGeom prst="rect">
-            <a:avLst/>
-          </a:prstGeom>
-          <a:solidFill>
-            <a:srgbClr val="E9C46A"/>
-          </a:solidFill>
-          <a:ln/>
-        </p:spPr>
-      </p:sp>
-      <p:sp>
-        <p:nvSpPr>
-          <p:cNvPr id="12" name="Text 10"/>
-          <p:cNvSpPr/>
-          <p:nvPr/>
-        </p:nvSpPr>
-        <p:spPr>
-          <a:xfrm>
-            <a:off x="4983480" y="1188720"/>
-            <a:ext cx="3383280" cy="457200"/>
-          </a:xfrm>
-          <a:prstGeom prst="rect">
-            <a:avLst/>
-          </a:prstGeom>
-          <a:noFill/>
-          <a:ln/>
-        </p:spPr>
-        <p:txBody>
-          <a:bodyPr wrap="square" lIns="0" tIns="0" rIns="0" bIns="0" rtlCol="0" anchor="ctr"/>
-          <a:lstStyle/>
-          <a:p>
-            <a:pPr indent="0" marL="0">
-              <a:buNone/>
-            </a:pPr>
-            <a:r>
-              <a:rPr lang="en-US" sz="1500" b="1" dirty="0">
-                <a:solidFill>
-                  <a:srgbClr val="1B2A4A"/>
-                </a:solidFill>
-                <a:latin typeface="Georgia" pitchFamily="34" charset="0"/>
-                <a:ea typeface="Georgia" pitchFamily="34" charset="-122"/>
-                <a:cs typeface="Georgia" pitchFamily="34" charset="-120"/>
-              </a:rPr>
-              <a:t>Improper &amp; Mixed</a:t>
-            </a:r>
-            <a:endParaRPr lang="en-US" sz="1500" dirty="0"/>
-          </a:p>
-        </p:txBody>
-      </p:sp>
-      <p:sp>
-        <p:nvSpPr>
-          <p:cNvPr id="13" name="Text 11"/>
-          <p:cNvSpPr/>
-          <p:nvPr/>
-        </p:nvSpPr>
-        <p:spPr>
-          <a:xfrm>
-            <a:off x="4983480" y="1691640"/>
-            <a:ext cx="3383280" cy="2651760"/>
-          </a:xfrm>
-          <a:prstGeom prst="rect">
-            <a:avLst/>
-          </a:prstGeom>
-          <a:noFill/>
-          <a:ln/>
-        </p:spPr>
-        <p:txBody>
-          <a:bodyPr wrap="square" rtlCol="0" anchor="t"/>
-          <a:lstStyle/>
-          <a:p>
-            <a:pPr marL="342900" indent="-342900">
-              <a:spcAft>
-                <a:spcPts val="600"/>
-              </a:spcAft>
-              <a:buSzPct val="100000"/>
-              <a:buChar char="•"/>
-            </a:pPr>
-            <a:r>
-              <a:rPr lang="en-US" sz="1300" dirty="0">
-                <a:solidFill>
-                  <a:srgbClr val="3D3A36"/>
-                </a:solidFill>
-                <a:latin typeface="Calibri" pitchFamily="34" charset="0"/>
-                <a:ea typeface="Calibri" pitchFamily="34" charset="-122"/>
-                <a:cs typeface="Calibri" pitchFamily="34" charset="-120"/>
-              </a:rPr>
-              <a:t>Improper: numerator ≥ denominator (e.g. 7/4)</a:t>
-            </a:r>
-            <a:endParaRPr lang="en-US" sz="1300" dirty="0"/>
-          </a:p>
-          <a:p>
-            <a:pPr marL="342900" indent="-342900">
-              <a:spcAft>
-                <a:spcPts val="600"/>
-              </a:spcAft>
-              <a:buSzPct val="100000"/>
-              <a:buChar char="•"/>
-            </a:pPr>
-            <a:r>
-              <a:rPr lang="en-US" sz="1300" dirty="0">
-                <a:solidFill>
-                  <a:srgbClr val="3D3A36"/>
-                </a:solidFill>
-                <a:latin typeface="Calibri" pitchFamily="34" charset="0"/>
-                <a:ea typeface="Calibri" pitchFamily="34" charset="-122"/>
-                <a:cs typeface="Calibri" pitchFamily="34" charset="-120"/>
-              </a:rPr>
-              <a:t>Value is 1 or MORE</a:t>
-            </a:r>
-            <a:endParaRPr lang="en-US" sz="1300" dirty="0"/>
-          </a:p>
-          <a:p>
-            <a:pPr marL="342900" indent="-342900">
-              <a:spcAft>
-                <a:spcPts val="600"/>
-              </a:spcAft>
-              <a:buSzPct val="100000"/>
-              <a:buChar char="•"/>
-            </a:pPr>
-            <a:r>
-              <a:rPr lang="en-US" sz="1300" dirty="0">
-                <a:solidFill>
-                  <a:srgbClr val="3D3A36"/>
-                </a:solidFill>
-                <a:latin typeface="Calibri" pitchFamily="34" charset="0"/>
-                <a:ea typeface="Calibri" pitchFamily="34" charset="-122"/>
-                <a:cs typeface="Calibri" pitchFamily="34" charset="-120"/>
-              </a:rPr>
-              <a:t>Mixed number: whole + fraction (e.g. 1¾)</a:t>
-            </a:r>
-            <a:endParaRPr lang="en-US" sz="1300" dirty="0"/>
-          </a:p>
-          <a:p>
-            <a:pPr marL="342900" indent="-342900">
-              <a:spcAft>
-                <a:spcPts val="600"/>
-              </a:spcAft>
-              <a:buSzPct val="100000"/>
-              <a:buChar char="•"/>
-            </a:pPr>
-            <a:r>
-              <a:rPr lang="en-US" sz="1300" dirty="0">
-                <a:solidFill>
-                  <a:srgbClr val="3D3A36"/>
-                </a:solidFill>
-                <a:latin typeface="Calibri" pitchFamily="34" charset="0"/>
-                <a:ea typeface="Calibri" pitchFamily="34" charset="-122"/>
-                <a:cs typeface="Calibri" pitchFamily="34" charset="-120"/>
-              </a:rPr>
-              <a:t>Convert: 7/4 = 1 remainder 3 = 1¾</a:t>
-            </a:r>
-            <a:endParaRPr lang="en-US" sz="1300" dirty="0"/>
           </a:p>
         </p:txBody>
       </p:sp>
@@ -3412,47 +3279,7 @@
         <p:spPr>
           <a:xfrm>
             <a:off x="0" y="0"/>
-            <a:ext cx="9144000" cy="822960"/>
-          </a:xfrm>
-          <a:prstGeom prst="rect">
-            <a:avLst/>
-          </a:prstGeom>
-          <a:solidFill>
-            <a:srgbClr val="FFFFFF"/>
-          </a:solidFill>
-          <a:ln/>
-        </p:spPr>
-      </p:sp>
-      <p:sp>
-        <p:nvSpPr>
-          <p:cNvPr id="3" name="Shape 1"/>
-          <p:cNvSpPr/>
-          <p:nvPr/>
-        </p:nvSpPr>
-        <p:spPr>
-          <a:xfrm>
-            <a:off x="0" y="804672"/>
-            <a:ext cx="9144000" cy="27432"/>
-          </a:xfrm>
-          <a:prstGeom prst="rect">
-            <a:avLst/>
-          </a:prstGeom>
-          <a:solidFill>
-            <a:srgbClr val="E5E2DC"/>
-          </a:solidFill>
-          <a:ln/>
-        </p:spPr>
-      </p:sp>
-      <p:sp>
-        <p:nvSpPr>
-          <p:cNvPr id="4" name="Shape 2"/>
-          <p:cNvSpPr/>
-          <p:nvPr/>
-        </p:nvSpPr>
-        <p:spPr>
-          <a:xfrm>
-            <a:off x="548640" y="201168"/>
-            <a:ext cx="54864" cy="420624"/>
+            <a:ext cx="73152" cy="5148072"/>
           </a:xfrm>
           <a:prstGeom prst="rect">
             <a:avLst/>
@@ -3465,30 +3292,30 @@
       </p:sp>
       <p:sp>
         <p:nvSpPr>
-          <p:cNvPr id="5" name="Text 3"/>
-          <p:cNvSpPr/>
-          <p:nvPr/>
-        </p:nvSpPr>
-        <p:spPr>
-          <a:xfrm>
-            <a:off x="777240" y="137160"/>
-            <a:ext cx="7772400" cy="548640"/>
-          </a:xfrm>
-          <a:prstGeom prst="rect">
-            <a:avLst/>
-          </a:prstGeom>
-          <a:noFill/>
-          <a:ln/>
-        </p:spPr>
-        <p:txBody>
-          <a:bodyPr wrap="square" lIns="0" tIns="0" rIns="0" bIns="0" rtlCol="0" anchor="ctr"/>
+          <p:cNvPr id="3" name="Text 1"/>
+          <p:cNvSpPr/>
+          <p:nvPr/>
+        </p:nvSpPr>
+        <p:spPr>
+          <a:xfrm>
+            <a:off x="548640" y="274320"/>
+            <a:ext cx="9144000" cy="640080"/>
+          </a:xfrm>
+          <a:prstGeom prst="rect">
+            <a:avLst/>
+          </a:prstGeom>
+          <a:noFill/>
+          <a:ln/>
+        </p:spPr>
+        <p:txBody>
+          <a:bodyPr wrap="square" rtlCol="0" anchor="ctr"/>
           <a:lstStyle/>
           <a:p>
             <a:pPr indent="0" marL="0">
               <a:buNone/>
             </a:pPr>
             <a:r>
-              <a:rPr lang="en-US" sz="2000" b="1" dirty="0">
+              <a:rPr lang="en-US" sz="2400" b="1" dirty="0">
                 <a:solidFill>
                   <a:srgbClr val="1B2A4A"/>
                 </a:solidFill>
@@ -3496,22 +3323,42 @@
                 <a:ea typeface="Georgia" pitchFamily="34" charset="-122"/>
                 <a:cs typeface="Georgia" pitchFamily="34" charset="-120"/>
               </a:rPr>
-              <a:t>Converting Between Improper and Mixed</a:t>
-            </a:r>
-            <a:endParaRPr lang="en-US" sz="2000" dirty="0"/>
-          </a:p>
-        </p:txBody>
-      </p:sp>
-      <p:sp>
-        <p:nvSpPr>
-          <p:cNvPr id="6" name="Text 4"/>
-          <p:cNvSpPr/>
-          <p:nvPr/>
-        </p:nvSpPr>
-        <p:spPr>
-          <a:xfrm>
-            <a:off x="731520" y="1051560"/>
-            <a:ext cx="7680960" cy="3108960"/>
+              <a:t>Comparing Fractions</a:t>
+            </a:r>
+            <a:endParaRPr lang="en-US" sz="2400" dirty="0"/>
+          </a:p>
+        </p:txBody>
+      </p:sp>
+      <p:sp>
+        <p:nvSpPr>
+          <p:cNvPr id="4" name="Shape 2"/>
+          <p:cNvSpPr/>
+          <p:nvPr/>
+        </p:nvSpPr>
+        <p:spPr>
+          <a:xfrm>
+            <a:off x="548640" y="960120"/>
+            <a:ext cx="2286000" cy="36576"/>
+          </a:xfrm>
+          <a:prstGeom prst="rect">
+            <a:avLst/>
+          </a:prstGeom>
+          <a:solidFill>
+            <a:srgbClr val="2A9D8F"/>
+          </a:solidFill>
+          <a:ln/>
+        </p:spPr>
+      </p:sp>
+      <p:sp>
+        <p:nvSpPr>
+          <p:cNvPr id="5" name="Text 3"/>
+          <p:cNvSpPr/>
+          <p:nvPr/>
+        </p:nvSpPr>
+        <p:spPr>
+          <a:xfrm>
+            <a:off x="548640" y="1188720"/>
+            <a:ext cx="10058400" cy="3474720"/>
           </a:xfrm>
           <a:prstGeom prst="rect">
             <a:avLst/>
@@ -3523,189 +3370,114 @@
           <a:bodyPr wrap="square" rtlCol="0" anchor="t"/>
           <a:lstStyle/>
           <a:p>
-            <a:pPr marL="342900" indent="-342900">
+            <a:pPr>
+              <a:lnSpc>
+                <a:spcPct val="150000"/>
+              </a:lnSpc>
               <a:spcAft>
-                <a:spcPts val="800"/>
+                <a:spcPts val="600"/>
               </a:spcAft>
-              <a:buSzPct val="100000"/>
-              <a:buChar char="•"/>
             </a:pPr>
             <a:r>
               <a:rPr lang="en-US" sz="1500" dirty="0">
                 <a:solidFill>
                   <a:srgbClr val="3D3A36"/>
                 </a:solidFill>
-                <a:latin typeface="Calibri" pitchFamily="34" charset="0"/>
-                <a:ea typeface="Calibri" pitchFamily="34" charset="-122"/>
-                <a:cs typeface="Calibri" pitchFamily="34" charset="-120"/>
-              </a:rPr>
-              <a:t>Improper → Mixed: divide numerator by denominator.</a:t>
+                <a:latin typeface="Arial" pitchFamily="34" charset="0"/>
+                <a:ea typeface="Arial" pitchFamily="34" charset="-122"/>
+                <a:cs typeface="Arial" pitchFamily="34" charset="-120"/>
+              </a:rPr>
+              <a:t>Same denominator: compare numerators directly. ³⁄₈ &lt; ⁵⁄₈.</a:t>
             </a:r>
             <a:endParaRPr lang="en-US" sz="1500" dirty="0"/>
           </a:p>
           <a:p>
-            <a:pPr marL="342900" indent="-342900">
+            <a:pPr>
+              <a:lnSpc>
+                <a:spcPct val="150000"/>
+              </a:lnSpc>
               <a:spcAft>
-                <a:spcPts val="800"/>
+                <a:spcPts val="600"/>
               </a:spcAft>
-              <a:buSzPct val="100000"/>
-              <a:buChar char="•"/>
             </a:pPr>
             <a:r>
               <a:rPr lang="en-US" sz="1500" dirty="0">
                 <a:solidFill>
                   <a:srgbClr val="3D3A36"/>
                 </a:solidFill>
-                <a:latin typeface="Calibri" pitchFamily="34" charset="0"/>
-                <a:ea typeface="Calibri" pitchFamily="34" charset="-122"/>
-                <a:cs typeface="Calibri" pitchFamily="34" charset="-120"/>
-              </a:rPr>
-              <a:t>Example: 11/3 → 11 ÷ 3 = 3 remainder 2 → 3⅔.</a:t>
+                <a:latin typeface="Arial" pitchFamily="34" charset="0"/>
+                <a:ea typeface="Arial" pitchFamily="34" charset="-122"/>
+                <a:cs typeface="Arial" pitchFamily="34" charset="-120"/>
+              </a:rPr>
+              <a:t>Different denominators: find a common denominator first.</a:t>
             </a:r>
             <a:endParaRPr lang="en-US" sz="1500" dirty="0"/>
           </a:p>
           <a:p>
-            <a:pPr marL="342900" indent="-342900">
+            <a:pPr>
+              <a:lnSpc>
+                <a:spcPct val="150000"/>
+              </a:lnSpc>
               <a:spcAft>
-                <a:spcPts val="800"/>
+                <a:spcPts val="600"/>
               </a:spcAft>
-              <a:buSzPct val="100000"/>
-              <a:buChar char="•"/>
             </a:pPr>
             <a:r>
               <a:rPr lang="en-US" sz="1500" dirty="0">
                 <a:solidFill>
                   <a:srgbClr val="3D3A36"/>
                 </a:solidFill>
-                <a:latin typeface="Calibri" pitchFamily="34" charset="0"/>
-                <a:ea typeface="Calibri" pitchFamily="34" charset="-122"/>
-                <a:cs typeface="Calibri" pitchFamily="34" charset="-120"/>
-              </a:rPr>
-              <a:t>Mixed → Improper: multiply whole × denominator + numerator.</a:t>
+                <a:latin typeface="Arial" pitchFamily="34" charset="0"/>
+                <a:ea typeface="Arial" pitchFamily="34" charset="-122"/>
+                <a:cs typeface="Arial" pitchFamily="34" charset="-120"/>
+              </a:rPr>
+              <a:t>Example: compare ²⁄₃ and ³⁄₄.</a:t>
             </a:r>
             <a:endParaRPr lang="en-US" sz="1500" dirty="0"/>
           </a:p>
           <a:p>
-            <a:pPr marL="342900" indent="-342900">
+            <a:pPr>
+              <a:lnSpc>
+                <a:spcPct val="150000"/>
+              </a:lnSpc>
               <a:spcAft>
-                <a:spcPts val="800"/>
+                <a:spcPts val="600"/>
               </a:spcAft>
-              <a:buSzPct val="100000"/>
-              <a:buChar char="•"/>
             </a:pPr>
             <a:r>
               <a:rPr lang="en-US" sz="1500" dirty="0">
                 <a:solidFill>
                   <a:srgbClr val="3D3A36"/>
                 </a:solidFill>
-                <a:latin typeface="Calibri" pitchFamily="34" charset="0"/>
-                <a:ea typeface="Calibri" pitchFamily="34" charset="-122"/>
-                <a:cs typeface="Calibri" pitchFamily="34" charset="-120"/>
-              </a:rPr>
-              <a:t>Example: 2¾ → (2 × 4) + 3 = 11 → 11/4.</a:t>
+                <a:latin typeface="Arial" pitchFamily="34" charset="0"/>
+                <a:ea typeface="Arial" pitchFamily="34" charset="-122"/>
+                <a:cs typeface="Arial" pitchFamily="34" charset="-120"/>
+              </a:rPr>
+              <a:t>Common denominator = 12: ⁸⁄₁₂ vs ⁹⁄₁₂ → ²⁄₃ &lt; ³⁄₄.</a:t>
             </a:r>
             <a:endParaRPr lang="en-US" sz="1500" dirty="0"/>
           </a:p>
           <a:p>
-            <a:pPr marL="342900" indent="-342900">
+            <a:pPr>
+              <a:lnSpc>
+                <a:spcPct val="150000"/>
+              </a:lnSpc>
               <a:spcAft>
-                <a:spcPts val="800"/>
+                <a:spcPts val="600"/>
               </a:spcAft>
-              <a:buSzPct val="100000"/>
-              <a:buChar char="•"/>
             </a:pPr>
             <a:r>
               <a:rPr lang="en-US" sz="1500" dirty="0">
                 <a:solidFill>
                   <a:srgbClr val="3D3A36"/>
                 </a:solidFill>
-                <a:latin typeface="Calibri" pitchFamily="34" charset="0"/>
-                <a:ea typeface="Calibri" pitchFamily="34" charset="-122"/>
-                <a:cs typeface="Calibri" pitchFamily="34" charset="-120"/>
-              </a:rPr>
-              <a:t>You MUST be able to do both conversions for assessments.</a:t>
+                <a:latin typeface="Arial" pitchFamily="34" charset="0"/>
+                <a:ea typeface="Arial" pitchFamily="34" charset="-122"/>
+                <a:cs typeface="Arial" pitchFamily="34" charset="-120"/>
+              </a:rPr>
+              <a:t>Benchmark: compare both to ½ to get a quick estimate.</a:t>
             </a:r>
             <a:endParaRPr lang="en-US" sz="1500" dirty="0"/>
-          </a:p>
-        </p:txBody>
-      </p:sp>
-      <p:sp>
-        <p:nvSpPr>
-          <p:cNvPr id="7" name="Shape 5"/>
-          <p:cNvSpPr/>
-          <p:nvPr/>
-        </p:nvSpPr>
-        <p:spPr>
-          <a:xfrm>
-            <a:off x="731520" y="4206240"/>
-            <a:ext cx="7680960" cy="640080"/>
-          </a:xfrm>
-          <a:prstGeom prst="rect">
-            <a:avLst/>
-          </a:prstGeom>
-          <a:solidFill>
-            <a:srgbClr val="E8F5F3"/>
-          </a:solidFill>
-          <a:ln/>
-          <a:effectLst>
-            <a:outerShdw sx="100000" sy="100000" kx="0" ky="0" algn="bl" rotWithShape="0" blurRad="50800" dist="25400" dir="8100000">
-              <a:srgbClr val="000000">
-                <a:alpha val="10000"/>
-              </a:srgbClr>
-            </a:outerShdw>
-          </a:effectLst>
-        </p:spPr>
-      </p:sp>
-      <p:sp>
-        <p:nvSpPr>
-          <p:cNvPr id="8" name="Text 6"/>
-          <p:cNvSpPr/>
-          <p:nvPr/>
-        </p:nvSpPr>
-        <p:spPr>
-          <a:xfrm>
-            <a:off x="914400" y="4251960"/>
-            <a:ext cx="7315200" cy="548640"/>
-          </a:xfrm>
-          <a:prstGeom prst="rect">
-            <a:avLst/>
-          </a:prstGeom>
-          <a:noFill/>
-          <a:ln/>
-        </p:spPr>
-        <p:txBody>
-          <a:bodyPr wrap="square" rtlCol="0" anchor="ctr"/>
-          <a:lstStyle/>
-          <a:p>
-            <a:pPr indent="0" marL="0">
-              <a:buNone/>
-            </a:pPr>
-            <a:r>
-              <a:rPr lang="en-US" sz="1200" b="1" dirty="0">
-                <a:solidFill>
-                  <a:srgbClr val="2A9D8F"/>
-                </a:solidFill>
-                <a:latin typeface="Calibri" pitchFamily="34" charset="0"/>
-                <a:ea typeface="Calibri" pitchFamily="34" charset="-122"/>
-                <a:cs typeface="Calibri" pitchFamily="34" charset="-120"/>
-              </a:rPr>
-              <a:t>Key Idea: </a:t>
-            </a:r>
-            <a:pPr indent="0" marL="0">
-              <a:buNone/>
-            </a:pPr>
-            <a:r>
-              <a:rPr lang="en-US" sz="1200" i="1" dirty="0">
-                <a:solidFill>
-                  <a:srgbClr val="3D3A36"/>
-                </a:solidFill>
-                <a:latin typeface="Calibri" pitchFamily="34" charset="0"/>
-                <a:ea typeface="Calibri" pitchFamily="34" charset="-122"/>
-                <a:cs typeface="Calibri" pitchFamily="34" charset="-120"/>
-              </a:rPr>
-              <a:t>Improper fractions and mixed numbers show the SAME amount — just written differently.</a:t>
-            </a:r>
-            <a:endParaRPr lang="en-US" sz="1200" dirty="0"/>
           </a:p>
         </p:txBody>
       </p:sp>
@@ -3750,47 +3522,7 @@
         <p:spPr>
           <a:xfrm>
             <a:off x="0" y="0"/>
-            <a:ext cx="9144000" cy="822960"/>
-          </a:xfrm>
-          <a:prstGeom prst="rect">
-            <a:avLst/>
-          </a:prstGeom>
-          <a:solidFill>
-            <a:srgbClr val="FFFFFF"/>
-          </a:solidFill>
-          <a:ln/>
-        </p:spPr>
-      </p:sp>
-      <p:sp>
-        <p:nvSpPr>
-          <p:cNvPr id="3" name="Shape 1"/>
-          <p:cNvSpPr/>
-          <p:nvPr/>
-        </p:nvSpPr>
-        <p:spPr>
-          <a:xfrm>
-            <a:off x="0" y="804672"/>
-            <a:ext cx="9144000" cy="27432"/>
-          </a:xfrm>
-          <a:prstGeom prst="rect">
-            <a:avLst/>
-          </a:prstGeom>
-          <a:solidFill>
-            <a:srgbClr val="E5E2DC"/>
-          </a:solidFill>
-          <a:ln/>
-        </p:spPr>
-      </p:sp>
-      <p:sp>
-        <p:nvSpPr>
-          <p:cNvPr id="4" name="Shape 2"/>
-          <p:cNvSpPr/>
-          <p:nvPr/>
-        </p:nvSpPr>
-        <p:spPr>
-          <a:xfrm>
-            <a:off x="548640" y="201168"/>
-            <a:ext cx="54864" cy="420624"/>
+            <a:ext cx="73152" cy="5148072"/>
           </a:xfrm>
           <a:prstGeom prst="rect">
             <a:avLst/>
@@ -3803,30 +3535,30 @@
       </p:sp>
       <p:sp>
         <p:nvSpPr>
-          <p:cNvPr id="5" name="Text 3"/>
-          <p:cNvSpPr/>
-          <p:nvPr/>
-        </p:nvSpPr>
-        <p:spPr>
-          <a:xfrm>
-            <a:off x="777240" y="137160"/>
-            <a:ext cx="7772400" cy="548640"/>
-          </a:xfrm>
-          <a:prstGeom prst="rect">
-            <a:avLst/>
-          </a:prstGeom>
-          <a:noFill/>
-          <a:ln/>
-        </p:spPr>
-        <p:txBody>
-          <a:bodyPr wrap="square" lIns="0" tIns="0" rIns="0" bIns="0" rtlCol="0" anchor="ctr"/>
+          <p:cNvPr id="3" name="Text 1"/>
+          <p:cNvSpPr/>
+          <p:nvPr/>
+        </p:nvSpPr>
+        <p:spPr>
+          <a:xfrm>
+            <a:off x="548640" y="274320"/>
+            <a:ext cx="9144000" cy="640080"/>
+          </a:xfrm>
+          <a:prstGeom prst="rect">
+            <a:avLst/>
+          </a:prstGeom>
+          <a:noFill/>
+          <a:ln/>
+        </p:spPr>
+        <p:txBody>
+          <a:bodyPr wrap="square" rtlCol="0" anchor="ctr"/>
           <a:lstStyle/>
           <a:p>
             <a:pPr indent="0" marL="0">
               <a:buNone/>
             </a:pPr>
             <a:r>
-              <a:rPr lang="en-US" sz="2000" b="1" dirty="0">
+              <a:rPr lang="en-US" sz="2400" b="1" dirty="0">
                 <a:solidFill>
                   <a:srgbClr val="1B2A4A"/>
                 </a:solidFill>
@@ -3836,40 +3568,40 @@
               </a:rPr>
               <a:t>Check Your Understanding</a:t>
             </a:r>
-            <a:endParaRPr lang="en-US" sz="2000" dirty="0"/>
-          </a:p>
-        </p:txBody>
-      </p:sp>
-      <p:sp>
-        <p:nvSpPr>
-          <p:cNvPr id="6" name="Shape 4"/>
-          <p:cNvSpPr/>
-          <p:nvPr/>
-        </p:nvSpPr>
-        <p:spPr>
-          <a:xfrm>
-            <a:off x="731520" y="1051560"/>
-            <a:ext cx="7680960" cy="438912"/>
+            <a:endParaRPr lang="en-US" sz="2400" dirty="0"/>
+          </a:p>
+        </p:txBody>
+      </p:sp>
+      <p:sp>
+        <p:nvSpPr>
+          <p:cNvPr id="4" name="Shape 2"/>
+          <p:cNvSpPr/>
+          <p:nvPr/>
+        </p:nvSpPr>
+        <p:spPr>
+          <a:xfrm>
+            <a:off x="548640" y="960120"/>
+            <a:ext cx="2286000" cy="36576"/>
           </a:xfrm>
           <a:prstGeom prst="rect">
             <a:avLst/>
           </a:prstGeom>
           <a:solidFill>
-            <a:srgbClr val="FFFFFF"/>
+            <a:srgbClr val="2A9D8F"/>
           </a:solidFill>
           <a:ln/>
         </p:spPr>
       </p:sp>
       <p:sp>
         <p:nvSpPr>
-          <p:cNvPr id="7" name="Text 5"/>
-          <p:cNvSpPr/>
-          <p:nvPr/>
-        </p:nvSpPr>
-        <p:spPr>
-          <a:xfrm>
-            <a:off x="868680" y="1051560"/>
-            <a:ext cx="320040" cy="438912"/>
+          <p:cNvPr id="5" name="Text 3"/>
+          <p:cNvSpPr/>
+          <p:nvPr/>
+        </p:nvSpPr>
+        <p:spPr>
+          <a:xfrm>
+            <a:off x="548640" y="1188720"/>
+            <a:ext cx="365760" cy="457200"/>
           </a:xfrm>
           <a:prstGeom prst="rect">
             <a:avLst/>
@@ -3885,12 +3617,57 @@
               <a:buNone/>
             </a:pPr>
             <a:r>
+              <a:rPr lang="en-US" sz="1600" dirty="0">
+                <a:solidFill>
+                  <a:srgbClr val="2A9D8F"/>
+                </a:solidFill>
+                <a:latin typeface="Arial" pitchFamily="34" charset="0"/>
+                <a:ea typeface="Arial" pitchFamily="34" charset="-122"/>
+                <a:cs typeface="Arial" pitchFamily="34" charset="-120"/>
+              </a:rPr>
+              <a:t>☐</a:t>
+            </a:r>
+            <a:endParaRPr lang="en-US" sz="1600" dirty="0"/>
+          </a:p>
+        </p:txBody>
+      </p:sp>
+      <p:sp>
+        <p:nvSpPr>
+          <p:cNvPr id="6" name="Text 4"/>
+          <p:cNvSpPr/>
+          <p:nvPr/>
+        </p:nvSpPr>
+        <p:spPr>
+          <a:xfrm>
+            <a:off x="1005840" y="1188720"/>
+            <a:ext cx="9601200" cy="457200"/>
+          </a:xfrm>
+          <a:prstGeom prst="rect">
+            <a:avLst/>
+          </a:prstGeom>
+          <a:noFill/>
+          <a:ln/>
+        </p:spPr>
+        <p:txBody>
+          <a:bodyPr wrap="square" rtlCol="0" anchor="ctr"/>
+          <a:lstStyle/>
+          <a:p>
+            <a:pPr indent="0" marL="0">
+              <a:lnSpc>
+                <a:spcPct val="130000"/>
+              </a:lnSpc>
+              <a:buNone/>
+            </a:pPr>
+            <a:r>
               <a:rPr lang="en-US" sz="1400" dirty="0">
                 <a:solidFill>
-                  <a:srgbClr val="2A9D8F"/>
-                </a:solidFill>
-              </a:rPr>
-              <a:t>☐</a:t>
+                  <a:srgbClr val="3D3A36"/>
+                </a:solidFill>
+                <a:latin typeface="Arial" pitchFamily="34" charset="0"/>
+                <a:ea typeface="Arial" pitchFamily="34" charset="-122"/>
+                <a:cs typeface="Arial" pitchFamily="34" charset="-120"/>
+              </a:rPr>
+              <a:t>I can identify the numerator and denominator.</a:t>
             </a:r>
             <a:endParaRPr lang="en-US" sz="1400" dirty="0"/>
           </a:p>
@@ -3898,14 +3675,14 @@
       </p:sp>
       <p:sp>
         <p:nvSpPr>
-          <p:cNvPr id="8" name="Text 6"/>
-          <p:cNvSpPr/>
-          <p:nvPr/>
-        </p:nvSpPr>
-        <p:spPr>
-          <a:xfrm>
-            <a:off x="1234440" y="1051560"/>
-            <a:ext cx="6949440" cy="438912"/>
+          <p:cNvPr id="7" name="Text 5"/>
+          <p:cNvSpPr/>
+          <p:nvPr/>
+        </p:nvSpPr>
+        <p:spPr>
+          <a:xfrm>
+            <a:off x="548640" y="1783080"/>
+            <a:ext cx="365760" cy="457200"/>
           </a:xfrm>
           <a:prstGeom prst="rect">
             <a:avLst/>
@@ -3921,50 +3698,72 @@
               <a:buNone/>
             </a:pPr>
             <a:r>
-              <a:rPr lang="en-US" sz="1300" dirty="0">
+              <a:rPr lang="en-US" sz="1600" dirty="0">
+                <a:solidFill>
+                  <a:srgbClr val="2A9D8F"/>
+                </a:solidFill>
+                <a:latin typeface="Arial" pitchFamily="34" charset="0"/>
+                <a:ea typeface="Arial" pitchFamily="34" charset="-122"/>
+                <a:cs typeface="Arial" pitchFamily="34" charset="-120"/>
+              </a:rPr>
+              <a:t>☐</a:t>
+            </a:r>
+            <a:endParaRPr lang="en-US" sz="1600" dirty="0"/>
+          </a:p>
+        </p:txBody>
+      </p:sp>
+      <p:sp>
+        <p:nvSpPr>
+          <p:cNvPr id="8" name="Text 6"/>
+          <p:cNvSpPr/>
+          <p:nvPr/>
+        </p:nvSpPr>
+        <p:spPr>
+          <a:xfrm>
+            <a:off x="1005840" y="1783080"/>
+            <a:ext cx="9601200" cy="457200"/>
+          </a:xfrm>
+          <a:prstGeom prst="rect">
+            <a:avLst/>
+          </a:prstGeom>
+          <a:noFill/>
+          <a:ln/>
+        </p:spPr>
+        <p:txBody>
+          <a:bodyPr wrap="square" rtlCol="0" anchor="ctr"/>
+          <a:lstStyle/>
+          <a:p>
+            <a:pPr indent="0" marL="0">
+              <a:lnSpc>
+                <a:spcPct val="130000"/>
+              </a:lnSpc>
+              <a:buNone/>
+            </a:pPr>
+            <a:r>
+              <a:rPr lang="en-US" sz="1400" dirty="0">
                 <a:solidFill>
                   <a:srgbClr val="3D3A36"/>
                 </a:solidFill>
-                <a:latin typeface="Calibri" pitchFamily="34" charset="0"/>
-                <a:ea typeface="Calibri" pitchFamily="34" charset="-122"/>
-                <a:cs typeface="Calibri" pitchFamily="34" charset="-120"/>
-              </a:rPr>
-              <a:t>I understand what numerator and denominator mean</a:t>
-            </a:r>
-            <a:endParaRPr lang="en-US" sz="1300" dirty="0"/>
-          </a:p>
-        </p:txBody>
-      </p:sp>
-      <p:sp>
-        <p:nvSpPr>
-          <p:cNvPr id="9" name="Shape 7"/>
-          <p:cNvSpPr/>
-          <p:nvPr/>
-        </p:nvSpPr>
-        <p:spPr>
-          <a:xfrm>
-            <a:off x="731520" y="1554480"/>
-            <a:ext cx="7680960" cy="438912"/>
-          </a:xfrm>
-          <a:prstGeom prst="rect">
-            <a:avLst/>
-          </a:prstGeom>
-          <a:solidFill>
-            <a:srgbClr val="F8F6F3"/>
-          </a:solidFill>
-          <a:ln/>
-        </p:spPr>
-      </p:sp>
-      <p:sp>
-        <p:nvSpPr>
-          <p:cNvPr id="10" name="Text 8"/>
-          <p:cNvSpPr/>
-          <p:nvPr/>
-        </p:nvSpPr>
-        <p:spPr>
-          <a:xfrm>
-            <a:off x="868680" y="1554480"/>
-            <a:ext cx="320040" cy="438912"/>
+                <a:latin typeface="Arial" pitchFamily="34" charset="0"/>
+                <a:ea typeface="Arial" pitchFamily="34" charset="-122"/>
+                <a:cs typeface="Arial" pitchFamily="34" charset="-120"/>
+              </a:rPr>
+              <a:t>I can convert between mixed numbers and improper fractions.</a:t>
+            </a:r>
+            <a:endParaRPr lang="en-US" sz="1400" dirty="0"/>
+          </a:p>
+        </p:txBody>
+      </p:sp>
+      <p:sp>
+        <p:nvSpPr>
+          <p:cNvPr id="9" name="Text 7"/>
+          <p:cNvSpPr/>
+          <p:nvPr/>
+        </p:nvSpPr>
+        <p:spPr>
+          <a:xfrm>
+            <a:off x="548640" y="2377440"/>
+            <a:ext cx="365760" cy="457200"/>
           </a:xfrm>
           <a:prstGeom prst="rect">
             <a:avLst/>
@@ -3980,12 +3779,57 @@
               <a:buNone/>
             </a:pPr>
             <a:r>
+              <a:rPr lang="en-US" sz="1600" dirty="0">
+                <a:solidFill>
+                  <a:srgbClr val="2A9D8F"/>
+                </a:solidFill>
+                <a:latin typeface="Arial" pitchFamily="34" charset="0"/>
+                <a:ea typeface="Arial" pitchFamily="34" charset="-122"/>
+                <a:cs typeface="Arial" pitchFamily="34" charset="-120"/>
+              </a:rPr>
+              <a:t>☐</a:t>
+            </a:r>
+            <a:endParaRPr lang="en-US" sz="1600" dirty="0"/>
+          </a:p>
+        </p:txBody>
+      </p:sp>
+      <p:sp>
+        <p:nvSpPr>
+          <p:cNvPr id="10" name="Text 8"/>
+          <p:cNvSpPr/>
+          <p:nvPr/>
+        </p:nvSpPr>
+        <p:spPr>
+          <a:xfrm>
+            <a:off x="1005840" y="2377440"/>
+            <a:ext cx="9601200" cy="457200"/>
+          </a:xfrm>
+          <a:prstGeom prst="rect">
+            <a:avLst/>
+          </a:prstGeom>
+          <a:noFill/>
+          <a:ln/>
+        </p:spPr>
+        <p:txBody>
+          <a:bodyPr wrap="square" rtlCol="0" anchor="ctr"/>
+          <a:lstStyle/>
+          <a:p>
+            <a:pPr indent="0" marL="0">
+              <a:lnSpc>
+                <a:spcPct val="130000"/>
+              </a:lnSpc>
+              <a:buNone/>
+            </a:pPr>
+            <a:r>
               <a:rPr lang="en-US" sz="1400" dirty="0">
                 <a:solidFill>
-                  <a:srgbClr val="2A9D8F"/>
-                </a:solidFill>
-              </a:rPr>
-              <a:t>☐</a:t>
+                  <a:srgbClr val="3D3A36"/>
+                </a:solidFill>
+                <a:latin typeface="Arial" pitchFamily="34" charset="0"/>
+                <a:ea typeface="Arial" pitchFamily="34" charset="-122"/>
+                <a:cs typeface="Arial" pitchFamily="34" charset="-120"/>
+              </a:rPr>
+              <a:t>I can compare fractions with different denominators.</a:t>
             </a:r>
             <a:endParaRPr lang="en-US" sz="1400" dirty="0"/>
           </a:p>
@@ -3999,8 +3843,8 @@
         </p:nvSpPr>
         <p:spPr>
           <a:xfrm>
-            <a:off x="1234440" y="1554480"/>
-            <a:ext cx="6949440" cy="438912"/>
+            <a:off x="548640" y="2971800"/>
+            <a:ext cx="365760" cy="457200"/>
           </a:xfrm>
           <a:prstGeom prst="rect">
             <a:avLst/>
@@ -4016,382 +3860,59 @@
               <a:buNone/>
             </a:pPr>
             <a:r>
-              <a:rPr lang="en-US" sz="1300" dirty="0">
+              <a:rPr lang="en-US" sz="1600" dirty="0">
+                <a:solidFill>
+                  <a:srgbClr val="2A9D8F"/>
+                </a:solidFill>
+                <a:latin typeface="Arial" pitchFamily="34" charset="0"/>
+                <a:ea typeface="Arial" pitchFamily="34" charset="-122"/>
+                <a:cs typeface="Arial" pitchFamily="34" charset="-120"/>
+              </a:rPr>
+              <a:t>☐</a:t>
+            </a:r>
+            <a:endParaRPr lang="en-US" sz="1600" dirty="0"/>
+          </a:p>
+        </p:txBody>
+      </p:sp>
+      <p:sp>
+        <p:nvSpPr>
+          <p:cNvPr id="12" name="Text 10"/>
+          <p:cNvSpPr/>
+          <p:nvPr/>
+        </p:nvSpPr>
+        <p:spPr>
+          <a:xfrm>
+            <a:off x="1005840" y="2971800"/>
+            <a:ext cx="9601200" cy="457200"/>
+          </a:xfrm>
+          <a:prstGeom prst="rect">
+            <a:avLst/>
+          </a:prstGeom>
+          <a:noFill/>
+          <a:ln/>
+        </p:spPr>
+        <p:txBody>
+          <a:bodyPr wrap="square" rtlCol="0" anchor="ctr"/>
+          <a:lstStyle/>
+          <a:p>
+            <a:pPr indent="0" marL="0">
+              <a:lnSpc>
+                <a:spcPct val="130000"/>
+              </a:lnSpc>
+              <a:buNone/>
+            </a:pPr>
+            <a:r>
+              <a:rPr lang="en-US" sz="1400" dirty="0">
                 <a:solidFill>
                   <a:srgbClr val="3D3A36"/>
                 </a:solidFill>
-                <a:latin typeface="Calibri" pitchFamily="34" charset="0"/>
-                <a:ea typeface="Calibri" pitchFamily="34" charset="-122"/>
-                <a:cs typeface="Calibri" pitchFamily="34" charset="-120"/>
-              </a:rPr>
-              <a:t>I can identify proper, improper, and mixed number fractions</a:t>
-            </a:r>
-            <a:endParaRPr lang="en-US" sz="1300" dirty="0"/>
-          </a:p>
-        </p:txBody>
-      </p:sp>
-      <p:sp>
-        <p:nvSpPr>
-          <p:cNvPr id="12" name="Shape 10"/>
-          <p:cNvSpPr/>
-          <p:nvPr/>
-        </p:nvSpPr>
-        <p:spPr>
-          <a:xfrm>
-            <a:off x="731520" y="2057400"/>
-            <a:ext cx="7680960" cy="438912"/>
-          </a:xfrm>
-          <a:prstGeom prst="rect">
-            <a:avLst/>
-          </a:prstGeom>
-          <a:solidFill>
-            <a:srgbClr val="FFFFFF"/>
-          </a:solidFill>
-          <a:ln/>
-        </p:spPr>
-      </p:sp>
-      <p:sp>
-        <p:nvSpPr>
-          <p:cNvPr id="13" name="Text 11"/>
-          <p:cNvSpPr/>
-          <p:nvPr/>
-        </p:nvSpPr>
-        <p:spPr>
-          <a:xfrm>
-            <a:off x="868680" y="2057400"/>
-            <a:ext cx="320040" cy="438912"/>
-          </a:xfrm>
-          <a:prstGeom prst="rect">
-            <a:avLst/>
-          </a:prstGeom>
-          <a:noFill/>
-          <a:ln/>
-        </p:spPr>
-        <p:txBody>
-          <a:bodyPr wrap="square" rtlCol="0" anchor="ctr"/>
-          <a:lstStyle/>
-          <a:p>
-            <a:pPr indent="0" marL="0">
-              <a:buNone/>
-            </a:pPr>
-            <a:r>
-              <a:rPr lang="en-US" sz="1400" dirty="0">
-                <a:solidFill>
-                  <a:srgbClr val="2A9D8F"/>
-                </a:solidFill>
-              </a:rPr>
-              <a:t>☐</a:t>
+                <a:latin typeface="Arial" pitchFamily="34" charset="0"/>
+                <a:ea typeface="Arial" pitchFamily="34" charset="-122"/>
+                <a:cs typeface="Arial" pitchFamily="34" charset="-120"/>
+              </a:rPr>
+              <a:t>I can represent a fraction visually (shade a diagram).</a:t>
             </a:r>
             <a:endParaRPr lang="en-US" sz="1400" dirty="0"/>
-          </a:p>
-        </p:txBody>
-      </p:sp>
-      <p:sp>
-        <p:nvSpPr>
-          <p:cNvPr id="14" name="Text 12"/>
-          <p:cNvSpPr/>
-          <p:nvPr/>
-        </p:nvSpPr>
-        <p:spPr>
-          <a:xfrm>
-            <a:off x="1234440" y="2057400"/>
-            <a:ext cx="6949440" cy="438912"/>
-          </a:xfrm>
-          <a:prstGeom prst="rect">
-            <a:avLst/>
-          </a:prstGeom>
-          <a:noFill/>
-          <a:ln/>
-        </p:spPr>
-        <p:txBody>
-          <a:bodyPr wrap="square" rtlCol="0" anchor="ctr"/>
-          <a:lstStyle/>
-          <a:p>
-            <a:pPr indent="0" marL="0">
-              <a:buNone/>
-            </a:pPr>
-            <a:r>
-              <a:rPr lang="en-US" sz="1300" dirty="0">
-                <a:solidFill>
-                  <a:srgbClr val="3D3A36"/>
-                </a:solidFill>
-                <a:latin typeface="Calibri" pitchFamily="34" charset="0"/>
-                <a:ea typeface="Calibri" pitchFamily="34" charset="-122"/>
-                <a:cs typeface="Calibri" pitchFamily="34" charset="-120"/>
-              </a:rPr>
-              <a:t>I can convert between improper fractions and mixed numbers</a:t>
-            </a:r>
-            <a:endParaRPr lang="en-US" sz="1300" dirty="0"/>
-          </a:p>
-        </p:txBody>
-      </p:sp>
-      <p:sp>
-        <p:nvSpPr>
-          <p:cNvPr id="15" name="Shape 13"/>
-          <p:cNvSpPr/>
-          <p:nvPr/>
-        </p:nvSpPr>
-        <p:spPr>
-          <a:xfrm>
-            <a:off x="731520" y="2560320"/>
-            <a:ext cx="7680960" cy="438912"/>
-          </a:xfrm>
-          <a:prstGeom prst="rect">
-            <a:avLst/>
-          </a:prstGeom>
-          <a:solidFill>
-            <a:srgbClr val="F8F6F3"/>
-          </a:solidFill>
-          <a:ln/>
-        </p:spPr>
-      </p:sp>
-      <p:sp>
-        <p:nvSpPr>
-          <p:cNvPr id="16" name="Text 14"/>
-          <p:cNvSpPr/>
-          <p:nvPr/>
-        </p:nvSpPr>
-        <p:spPr>
-          <a:xfrm>
-            <a:off x="868680" y="2560320"/>
-            <a:ext cx="320040" cy="438912"/>
-          </a:xfrm>
-          <a:prstGeom prst="rect">
-            <a:avLst/>
-          </a:prstGeom>
-          <a:noFill/>
-          <a:ln/>
-        </p:spPr>
-        <p:txBody>
-          <a:bodyPr wrap="square" rtlCol="0" anchor="ctr"/>
-          <a:lstStyle/>
-          <a:p>
-            <a:pPr indent="0" marL="0">
-              <a:buNone/>
-            </a:pPr>
-            <a:r>
-              <a:rPr lang="en-US" sz="1400" dirty="0">
-                <a:solidFill>
-                  <a:srgbClr val="2A9D8F"/>
-                </a:solidFill>
-              </a:rPr>
-              <a:t>☐</a:t>
-            </a:r>
-            <a:endParaRPr lang="en-US" sz="1400" dirty="0"/>
-          </a:p>
-        </p:txBody>
-      </p:sp>
-      <p:sp>
-        <p:nvSpPr>
-          <p:cNvPr id="17" name="Text 15"/>
-          <p:cNvSpPr/>
-          <p:nvPr/>
-        </p:nvSpPr>
-        <p:spPr>
-          <a:xfrm>
-            <a:off x="1234440" y="2560320"/>
-            <a:ext cx="6949440" cy="438912"/>
-          </a:xfrm>
-          <a:prstGeom prst="rect">
-            <a:avLst/>
-          </a:prstGeom>
-          <a:noFill/>
-          <a:ln/>
-        </p:spPr>
-        <p:txBody>
-          <a:bodyPr wrap="square" rtlCol="0" anchor="ctr"/>
-          <a:lstStyle/>
-          <a:p>
-            <a:pPr indent="0" marL="0">
-              <a:buNone/>
-            </a:pPr>
-            <a:r>
-              <a:rPr lang="en-US" sz="1300" dirty="0">
-                <a:solidFill>
-                  <a:srgbClr val="3D3A36"/>
-                </a:solidFill>
-                <a:latin typeface="Calibri" pitchFamily="34" charset="0"/>
-                <a:ea typeface="Calibri" pitchFamily="34" charset="-122"/>
-                <a:cs typeface="Calibri" pitchFamily="34" charset="-120"/>
-              </a:rPr>
-              <a:t>I can represent fractions on a number line or diagram</a:t>
-            </a:r>
-            <a:endParaRPr lang="en-US" sz="1300" dirty="0"/>
-          </a:p>
-        </p:txBody>
-      </p:sp>
-      <p:sp>
-        <p:nvSpPr>
-          <p:cNvPr id="18" name="Shape 16"/>
-          <p:cNvSpPr/>
-          <p:nvPr/>
-        </p:nvSpPr>
-        <p:spPr>
-          <a:xfrm>
-            <a:off x="731520" y="3063240"/>
-            <a:ext cx="7680960" cy="438912"/>
-          </a:xfrm>
-          <a:prstGeom prst="rect">
-            <a:avLst/>
-          </a:prstGeom>
-          <a:solidFill>
-            <a:srgbClr val="FFFFFF"/>
-          </a:solidFill>
-          <a:ln/>
-        </p:spPr>
-      </p:sp>
-      <p:sp>
-        <p:nvSpPr>
-          <p:cNvPr id="19" name="Text 17"/>
-          <p:cNvSpPr/>
-          <p:nvPr/>
-        </p:nvSpPr>
-        <p:spPr>
-          <a:xfrm>
-            <a:off x="868680" y="3063240"/>
-            <a:ext cx="320040" cy="438912"/>
-          </a:xfrm>
-          <a:prstGeom prst="rect">
-            <a:avLst/>
-          </a:prstGeom>
-          <a:noFill/>
-          <a:ln/>
-        </p:spPr>
-        <p:txBody>
-          <a:bodyPr wrap="square" rtlCol="0" anchor="ctr"/>
-          <a:lstStyle/>
-          <a:p>
-            <a:pPr indent="0" marL="0">
-              <a:buNone/>
-            </a:pPr>
-            <a:r>
-              <a:rPr lang="en-US" sz="1400" dirty="0">
-                <a:solidFill>
-                  <a:srgbClr val="2A9D8F"/>
-                </a:solidFill>
-              </a:rPr>
-              <a:t>☐</a:t>
-            </a:r>
-            <a:endParaRPr lang="en-US" sz="1400" dirty="0"/>
-          </a:p>
-        </p:txBody>
-      </p:sp>
-      <p:sp>
-        <p:nvSpPr>
-          <p:cNvPr id="20" name="Text 18"/>
-          <p:cNvSpPr/>
-          <p:nvPr/>
-        </p:nvSpPr>
-        <p:spPr>
-          <a:xfrm>
-            <a:off x="1234440" y="3063240"/>
-            <a:ext cx="6949440" cy="438912"/>
-          </a:xfrm>
-          <a:prstGeom prst="rect">
-            <a:avLst/>
-          </a:prstGeom>
-          <a:noFill/>
-          <a:ln/>
-        </p:spPr>
-        <p:txBody>
-          <a:bodyPr wrap="square" rtlCol="0" anchor="ctr"/>
-          <a:lstStyle/>
-          <a:p>
-            <a:pPr indent="0" marL="0">
-              <a:buNone/>
-            </a:pPr>
-            <a:r>
-              <a:rPr lang="en-US" sz="1300" dirty="0">
-                <a:solidFill>
-                  <a:srgbClr val="3D3A36"/>
-                </a:solidFill>
-                <a:latin typeface="Calibri" pitchFamily="34" charset="0"/>
-                <a:ea typeface="Calibri" pitchFamily="34" charset="-122"/>
-                <a:cs typeface="Calibri" pitchFamily="34" charset="-120"/>
-              </a:rPr>
-              <a:t>I know that a fraction is another way of writing division</a:t>
-            </a:r>
-            <a:endParaRPr lang="en-US" sz="1300" dirty="0"/>
-          </a:p>
-        </p:txBody>
-      </p:sp>
-      <p:sp>
-        <p:nvSpPr>
-          <p:cNvPr id="21" name="Shape 19"/>
-          <p:cNvSpPr/>
-          <p:nvPr/>
-        </p:nvSpPr>
-        <p:spPr>
-          <a:xfrm>
-            <a:off x="731520" y="3749040"/>
-            <a:ext cx="7680960" cy="594360"/>
-          </a:xfrm>
-          <a:prstGeom prst="rect">
-            <a:avLst/>
-          </a:prstGeom>
-          <a:solidFill>
-            <a:srgbClr val="E8F5F3"/>
-          </a:solidFill>
-          <a:ln/>
-          <a:effectLst>
-            <a:outerShdw sx="100000" sy="100000" kx="0" ky="0" algn="bl" rotWithShape="0" blurRad="50800" dist="25400" dir="8100000">
-              <a:srgbClr val="000000">
-                <a:alpha val="10000"/>
-              </a:srgbClr>
-            </a:outerShdw>
-          </a:effectLst>
-        </p:spPr>
-      </p:sp>
-      <p:sp>
-        <p:nvSpPr>
-          <p:cNvPr id="22" name="Text 20"/>
-          <p:cNvSpPr/>
-          <p:nvPr/>
-        </p:nvSpPr>
-        <p:spPr>
-          <a:xfrm>
-            <a:off x="914400" y="3749040"/>
-            <a:ext cx="7315200" cy="594360"/>
-          </a:xfrm>
-          <a:prstGeom prst="rect">
-            <a:avLst/>
-          </a:prstGeom>
-          <a:noFill/>
-          <a:ln/>
-        </p:spPr>
-        <p:txBody>
-          <a:bodyPr wrap="square" rtlCol="0" anchor="ctr"/>
-          <a:lstStyle/>
-          <a:p>
-            <a:pPr indent="0" marL="0">
-              <a:buNone/>
-            </a:pPr>
-            <a:r>
-              <a:rPr lang="en-US" sz="1200" b="1" dirty="0">
-                <a:solidFill>
-                  <a:srgbClr val="2A9D8F"/>
-                </a:solidFill>
-                <a:latin typeface="Calibri" pitchFamily="34" charset="0"/>
-                <a:ea typeface="Calibri" pitchFamily="34" charset="-122"/>
-                <a:cs typeface="Calibri" pitchFamily="34" charset="-120"/>
-              </a:rPr>
-              <a:t>Key Idea: </a:t>
-            </a:r>
-            <a:pPr indent="0" marL="0">
-              <a:buNone/>
-            </a:pPr>
-            <a:r>
-              <a:rPr lang="en-US" sz="1200" i="1" dirty="0">
-                <a:solidFill>
-                  <a:srgbClr val="3D3A36"/>
-                </a:solidFill>
-                <a:latin typeface="Calibri" pitchFamily="34" charset="0"/>
-                <a:ea typeface="Calibri" pitchFamily="34" charset="-122"/>
-                <a:cs typeface="Calibri" pitchFamily="34" charset="-120"/>
-              </a:rPr>
-              <a:t>Fractions are everywhere — sharing pizza, measuring ingredients, reading music.</a:t>
-            </a:r>
-            <a:endParaRPr lang="en-US" sz="1200" dirty="0"/>
           </a:p>
         </p:txBody>
       </p:sp>
@@ -4406,6 +3927,13 @@
 <file path=ppt/slides/slide7.xml><?xml version="1.0" encoding="utf-8"?>
 <p:sld xmlns:a="http://schemas.openxmlformats.org/drawingml/2006/main" xmlns:r="http://schemas.openxmlformats.org/officeDocument/2006/relationships" xmlns:p="http://schemas.openxmlformats.org/presentationml/2006/main">
   <p:cSld name="Slide 7">
+    <p:bg>
+      <p:bgPr>
+        <a:solidFill>
+          <a:srgbClr val="111D35"/>
+        </a:solidFill>
+      </p:bgPr>
+    </p:bg>
     <p:spTree>
       <p:nvGrpSpPr>
         <p:cNvPr id="1" name=""/>
@@ -4422,76 +3950,14 @@
       </p:grpSpPr>
       <p:sp>
         <p:nvSpPr>
-          <p:cNvPr id="2" name="Shape 0"/>
-          <p:cNvSpPr/>
-          <p:nvPr/>
-        </p:nvSpPr>
-        <p:spPr>
-          <a:xfrm>
-            <a:off x="0" y="0"/>
-            <a:ext cx="9144000" cy="5143500"/>
-          </a:xfrm>
-          <a:prstGeom prst="rect">
-            <a:avLst/>
-          </a:prstGeom>
-          <a:solidFill>
-            <a:srgbClr val="1B2A4A"/>
-          </a:solidFill>
-          <a:ln/>
-        </p:spPr>
-      </p:sp>
-      <p:sp>
-        <p:nvSpPr>
-          <p:cNvPr id="3" name="Shape 1"/>
-          <p:cNvSpPr/>
-          <p:nvPr/>
-        </p:nvSpPr>
-        <p:spPr>
-          <a:xfrm>
-            <a:off x="0" y="4777740"/>
-            <a:ext cx="9144000" cy="365760"/>
-          </a:xfrm>
-          <a:prstGeom prst="rect">
-            <a:avLst/>
-          </a:prstGeom>
-          <a:solidFill>
-            <a:srgbClr val="2A9D8F"/>
-          </a:solidFill>
-          <a:ln/>
-        </p:spPr>
-      </p:sp>
-      <p:sp>
-        <p:nvSpPr>
-          <p:cNvPr id="4" name="Shape 2"/>
-          <p:cNvSpPr/>
-          <p:nvPr/>
-        </p:nvSpPr>
-        <p:spPr>
-          <a:xfrm>
-            <a:off x="-914400" y="-914400"/>
-            <a:ext cx="3657600" cy="3657600"/>
-          </a:xfrm>
-          <a:prstGeom prst="ellipse">
-            <a:avLst/>
-          </a:prstGeom>
-          <a:solidFill>
-            <a:srgbClr val="2A9D8F">
-              <a:alpha val="10000"/>
-            </a:srgbClr>
-          </a:solidFill>
-          <a:ln/>
-        </p:spPr>
-      </p:sp>
-      <p:sp>
-        <p:nvSpPr>
-          <p:cNvPr id="5" name="Text 3"/>
-          <p:cNvSpPr/>
-          <p:nvPr/>
-        </p:nvSpPr>
-        <p:spPr>
-          <a:xfrm>
-            <a:off x="731520" y="1463040"/>
-            <a:ext cx="7680960" cy="822960"/>
+          <p:cNvPr id="2" name="Text 0"/>
+          <p:cNvSpPr/>
+          <p:nvPr/>
+        </p:nvSpPr>
+        <p:spPr>
+          <a:xfrm>
+            <a:off x="731520" y="1371600"/>
+            <a:ext cx="9144000" cy="914400"/>
           </a:xfrm>
           <a:prstGeom prst="rect">
             <a:avLst/>
@@ -4503,11 +3969,11 @@
           <a:bodyPr wrap="square" rtlCol="0" anchor="ctr"/>
           <a:lstStyle/>
           <a:p>
-            <a:pPr algn="ctr" indent="0" marL="0">
+            <a:pPr indent="0" marL="0">
               <a:buNone/>
             </a:pPr>
             <a:r>
-              <a:rPr lang="en-US" sz="3400" b="1" dirty="0">
+              <a:rPr lang="en-US" sz="3200" b="1" dirty="0">
                 <a:solidFill>
                   <a:srgbClr val="FFFFFF"/>
                 </a:solidFill>
@@ -4517,20 +3983,20 @@
               </a:rPr>
               <a:t>Review &amp; Practise</a:t>
             </a:r>
-            <a:endParaRPr lang="en-US" sz="3400" dirty="0"/>
-          </a:p>
-        </p:txBody>
-      </p:sp>
-      <p:sp>
-        <p:nvSpPr>
-          <p:cNvPr id="6" name="Text 4"/>
-          <p:cNvSpPr/>
-          <p:nvPr/>
-        </p:nvSpPr>
-        <p:spPr>
-          <a:xfrm>
-            <a:off x="731520" y="2468880"/>
-            <a:ext cx="7680960" cy="457200"/>
+            <a:endParaRPr lang="en-US" sz="3200" dirty="0"/>
+          </a:p>
+        </p:txBody>
+      </p:sp>
+      <p:sp>
+        <p:nvSpPr>
+          <p:cNvPr id="3" name="Text 1"/>
+          <p:cNvSpPr/>
+          <p:nvPr/>
+        </p:nvSpPr>
+        <p:spPr>
+          <a:xfrm>
+            <a:off x="731520" y="2377440"/>
+            <a:ext cx="7315200" cy="548640"/>
           </a:xfrm>
           <a:prstGeom prst="rect">
             <a:avLst/>
@@ -4542,60 +4008,62 @@
           <a:bodyPr wrap="square" rtlCol="0" anchor="ctr"/>
           <a:lstStyle/>
           <a:p>
-            <a:pPr algn="ctr" indent="0" marL="0">
+            <a:pPr indent="0" marL="0">
               <a:buNone/>
             </a:pPr>
             <a:r>
-              <a:rPr lang="en-US" sz="1800" dirty="0">
-                <a:solidFill>
-                  <a:srgbClr val="2A9D8F"/>
-                </a:solidFill>
-                <a:latin typeface="Calibri" pitchFamily="34" charset="0"/>
-                <a:ea typeface="Calibri" pitchFamily="34" charset="-122"/>
-                <a:cs typeface="Calibri" pitchFamily="34" charset="-120"/>
+              <a:rPr lang="en-US" sz="1500" dirty="0">
+                <a:solidFill>
+                  <a:srgbClr val="FFFFFF">
+                    <a:alpha val="60000"/>
+                  </a:srgbClr>
+                </a:solidFill>
+                <a:latin typeface="Arial" pitchFamily="34" charset="0"/>
+                <a:ea typeface="Arial" pitchFamily="34" charset="-122"/>
+                <a:cs typeface="Arial" pitchFamily="34" charset="-120"/>
+              </a:rPr>
+              <a:t>Use the Self-Quiz, Review Games, and Practice Builder to test yourself.</a:t>
+            </a:r>
+            <a:endParaRPr lang="en-US" sz="1500" dirty="0"/>
+          </a:p>
+        </p:txBody>
+      </p:sp>
+      <p:sp>
+        <p:nvSpPr>
+          <p:cNvPr id="4" name="Text 2"/>
+          <p:cNvSpPr/>
+          <p:nvPr/>
+        </p:nvSpPr>
+        <p:spPr>
+          <a:xfrm>
+            <a:off x="731520" y="3291840"/>
+            <a:ext cx="3657600" cy="457200"/>
+          </a:xfrm>
+          <a:prstGeom prst="rect">
+            <a:avLst/>
+          </a:prstGeom>
+          <a:noFill/>
+          <a:ln/>
+        </p:spPr>
+        <p:txBody>
+          <a:bodyPr wrap="square" rtlCol="0" anchor="ctr"/>
+          <a:lstStyle/>
+          <a:p>
+            <a:pPr indent="0" marL="0">
+              <a:buNone/>
+            </a:pPr>
+            <a:r>
+              <a:rPr lang="en-US" sz="1800" b="1" dirty="0">
+                <a:solidFill>
+                  <a:srgbClr val="E9C46A"/>
+                </a:solidFill>
+                <a:latin typeface="Georgia" pitchFamily="34" charset="0"/>
+                <a:ea typeface="Georgia" pitchFamily="34" charset="-122"/>
+                <a:cs typeface="Georgia" pitchFamily="34" charset="-120"/>
               </a:rPr>
               <a:t>mrzocchi.com</a:t>
             </a:r>
             <a:endParaRPr lang="en-US" sz="1800" dirty="0"/>
-          </a:p>
-        </p:txBody>
-      </p:sp>
-      <p:sp>
-        <p:nvSpPr>
-          <p:cNvPr id="7" name="Text 5"/>
-          <p:cNvSpPr/>
-          <p:nvPr/>
-        </p:nvSpPr>
-        <p:spPr>
-          <a:xfrm>
-            <a:off x="731520" y="3108960"/>
-            <a:ext cx="7680960" cy="457200"/>
-          </a:xfrm>
-          <a:prstGeom prst="rect">
-            <a:avLst/>
-          </a:prstGeom>
-          <a:noFill/>
-          <a:ln/>
-        </p:spPr>
-        <p:txBody>
-          <a:bodyPr wrap="square" rtlCol="0" anchor="ctr"/>
-          <a:lstStyle/>
-          <a:p>
-            <a:pPr algn="ctr" indent="0" marL="0">
-              <a:buNone/>
-            </a:pPr>
-            <a:r>
-              <a:rPr lang="en-US" sz="1300" dirty="0">
-                <a:solidFill>
-                  <a:srgbClr val="9B9690"/>
-                </a:solidFill>
-                <a:latin typeface="Calibri" pitchFamily="34" charset="0"/>
-                <a:ea typeface="Calibri" pitchFamily="34" charset="-122"/>
-                <a:cs typeface="Calibri" pitchFamily="34" charset="-120"/>
-              </a:rPr>
-              <a:t>Use the Self-Quiz, Review Games, and Practice Builder to test yourself.</a:t>
-            </a:r>
-            <a:endParaRPr lang="en-US" sz="1300" dirty="0"/>
           </a:p>
         </p:txBody>
       </p:sp>
